--- a/assets/포트폴리오.pptx
+++ b/assets/포트폴리오.pptx
@@ -266,7 +266,7 @@
           <a:p>
             <a:fld id="{9DC73EDC-8575-4827-9ED9-A0D06AE9D014}" type="datetimeFigureOut">
               <a:rPr lang="ko-KR" altLang="en-US" smtClean="0"/>
-              <a:t>2026-04-03</a:t>
+              <a:t>2026-04-06</a:t>
             </a:fld>
             <a:endParaRPr lang="ko-KR" altLang="en-US"/>
           </a:p>
@@ -464,7 +464,7 @@
           <a:p>
             <a:fld id="{9DC73EDC-8575-4827-9ED9-A0D06AE9D014}" type="datetimeFigureOut">
               <a:rPr lang="ko-KR" altLang="en-US" smtClean="0"/>
-              <a:t>2026-04-03</a:t>
+              <a:t>2026-04-06</a:t>
             </a:fld>
             <a:endParaRPr lang="ko-KR" altLang="en-US"/>
           </a:p>
@@ -672,7 +672,7 @@
           <a:p>
             <a:fld id="{9DC73EDC-8575-4827-9ED9-A0D06AE9D014}" type="datetimeFigureOut">
               <a:rPr lang="ko-KR" altLang="en-US" smtClean="0"/>
-              <a:t>2026-04-03</a:t>
+              <a:t>2026-04-06</a:t>
             </a:fld>
             <a:endParaRPr lang="ko-KR" altLang="en-US"/>
           </a:p>
@@ -870,7 +870,7 @@
           <a:p>
             <a:fld id="{9DC73EDC-8575-4827-9ED9-A0D06AE9D014}" type="datetimeFigureOut">
               <a:rPr lang="ko-KR" altLang="en-US" smtClean="0"/>
-              <a:t>2026-04-03</a:t>
+              <a:t>2026-04-06</a:t>
             </a:fld>
             <a:endParaRPr lang="ko-KR" altLang="en-US"/>
           </a:p>
@@ -1145,7 +1145,7 @@
           <a:p>
             <a:fld id="{9DC73EDC-8575-4827-9ED9-A0D06AE9D014}" type="datetimeFigureOut">
               <a:rPr lang="ko-KR" altLang="en-US" smtClean="0"/>
-              <a:t>2026-04-03</a:t>
+              <a:t>2026-04-06</a:t>
             </a:fld>
             <a:endParaRPr lang="ko-KR" altLang="en-US"/>
           </a:p>
@@ -1410,7 +1410,7 @@
           <a:p>
             <a:fld id="{9DC73EDC-8575-4827-9ED9-A0D06AE9D014}" type="datetimeFigureOut">
               <a:rPr lang="ko-KR" altLang="en-US" smtClean="0"/>
-              <a:t>2026-04-03</a:t>
+              <a:t>2026-04-06</a:t>
             </a:fld>
             <a:endParaRPr lang="ko-KR" altLang="en-US"/>
           </a:p>
@@ -1822,7 +1822,7 @@
           <a:p>
             <a:fld id="{9DC73EDC-8575-4827-9ED9-A0D06AE9D014}" type="datetimeFigureOut">
               <a:rPr lang="ko-KR" altLang="en-US" smtClean="0"/>
-              <a:t>2026-04-03</a:t>
+              <a:t>2026-04-06</a:t>
             </a:fld>
             <a:endParaRPr lang="ko-KR" altLang="en-US"/>
           </a:p>
@@ -1963,7 +1963,7 @@
           <a:p>
             <a:fld id="{9DC73EDC-8575-4827-9ED9-A0D06AE9D014}" type="datetimeFigureOut">
               <a:rPr lang="ko-KR" altLang="en-US" smtClean="0"/>
-              <a:t>2026-04-03</a:t>
+              <a:t>2026-04-06</a:t>
             </a:fld>
             <a:endParaRPr lang="ko-KR" altLang="en-US"/>
           </a:p>
@@ -2076,7 +2076,7 @@
           <a:p>
             <a:fld id="{9DC73EDC-8575-4827-9ED9-A0D06AE9D014}" type="datetimeFigureOut">
               <a:rPr lang="ko-KR" altLang="en-US" smtClean="0"/>
-              <a:t>2026-04-03</a:t>
+              <a:t>2026-04-06</a:t>
             </a:fld>
             <a:endParaRPr lang="ko-KR" altLang="en-US"/>
           </a:p>
@@ -2387,7 +2387,7 @@
           <a:p>
             <a:fld id="{9DC73EDC-8575-4827-9ED9-A0D06AE9D014}" type="datetimeFigureOut">
               <a:rPr lang="ko-KR" altLang="en-US" smtClean="0"/>
-              <a:t>2026-04-03</a:t>
+              <a:t>2026-04-06</a:t>
             </a:fld>
             <a:endParaRPr lang="ko-KR" altLang="en-US"/>
           </a:p>
@@ -2675,7 +2675,7 @@
           <a:p>
             <a:fld id="{9DC73EDC-8575-4827-9ED9-A0D06AE9D014}" type="datetimeFigureOut">
               <a:rPr lang="ko-KR" altLang="en-US" smtClean="0"/>
-              <a:t>2026-04-03</a:t>
+              <a:t>2026-04-06</a:t>
             </a:fld>
             <a:endParaRPr lang="ko-KR" altLang="en-US"/>
           </a:p>
@@ -2925,7 +2925,7 @@
           <a:p>
             <a:fld id="{9DC73EDC-8575-4827-9ED9-A0D06AE9D014}" type="datetimeFigureOut">
               <a:rPr lang="ko-KR" altLang="en-US" smtClean="0"/>
-              <a:t>2026-04-03</a:t>
+              <a:t>2026-04-06</a:t>
             </a:fld>
             <a:endParaRPr lang="ko-KR" altLang="en-US"/>
           </a:p>
@@ -3357,504 +3357,523 @@
           <a:chExt cx="0" cy="0"/>
         </a:xfrm>
       </p:grpSpPr>
-      <p:sp>
-        <p:nvSpPr>
-          <p:cNvPr id="7" name="직사각형 6">
-            <a:extLst>
-              <a:ext uri="{FF2B5EF4-FFF2-40B4-BE49-F238E27FC236}">
-                <a16:creationId xmlns:a16="http://schemas.microsoft.com/office/drawing/2014/main" id="{FAF039C7-1241-4A3A-A71D-134FBDB4F443}"/>
-              </a:ext>
-            </a:extLst>
-          </p:cNvPr>
-          <p:cNvSpPr/>
+      <p:grpSp>
+        <p:nvGrpSpPr>
+          <p:cNvPr id="3" name="그룹 2">
+            <a:extLst>
+              <a:ext uri="{FF2B5EF4-FFF2-40B4-BE49-F238E27FC236}">
+                <a16:creationId xmlns:a16="http://schemas.microsoft.com/office/drawing/2014/main" id="{09A2FE9D-A888-4C28-9F4B-AB475519B8DC}"/>
+              </a:ext>
+            </a:extLst>
+          </p:cNvPr>
+          <p:cNvGrpSpPr/>
           <p:nvPr/>
-        </p:nvSpPr>
-        <p:spPr>
+        </p:nvGrpSpPr>
+        <p:grpSpPr>
           <a:xfrm>
-            <a:off x="1611085" y="785812"/>
-            <a:ext cx="8969830" cy="6072188"/>
+            <a:off x="0" y="443345"/>
+            <a:ext cx="12192001" cy="5971310"/>
+            <a:chOff x="0" y="443345"/>
+            <a:chExt cx="12192001" cy="5971310"/>
           </a:xfrm>
-          <a:prstGeom prst="rect">
-            <a:avLst/>
-          </a:prstGeom>
-          <a:solidFill>
-            <a:schemeClr val="tx1">
-              <a:alpha val="75000"/>
-            </a:schemeClr>
-          </a:solidFill>
-          <a:ln>
+        </p:grpSpPr>
+        <p:sp>
+          <p:nvSpPr>
+            <p:cNvPr id="7" name="직사각형 6">
+              <a:extLst>
+                <a:ext uri="{FF2B5EF4-FFF2-40B4-BE49-F238E27FC236}">
+                  <a16:creationId xmlns:a16="http://schemas.microsoft.com/office/drawing/2014/main" id="{FAF039C7-1241-4A3A-A71D-134FBDB4F443}"/>
+                </a:ext>
+              </a:extLst>
+            </p:cNvPr>
+            <p:cNvSpPr/>
+            <p:nvPr/>
+          </p:nvSpPr>
+          <p:spPr>
+            <a:xfrm>
+              <a:off x="0" y="443345"/>
+              <a:ext cx="12192000" cy="5971310"/>
+            </a:xfrm>
+            <a:prstGeom prst="rect">
+              <a:avLst/>
+            </a:prstGeom>
             <a:solidFill>
-              <a:schemeClr val="tx1"/>
+              <a:schemeClr val="tx1">
+                <a:alpha val="75000"/>
+              </a:schemeClr>
             </a:solidFill>
-          </a:ln>
-        </p:spPr>
-        <p:style>
-          <a:lnRef idx="2">
-            <a:schemeClr val="accent1">
-              <a:shade val="50000"/>
-            </a:schemeClr>
-          </a:lnRef>
-          <a:fillRef idx="1">
-            <a:schemeClr val="accent1"/>
-          </a:fillRef>
-          <a:effectRef idx="0">
-            <a:schemeClr val="accent1"/>
-          </a:effectRef>
-          <a:fontRef idx="minor">
-            <a:schemeClr val="lt1"/>
-          </a:fontRef>
-        </p:style>
-        <p:txBody>
-          <a:bodyPr rtlCol="0" anchor="ctr"/>
-          <a:lstStyle/>
-          <a:p>
-            <a:pPr algn="ctr"/>
-            <a:endParaRPr lang="ko-KR" altLang="en-US" dirty="0"/>
-          </a:p>
-        </p:txBody>
-      </p:sp>
-      <p:sp>
-        <p:nvSpPr>
-          <p:cNvPr id="2" name="TextBox 1">
-            <a:extLst>
-              <a:ext uri="{FF2B5EF4-FFF2-40B4-BE49-F238E27FC236}">
-                <a16:creationId xmlns:a16="http://schemas.microsoft.com/office/drawing/2014/main" id="{F8535328-9760-43A4-BC2B-60ED3836E8E7}"/>
-              </a:ext>
-            </a:extLst>
-          </p:cNvPr>
-          <p:cNvSpPr txBox="1"/>
-          <p:nvPr/>
-        </p:nvSpPr>
-        <p:spPr>
-          <a:xfrm>
-            <a:off x="1611085" y="785812"/>
-            <a:ext cx="8969830" cy="6017032"/>
-          </a:xfrm>
-          <a:prstGeom prst="rect">
-            <a:avLst/>
-          </a:prstGeom>
-          <a:noFill/>
-        </p:spPr>
-        <p:txBody>
-          <a:bodyPr wrap="square" rtlCol="0">
-            <a:spAutoFit/>
-          </a:bodyPr>
-          <a:lstStyle/>
-          <a:p>
-            <a:pPr algn="ctr"/>
-            <a:r>
-              <a:rPr lang="ko-KR" altLang="en-US" sz="7500" dirty="0" err="1">
+            <a:ln>
+              <a:solidFill>
+                <a:schemeClr val="tx1"/>
+              </a:solidFill>
+            </a:ln>
+          </p:spPr>
+          <p:style>
+            <a:lnRef idx="2">
+              <a:schemeClr val="accent1">
+                <a:shade val="50000"/>
+              </a:schemeClr>
+            </a:lnRef>
+            <a:fillRef idx="1">
+              <a:schemeClr val="accent1"/>
+            </a:fillRef>
+            <a:effectRef idx="0">
+              <a:schemeClr val="accent1"/>
+            </a:effectRef>
+            <a:fontRef idx="minor">
+              <a:schemeClr val="lt1"/>
+            </a:fontRef>
+          </p:style>
+          <p:txBody>
+            <a:bodyPr rtlCol="0" anchor="ctr"/>
+            <a:lstStyle/>
+            <a:p>
+              <a:pPr algn="ctr"/>
+              <a:endParaRPr lang="ko-KR" altLang="en-US" dirty="0"/>
+            </a:p>
+          </p:txBody>
+        </p:sp>
+        <p:sp>
+          <p:nvSpPr>
+            <p:cNvPr id="2" name="TextBox 1">
+              <a:extLst>
+                <a:ext uri="{FF2B5EF4-FFF2-40B4-BE49-F238E27FC236}">
+                  <a16:creationId xmlns:a16="http://schemas.microsoft.com/office/drawing/2014/main" id="{F8535328-9760-43A4-BC2B-60ED3836E8E7}"/>
+                </a:ext>
+              </a:extLst>
+            </p:cNvPr>
+            <p:cNvSpPr txBox="1"/>
+            <p:nvPr/>
+          </p:nvSpPr>
+          <p:spPr>
+            <a:xfrm>
+              <a:off x="0" y="443345"/>
+              <a:ext cx="12192001" cy="5632311"/>
+            </a:xfrm>
+            <a:prstGeom prst="rect">
+              <a:avLst/>
+            </a:prstGeom>
+            <a:noFill/>
+          </p:spPr>
+          <p:txBody>
+            <a:bodyPr wrap="square" rtlCol="0">
+              <a:spAutoFit/>
+            </a:bodyPr>
+            <a:lstStyle/>
+            <a:p>
+              <a:pPr algn="ctr"/>
+              <a:r>
+                <a:rPr lang="ko-KR" altLang="en-US" sz="7500" dirty="0" err="1">
+                  <a:solidFill>
+                    <a:schemeClr val="bg1"/>
+                  </a:solidFill>
+                  <a:latin typeface="휴먼매직체" panose="02030504000101010101" pitchFamily="18" charset="-127"/>
+                  <a:ea typeface="휴먼매직체" panose="02030504000101010101" pitchFamily="18" charset="-127"/>
+                  <a:cs typeface="맑은 고딕 Semilight" panose="020B0502040204020203" pitchFamily="50" charset="-127"/>
+                </a:rPr>
+                <a:t>프라가라흐</a:t>
+              </a:r>
+              <a:endParaRPr lang="en-US" altLang="ko-KR" sz="2500" dirty="0">
                 <a:solidFill>
                   <a:schemeClr val="bg1"/>
                 </a:solidFill>
                 <a:latin typeface="휴먼매직체" panose="02030504000101010101" pitchFamily="18" charset="-127"/>
                 <a:ea typeface="휴먼매직체" panose="02030504000101010101" pitchFamily="18" charset="-127"/>
                 <a:cs typeface="맑은 고딕 Semilight" panose="020B0502040204020203" pitchFamily="50" charset="-127"/>
-              </a:rPr>
-              <a:t>프라가라흐</a:t>
-            </a:r>
-            <a:endParaRPr lang="en-US" altLang="ko-KR" sz="2500" dirty="0">
-              <a:solidFill>
-                <a:schemeClr val="bg1"/>
-              </a:solidFill>
-              <a:latin typeface="휴먼매직체" panose="02030504000101010101" pitchFamily="18" charset="-127"/>
-              <a:ea typeface="휴먼매직체" panose="02030504000101010101" pitchFamily="18" charset="-127"/>
-              <a:cs typeface="맑은 고딕 Semilight" panose="020B0502040204020203" pitchFamily="50" charset="-127"/>
-            </a:endParaRPr>
-          </a:p>
-          <a:p>
-            <a:pPr algn="ctr"/>
-            <a:r>
-              <a:rPr lang="en-US" altLang="ko-KR" sz="2000" dirty="0">
+              </a:endParaRPr>
+            </a:p>
+            <a:p>
+              <a:pPr algn="ctr"/>
+              <a:r>
+                <a:rPr lang="en-US" altLang="ko-KR" sz="2000" dirty="0">
+                  <a:solidFill>
+                    <a:schemeClr val="bg1"/>
+                  </a:solidFill>
+                  <a:latin typeface="휴먼매직체" panose="02030504000101010101" pitchFamily="18" charset="-127"/>
+                  <a:ea typeface="휴먼매직체" panose="02030504000101010101" pitchFamily="18" charset="-127"/>
+                  <a:cs typeface="맑은 고딕 Semilight" panose="020B0502040204020203" pitchFamily="50" charset="-127"/>
+                </a:rPr>
+                <a:t>(250930~251225, 2</a:t>
+              </a:r>
+              <a:r>
+                <a:rPr lang="ko-KR" altLang="en-US" sz="2000" dirty="0">
+                  <a:solidFill>
+                    <a:schemeClr val="bg1"/>
+                  </a:solidFill>
+                  <a:latin typeface="휴먼매직체" panose="02030504000101010101" pitchFamily="18" charset="-127"/>
+                  <a:ea typeface="휴먼매직체" panose="02030504000101010101" pitchFamily="18" charset="-127"/>
+                  <a:cs typeface="맑은 고딕 Semilight" panose="020B0502040204020203" pitchFamily="50" charset="-127"/>
+                </a:rPr>
+                <a:t>인</a:t>
+              </a:r>
+              <a:r>
+                <a:rPr lang="en-US" altLang="ko-KR" sz="2000" dirty="0">
+                  <a:solidFill>
+                    <a:schemeClr val="bg1"/>
+                  </a:solidFill>
+                  <a:latin typeface="휴먼매직체" panose="02030504000101010101" pitchFamily="18" charset="-127"/>
+                  <a:ea typeface="휴먼매직체" panose="02030504000101010101" pitchFamily="18" charset="-127"/>
+                  <a:cs typeface="맑은 고딕 Semilight" panose="020B0502040204020203" pitchFamily="50" charset="-127"/>
+                </a:rPr>
+                <a:t>, Phaser)</a:t>
+              </a:r>
+            </a:p>
+            <a:p>
+              <a:pPr algn="ctr"/>
+              <a:r>
+                <a:rPr lang="en-US" altLang="ko-KR" sz="2000" dirty="0">
+                  <a:solidFill>
+                    <a:schemeClr val="bg1"/>
+                  </a:solidFill>
+                  <a:latin typeface="휴먼매직체" panose="02030504000101010101" pitchFamily="18" charset="-127"/>
+                  <a:ea typeface="휴먼매직체" panose="02030504000101010101" pitchFamily="18" charset="-127"/>
+                  <a:cs typeface="맑은 고딕 Semilight" panose="020B0502040204020203" pitchFamily="50" charset="-127"/>
+                </a:rPr>
+                <a:t>https://jeve98.github.io/Portfolio/Fragarach</a:t>
+              </a:r>
+              <a:endParaRPr lang="en-US" altLang="ko-KR" sz="2500" dirty="0">
                 <a:solidFill>
                   <a:schemeClr val="bg1"/>
                 </a:solidFill>
                 <a:latin typeface="휴먼매직체" panose="02030504000101010101" pitchFamily="18" charset="-127"/>
                 <a:ea typeface="휴먼매직체" panose="02030504000101010101" pitchFamily="18" charset="-127"/>
                 <a:cs typeface="맑은 고딕 Semilight" panose="020B0502040204020203" pitchFamily="50" charset="-127"/>
-              </a:rPr>
-              <a:t>(250930~251225, 2</a:t>
-            </a:r>
-            <a:r>
-              <a:rPr lang="ko-KR" altLang="en-US" sz="2000" dirty="0">
+              </a:endParaRPr>
+            </a:p>
+            <a:p>
+              <a:endParaRPr lang="en-US" altLang="ko-KR" sz="2500" dirty="0">
                 <a:solidFill>
                   <a:schemeClr val="bg1"/>
                 </a:solidFill>
                 <a:latin typeface="휴먼매직체" panose="02030504000101010101" pitchFamily="18" charset="-127"/>
                 <a:ea typeface="휴먼매직체" panose="02030504000101010101" pitchFamily="18" charset="-127"/>
                 <a:cs typeface="맑은 고딕 Semilight" panose="020B0502040204020203" pitchFamily="50" charset="-127"/>
-              </a:rPr>
-              <a:t>인</a:t>
-            </a:r>
-            <a:r>
-              <a:rPr lang="en-US" altLang="ko-KR" sz="2000" dirty="0">
+              </a:endParaRPr>
+            </a:p>
+            <a:p>
+              <a:pPr marL="457200" indent="-457200">
+                <a:buFont typeface="+mj-lt"/>
+                <a:buAutoNum type="arabicPeriod"/>
+              </a:pPr>
+              <a:r>
+                <a:rPr lang="en-US" altLang="ko-KR" sz="2000" dirty="0">
+                  <a:solidFill>
+                    <a:schemeClr val="bg1"/>
+                  </a:solidFill>
+                  <a:latin typeface="휴먼매직체" panose="02030504000101010101" pitchFamily="18" charset="-127"/>
+                  <a:ea typeface="휴먼매직체" panose="02030504000101010101" pitchFamily="18" charset="-127"/>
+                  <a:cs typeface="맑은 고딕 Semilight" panose="020B0502040204020203" pitchFamily="50" charset="-127"/>
+                </a:rPr>
+                <a:t>Min-Heap </a:t>
+              </a:r>
+              <a:r>
+                <a:rPr lang="ko-KR" altLang="en-US" sz="2000" dirty="0">
+                  <a:solidFill>
+                    <a:schemeClr val="bg1"/>
+                  </a:solidFill>
+                  <a:latin typeface="휴먼매직체" panose="02030504000101010101" pitchFamily="18" charset="-127"/>
+                  <a:ea typeface="휴먼매직체" panose="02030504000101010101" pitchFamily="18" charset="-127"/>
+                  <a:cs typeface="맑은 고딕 Semilight" panose="020B0502040204020203" pitchFamily="50" charset="-127"/>
+                </a:rPr>
+                <a:t>기반 보스 패턴</a:t>
+              </a:r>
+              <a:br>
+                <a:rPr lang="en-US" altLang="ko-KR" sz="2000" dirty="0">
+                  <a:solidFill>
+                    <a:schemeClr val="bg1"/>
+                  </a:solidFill>
+                  <a:latin typeface="휴먼매직체" panose="02030504000101010101" pitchFamily="18" charset="-127"/>
+                  <a:ea typeface="휴먼매직체" panose="02030504000101010101" pitchFamily="18" charset="-127"/>
+                  <a:cs typeface="맑은 고딕 Semilight" panose="020B0502040204020203" pitchFamily="50" charset="-127"/>
+                </a:rPr>
+              </a:br>
+              <a:endParaRPr lang="en-US" altLang="ko-KR" sz="2000" dirty="0">
                 <a:solidFill>
                   <a:schemeClr val="bg1"/>
                 </a:solidFill>
                 <a:latin typeface="휴먼매직체" panose="02030504000101010101" pitchFamily="18" charset="-127"/>
                 <a:ea typeface="휴먼매직체" panose="02030504000101010101" pitchFamily="18" charset="-127"/>
                 <a:cs typeface="맑은 고딕 Semilight" panose="020B0502040204020203" pitchFamily="50" charset="-127"/>
-              </a:rPr>
-              <a:t>, Phaser)</a:t>
-            </a:r>
-          </a:p>
-          <a:p>
-            <a:pPr algn="ctr"/>
-            <a:r>
-              <a:rPr lang="en-US" altLang="ko-KR" sz="2000" dirty="0">
+              </a:endParaRPr>
+            </a:p>
+            <a:p>
+              <a:pPr marL="457200" indent="-457200">
+                <a:buFont typeface="+mj-lt"/>
+                <a:buAutoNum type="arabicPeriod"/>
+              </a:pPr>
+              <a:r>
+                <a:rPr lang="ko-KR" altLang="en-US" sz="2000" dirty="0">
+                  <a:solidFill>
+                    <a:schemeClr val="bg1"/>
+                  </a:solidFill>
+                  <a:latin typeface="휴먼매직체" panose="02030504000101010101" pitchFamily="18" charset="-127"/>
+                  <a:ea typeface="휴먼매직체" panose="02030504000101010101" pitchFamily="18" charset="-127"/>
+                  <a:cs typeface="맑은 고딕 Semilight" panose="020B0502040204020203" pitchFamily="50" charset="-127"/>
+                </a:rPr>
+                <a:t>안전 구역 기반 </a:t>
+              </a:r>
+              <a:r>
+                <a:rPr lang="ko-KR" altLang="en-US" sz="2000" dirty="0" err="1">
+                  <a:solidFill>
+                    <a:schemeClr val="bg1"/>
+                  </a:solidFill>
+                  <a:latin typeface="휴먼매직체" panose="02030504000101010101" pitchFamily="18" charset="-127"/>
+                  <a:ea typeface="휴먼매직체" panose="02030504000101010101" pitchFamily="18" charset="-127"/>
+                  <a:cs typeface="맑은 고딕 Semilight" panose="020B0502040204020203" pitchFamily="50" charset="-127"/>
+                </a:rPr>
+                <a:t>스폰</a:t>
+              </a:r>
+              <a:r>
+                <a:rPr lang="ko-KR" altLang="en-US" sz="2000" dirty="0">
+                  <a:solidFill>
+                    <a:schemeClr val="bg1"/>
+                  </a:solidFill>
+                  <a:latin typeface="휴먼매직체" panose="02030504000101010101" pitchFamily="18" charset="-127"/>
+                  <a:ea typeface="휴먼매직체" panose="02030504000101010101" pitchFamily="18" charset="-127"/>
+                  <a:cs typeface="맑은 고딕 Semilight" panose="020B0502040204020203" pitchFamily="50" charset="-127"/>
+                </a:rPr>
+                <a:t> 시스템</a:t>
+              </a:r>
+              <a:br>
+                <a:rPr lang="en-US" altLang="ko-KR" sz="2000" dirty="0">
+                  <a:solidFill>
+                    <a:schemeClr val="bg1"/>
+                  </a:solidFill>
+                  <a:latin typeface="휴먼매직체" panose="02030504000101010101" pitchFamily="18" charset="-127"/>
+                  <a:ea typeface="휴먼매직체" panose="02030504000101010101" pitchFamily="18" charset="-127"/>
+                  <a:cs typeface="맑은 고딕 Semilight" panose="020B0502040204020203" pitchFamily="50" charset="-127"/>
+                </a:rPr>
+              </a:br>
+              <a:endParaRPr lang="en-US" altLang="ko-KR" sz="2000" dirty="0">
                 <a:solidFill>
                   <a:schemeClr val="bg1"/>
                 </a:solidFill>
                 <a:latin typeface="휴먼매직체" panose="02030504000101010101" pitchFamily="18" charset="-127"/>
                 <a:ea typeface="휴먼매직체" panose="02030504000101010101" pitchFamily="18" charset="-127"/>
                 <a:cs typeface="맑은 고딕 Semilight" panose="020B0502040204020203" pitchFamily="50" charset="-127"/>
-              </a:rPr>
-              <a:t>https://jeve98.github.io/Portfolio/Fragarach</a:t>
-            </a:r>
-          </a:p>
-          <a:p>
-            <a:endParaRPr lang="en-US" altLang="ko-KR" sz="2500" dirty="0">
-              <a:solidFill>
-                <a:schemeClr val="bg1"/>
-              </a:solidFill>
-              <a:latin typeface="휴먼매직체" panose="02030504000101010101" pitchFamily="18" charset="-127"/>
-              <a:ea typeface="휴먼매직체" panose="02030504000101010101" pitchFamily="18" charset="-127"/>
-              <a:cs typeface="맑은 고딕 Semilight" panose="020B0502040204020203" pitchFamily="50" charset="-127"/>
-            </a:endParaRPr>
-          </a:p>
-          <a:p>
-            <a:endParaRPr lang="en-US" altLang="ko-KR" sz="2500" dirty="0">
-              <a:solidFill>
-                <a:schemeClr val="bg1"/>
-              </a:solidFill>
-              <a:latin typeface="휴먼매직체" panose="02030504000101010101" pitchFamily="18" charset="-127"/>
-              <a:ea typeface="휴먼매직체" panose="02030504000101010101" pitchFamily="18" charset="-127"/>
-              <a:cs typeface="맑은 고딕 Semilight" panose="020B0502040204020203" pitchFamily="50" charset="-127"/>
-            </a:endParaRPr>
-          </a:p>
-          <a:p>
-            <a:pPr marL="457200" indent="-457200">
-              <a:buFont typeface="+mj-lt"/>
-              <a:buAutoNum type="arabicPeriod"/>
-            </a:pPr>
-            <a:r>
-              <a:rPr lang="en-US" altLang="ko-KR" sz="2000" dirty="0">
+              </a:endParaRPr>
+            </a:p>
+            <a:p>
+              <a:pPr marL="457200" indent="-457200">
+                <a:buFont typeface="+mj-lt"/>
+                <a:buAutoNum type="arabicPeriod"/>
+              </a:pPr>
+              <a:r>
+                <a:rPr lang="ko-KR" altLang="en-US" sz="2000" dirty="0" err="1">
+                  <a:solidFill>
+                    <a:schemeClr val="bg1"/>
+                  </a:solidFill>
+                  <a:latin typeface="휴먼매직체" panose="02030504000101010101" pitchFamily="18" charset="-127"/>
+                  <a:ea typeface="휴먼매직체" panose="02030504000101010101" pitchFamily="18" charset="-127"/>
+                  <a:cs typeface="맑은 고딕 Semilight" panose="020B0502040204020203" pitchFamily="50" charset="-127"/>
+                </a:rPr>
+                <a:t>컷씬</a:t>
+              </a:r>
+              <a:r>
+                <a:rPr lang="ko-KR" altLang="en-US" sz="2000" dirty="0">
+                  <a:solidFill>
+                    <a:schemeClr val="bg1"/>
+                  </a:solidFill>
+                  <a:latin typeface="휴먼매직체" panose="02030504000101010101" pitchFamily="18" charset="-127"/>
+                  <a:ea typeface="휴먼매직체" panose="02030504000101010101" pitchFamily="18" charset="-127"/>
+                  <a:cs typeface="맑은 고딕 Semilight" panose="020B0502040204020203" pitchFamily="50" charset="-127"/>
+                </a:rPr>
+                <a:t> 중복 재생 방지 시스템</a:t>
+              </a:r>
+              <a:br>
+                <a:rPr lang="en-US" altLang="ko-KR" sz="2000" dirty="0">
+                  <a:solidFill>
+                    <a:schemeClr val="bg1"/>
+                  </a:solidFill>
+                  <a:latin typeface="휴먼매직체" panose="02030504000101010101" pitchFamily="18" charset="-127"/>
+                  <a:ea typeface="휴먼매직체" panose="02030504000101010101" pitchFamily="18" charset="-127"/>
+                  <a:cs typeface="맑은 고딕 Semilight" panose="020B0502040204020203" pitchFamily="50" charset="-127"/>
+                </a:rPr>
+              </a:br>
+              <a:endParaRPr lang="en-US" altLang="ko-KR" sz="2000" dirty="0">
                 <a:solidFill>
                   <a:schemeClr val="bg1"/>
                 </a:solidFill>
                 <a:latin typeface="휴먼매직체" panose="02030504000101010101" pitchFamily="18" charset="-127"/>
                 <a:ea typeface="휴먼매직체" panose="02030504000101010101" pitchFamily="18" charset="-127"/>
                 <a:cs typeface="맑은 고딕 Semilight" panose="020B0502040204020203" pitchFamily="50" charset="-127"/>
-              </a:rPr>
-              <a:t>Min-Heap </a:t>
-            </a:r>
-            <a:r>
-              <a:rPr lang="ko-KR" altLang="en-US" sz="2000" dirty="0">
+              </a:endParaRPr>
+            </a:p>
+            <a:p>
+              <a:pPr marL="457200" indent="-457200">
+                <a:buFont typeface="+mj-lt"/>
+                <a:buAutoNum type="arabicPeriod"/>
+              </a:pPr>
+              <a:r>
+                <a:rPr lang="en-US" altLang="ko-KR" sz="2000" dirty="0">
+                  <a:solidFill>
+                    <a:schemeClr val="bg1"/>
+                  </a:solidFill>
+                  <a:latin typeface="휴먼매직체" panose="02030504000101010101" pitchFamily="18" charset="-127"/>
+                  <a:ea typeface="휴먼매직체" panose="02030504000101010101" pitchFamily="18" charset="-127"/>
+                  <a:cs typeface="맑은 고딕 Semilight" panose="020B0502040204020203" pitchFamily="50" charset="-127"/>
+                </a:rPr>
+                <a:t>Phaser </a:t>
+              </a:r>
+              <a:r>
+                <a:rPr lang="ko-KR" altLang="en-US" sz="2000" dirty="0">
+                  <a:solidFill>
+                    <a:schemeClr val="bg1"/>
+                  </a:solidFill>
+                  <a:latin typeface="휴먼매직체" panose="02030504000101010101" pitchFamily="18" charset="-127"/>
+                  <a:ea typeface="휴먼매직체" panose="02030504000101010101" pitchFamily="18" charset="-127"/>
+                  <a:cs typeface="맑은 고딕 Semilight" panose="020B0502040204020203" pitchFamily="50" charset="-127"/>
+                </a:rPr>
+                <a:t>구조 기반 </a:t>
+              </a:r>
+              <a:r>
+                <a:rPr lang="en-US" altLang="ko-KR" sz="2000" dirty="0">
+                  <a:solidFill>
+                    <a:schemeClr val="bg1"/>
+                  </a:solidFill>
+                  <a:latin typeface="휴먼매직체" panose="02030504000101010101" pitchFamily="18" charset="-127"/>
+                  <a:ea typeface="휴먼매직체" panose="02030504000101010101" pitchFamily="18" charset="-127"/>
+                  <a:cs typeface="맑은 고딕 Semilight" panose="020B0502040204020203" pitchFamily="50" charset="-127"/>
+                </a:rPr>
+                <a:t>Scene </a:t>
+              </a:r>
+              <a:r>
+                <a:rPr lang="ko-KR" altLang="en-US" sz="2000" dirty="0">
+                  <a:solidFill>
+                    <a:schemeClr val="bg1"/>
+                  </a:solidFill>
+                  <a:latin typeface="휴먼매직체" panose="02030504000101010101" pitchFamily="18" charset="-127"/>
+                  <a:ea typeface="휴먼매직체" panose="02030504000101010101" pitchFamily="18" charset="-127"/>
+                  <a:cs typeface="맑은 고딕 Semilight" panose="020B0502040204020203" pitchFamily="50" charset="-127"/>
+                </a:rPr>
+                <a:t>로딩 설계</a:t>
+              </a:r>
+              <a:br>
+                <a:rPr lang="en-US" altLang="ko-KR" sz="2000" dirty="0">
+                  <a:solidFill>
+                    <a:schemeClr val="bg1"/>
+                  </a:solidFill>
+                  <a:latin typeface="휴먼매직체" panose="02030504000101010101" pitchFamily="18" charset="-127"/>
+                  <a:ea typeface="휴먼매직체" panose="02030504000101010101" pitchFamily="18" charset="-127"/>
+                  <a:cs typeface="맑은 고딕 Semilight" panose="020B0502040204020203" pitchFamily="50" charset="-127"/>
+                </a:rPr>
+              </a:br>
+              <a:endParaRPr lang="en-US" altLang="ko-KR" sz="2000" dirty="0">
                 <a:solidFill>
                   <a:schemeClr val="bg1"/>
                 </a:solidFill>
                 <a:latin typeface="휴먼매직체" panose="02030504000101010101" pitchFamily="18" charset="-127"/>
                 <a:ea typeface="휴먼매직체" panose="02030504000101010101" pitchFamily="18" charset="-127"/>
                 <a:cs typeface="맑은 고딕 Semilight" panose="020B0502040204020203" pitchFamily="50" charset="-127"/>
-              </a:rPr>
-              <a:t>기반 보스 패턴</a:t>
-            </a:r>
-            <a:br>
-              <a:rPr lang="en-US" altLang="ko-KR" sz="2000" dirty="0">
+              </a:endParaRPr>
+            </a:p>
+            <a:p>
+              <a:pPr marL="457200" indent="-457200">
+                <a:buFont typeface="+mj-lt"/>
+                <a:buAutoNum type="arabicPeriod"/>
+              </a:pPr>
+              <a:r>
+                <a:rPr lang="en-US" altLang="ko-KR" sz="2000" dirty="0">
+                  <a:solidFill>
+                    <a:schemeClr val="bg1"/>
+                  </a:solidFill>
+                  <a:latin typeface="휴먼매직체" panose="02030504000101010101" pitchFamily="18" charset="-127"/>
+                  <a:ea typeface="휴먼매직체" panose="02030504000101010101" pitchFamily="18" charset="-127"/>
+                  <a:cs typeface="맑은 고딕 Semilight" panose="020B0502040204020203" pitchFamily="50" charset="-127"/>
+                </a:rPr>
+                <a:t>API </a:t>
+              </a:r>
+              <a:r>
+                <a:rPr lang="ko-KR" altLang="en-US" sz="2000" dirty="0">
+                  <a:solidFill>
+                    <a:schemeClr val="bg1"/>
+                  </a:solidFill>
+                  <a:latin typeface="휴먼매직체" panose="02030504000101010101" pitchFamily="18" charset="-127"/>
+                  <a:ea typeface="휴먼매직체" panose="02030504000101010101" pitchFamily="18" charset="-127"/>
+                  <a:cs typeface="맑은 고딕 Semilight" panose="020B0502040204020203" pitchFamily="50" charset="-127"/>
+                </a:rPr>
+                <a:t>서버 구축</a:t>
+              </a:r>
+              <a:br>
+                <a:rPr lang="en-US" altLang="ko-KR" sz="2000" dirty="0">
+                  <a:solidFill>
+                    <a:schemeClr val="bg1"/>
+                  </a:solidFill>
+                  <a:latin typeface="휴먼매직체" panose="02030504000101010101" pitchFamily="18" charset="-127"/>
+                  <a:ea typeface="휴먼매직체" panose="02030504000101010101" pitchFamily="18" charset="-127"/>
+                  <a:cs typeface="맑은 고딕 Semilight" panose="020B0502040204020203" pitchFamily="50" charset="-127"/>
+                </a:rPr>
+              </a:br>
+              <a:endParaRPr lang="en-US" altLang="ko-KR" sz="2000" dirty="0">
                 <a:solidFill>
                   <a:schemeClr val="bg1"/>
                 </a:solidFill>
                 <a:latin typeface="휴먼매직체" panose="02030504000101010101" pitchFamily="18" charset="-127"/>
                 <a:ea typeface="휴먼매직체" panose="02030504000101010101" pitchFamily="18" charset="-127"/>
                 <a:cs typeface="맑은 고딕 Semilight" panose="020B0502040204020203" pitchFamily="50" charset="-127"/>
-              </a:rPr>
-            </a:br>
-            <a:endParaRPr lang="en-US" altLang="ko-KR" sz="2000" dirty="0">
-              <a:solidFill>
-                <a:schemeClr val="bg1"/>
-              </a:solidFill>
-              <a:latin typeface="휴먼매직체" panose="02030504000101010101" pitchFamily="18" charset="-127"/>
-              <a:ea typeface="휴먼매직체" panose="02030504000101010101" pitchFamily="18" charset="-127"/>
-              <a:cs typeface="맑은 고딕 Semilight" panose="020B0502040204020203" pitchFamily="50" charset="-127"/>
-            </a:endParaRPr>
-          </a:p>
-          <a:p>
-            <a:pPr marL="457200" indent="-457200">
-              <a:buFont typeface="+mj-lt"/>
-              <a:buAutoNum type="arabicPeriod"/>
-            </a:pPr>
-            <a:r>
-              <a:rPr lang="ko-KR" altLang="en-US" sz="2000" dirty="0">
+              </a:endParaRPr>
+            </a:p>
+            <a:p>
+              <a:pPr marL="457200" indent="-457200">
+                <a:buFont typeface="+mj-lt"/>
+                <a:buAutoNum type="arabicPeriod"/>
+              </a:pPr>
+              <a:r>
+                <a:rPr lang="ko-KR" altLang="en-US" sz="2000" dirty="0" err="1">
+                  <a:solidFill>
+                    <a:schemeClr val="bg1"/>
+                  </a:solidFill>
+                  <a:latin typeface="휴먼매직체" panose="02030504000101010101" pitchFamily="18" charset="-127"/>
+                  <a:ea typeface="휴먼매직체" panose="02030504000101010101" pitchFamily="18" charset="-127"/>
+                  <a:cs typeface="맑은 고딕 Semilight" panose="020B0502040204020203" pitchFamily="50" charset="-127"/>
+                </a:rPr>
+                <a:t>바이브</a:t>
+              </a:r>
+              <a:r>
+                <a:rPr lang="ko-KR" altLang="en-US" sz="2000" dirty="0">
+                  <a:solidFill>
+                    <a:schemeClr val="bg1"/>
+                  </a:solidFill>
+                  <a:latin typeface="휴먼매직체" panose="02030504000101010101" pitchFamily="18" charset="-127"/>
+                  <a:ea typeface="휴먼매직체" panose="02030504000101010101" pitchFamily="18" charset="-127"/>
+                  <a:cs typeface="맑은 고딕 Semilight" panose="020B0502040204020203" pitchFamily="50" charset="-127"/>
+                </a:rPr>
+                <a:t> </a:t>
+              </a:r>
+              <a:r>
+                <a:rPr lang="ko-KR" altLang="en-US" sz="2000" dirty="0" err="1">
+                  <a:solidFill>
+                    <a:schemeClr val="bg1"/>
+                  </a:solidFill>
+                  <a:latin typeface="휴먼매직체" panose="02030504000101010101" pitchFamily="18" charset="-127"/>
+                  <a:ea typeface="휴먼매직체" panose="02030504000101010101" pitchFamily="18" charset="-127"/>
+                  <a:cs typeface="맑은 고딕 Semilight" panose="020B0502040204020203" pitchFamily="50" charset="-127"/>
+                </a:rPr>
+                <a:t>코딩된</a:t>
+              </a:r>
+              <a:r>
+                <a:rPr lang="ko-KR" altLang="en-US" sz="2000" dirty="0">
+                  <a:solidFill>
+                    <a:schemeClr val="bg1"/>
+                  </a:solidFill>
+                  <a:latin typeface="휴먼매직체" panose="02030504000101010101" pitchFamily="18" charset="-127"/>
+                  <a:ea typeface="휴먼매직체" panose="02030504000101010101" pitchFamily="18" charset="-127"/>
+                  <a:cs typeface="맑은 고딕 Semilight" panose="020B0502040204020203" pitchFamily="50" charset="-127"/>
+                </a:rPr>
+                <a:t> 비정형 구조 재정비</a:t>
+              </a:r>
+              <a:endParaRPr lang="ko-KR" altLang="en-US" sz="2500" dirty="0">
                 <a:solidFill>
                   <a:schemeClr val="bg1"/>
                 </a:solidFill>
                 <a:latin typeface="휴먼매직체" panose="02030504000101010101" pitchFamily="18" charset="-127"/>
                 <a:ea typeface="휴먼매직체" panose="02030504000101010101" pitchFamily="18" charset="-127"/>
                 <a:cs typeface="맑은 고딕 Semilight" panose="020B0502040204020203" pitchFamily="50" charset="-127"/>
-              </a:rPr>
-              <a:t>안전 구역 기반 </a:t>
-            </a:r>
-            <a:r>
-              <a:rPr lang="ko-KR" altLang="en-US" sz="2000" dirty="0" err="1">
-                <a:solidFill>
-                  <a:schemeClr val="bg1"/>
-                </a:solidFill>
-                <a:latin typeface="휴먼매직체" panose="02030504000101010101" pitchFamily="18" charset="-127"/>
-                <a:ea typeface="휴먼매직체" panose="02030504000101010101" pitchFamily="18" charset="-127"/>
-                <a:cs typeface="맑은 고딕 Semilight" panose="020B0502040204020203" pitchFamily="50" charset="-127"/>
-              </a:rPr>
-              <a:t>스폰</a:t>
-            </a:r>
-            <a:r>
-              <a:rPr lang="ko-KR" altLang="en-US" sz="2000" dirty="0">
-                <a:solidFill>
-                  <a:schemeClr val="bg1"/>
-                </a:solidFill>
-                <a:latin typeface="휴먼매직체" panose="02030504000101010101" pitchFamily="18" charset="-127"/>
-                <a:ea typeface="휴먼매직체" panose="02030504000101010101" pitchFamily="18" charset="-127"/>
-                <a:cs typeface="맑은 고딕 Semilight" panose="020B0502040204020203" pitchFamily="50" charset="-127"/>
-              </a:rPr>
-              <a:t> 시스템</a:t>
-            </a:r>
-            <a:br>
-              <a:rPr lang="en-US" altLang="ko-KR" sz="2000" dirty="0">
-                <a:solidFill>
-                  <a:schemeClr val="bg1"/>
-                </a:solidFill>
-                <a:latin typeface="휴먼매직체" panose="02030504000101010101" pitchFamily="18" charset="-127"/>
-                <a:ea typeface="휴먼매직체" panose="02030504000101010101" pitchFamily="18" charset="-127"/>
-                <a:cs typeface="맑은 고딕 Semilight" panose="020B0502040204020203" pitchFamily="50" charset="-127"/>
-              </a:rPr>
-            </a:br>
-            <a:endParaRPr lang="en-US" altLang="ko-KR" sz="2000" dirty="0">
-              <a:solidFill>
-                <a:schemeClr val="bg1"/>
-              </a:solidFill>
-              <a:latin typeface="휴먼매직체" panose="02030504000101010101" pitchFamily="18" charset="-127"/>
-              <a:ea typeface="휴먼매직체" panose="02030504000101010101" pitchFamily="18" charset="-127"/>
-              <a:cs typeface="맑은 고딕 Semilight" panose="020B0502040204020203" pitchFamily="50" charset="-127"/>
-            </a:endParaRPr>
-          </a:p>
-          <a:p>
-            <a:pPr marL="457200" indent="-457200">
-              <a:buFont typeface="+mj-lt"/>
-              <a:buAutoNum type="arabicPeriod"/>
-            </a:pPr>
-            <a:r>
-              <a:rPr lang="ko-KR" altLang="en-US" sz="2000" dirty="0" err="1">
-                <a:solidFill>
-                  <a:schemeClr val="bg1"/>
-                </a:solidFill>
-                <a:latin typeface="휴먼매직체" panose="02030504000101010101" pitchFamily="18" charset="-127"/>
-                <a:ea typeface="휴먼매직체" panose="02030504000101010101" pitchFamily="18" charset="-127"/>
-                <a:cs typeface="맑은 고딕 Semilight" panose="020B0502040204020203" pitchFamily="50" charset="-127"/>
-              </a:rPr>
-              <a:t>컷씬</a:t>
-            </a:r>
-            <a:r>
-              <a:rPr lang="ko-KR" altLang="en-US" sz="2000" dirty="0">
-                <a:solidFill>
-                  <a:schemeClr val="bg1"/>
-                </a:solidFill>
-                <a:latin typeface="휴먼매직체" panose="02030504000101010101" pitchFamily="18" charset="-127"/>
-                <a:ea typeface="휴먼매직체" panose="02030504000101010101" pitchFamily="18" charset="-127"/>
-                <a:cs typeface="맑은 고딕 Semilight" panose="020B0502040204020203" pitchFamily="50" charset="-127"/>
-              </a:rPr>
-              <a:t> 중복 재생 방지 시스템</a:t>
-            </a:r>
-            <a:br>
-              <a:rPr lang="en-US" altLang="ko-KR" sz="2000" dirty="0">
-                <a:solidFill>
-                  <a:schemeClr val="bg1"/>
-                </a:solidFill>
-                <a:latin typeface="휴먼매직체" panose="02030504000101010101" pitchFamily="18" charset="-127"/>
-                <a:ea typeface="휴먼매직체" panose="02030504000101010101" pitchFamily="18" charset="-127"/>
-                <a:cs typeface="맑은 고딕 Semilight" panose="020B0502040204020203" pitchFamily="50" charset="-127"/>
-              </a:rPr>
-            </a:br>
-            <a:endParaRPr lang="en-US" altLang="ko-KR" sz="2000" dirty="0">
-              <a:solidFill>
-                <a:schemeClr val="bg1"/>
-              </a:solidFill>
-              <a:latin typeface="휴먼매직체" panose="02030504000101010101" pitchFamily="18" charset="-127"/>
-              <a:ea typeface="휴먼매직체" panose="02030504000101010101" pitchFamily="18" charset="-127"/>
-              <a:cs typeface="맑은 고딕 Semilight" panose="020B0502040204020203" pitchFamily="50" charset="-127"/>
-            </a:endParaRPr>
-          </a:p>
-          <a:p>
-            <a:pPr marL="457200" indent="-457200">
-              <a:buFont typeface="+mj-lt"/>
-              <a:buAutoNum type="arabicPeriod"/>
-            </a:pPr>
-            <a:r>
-              <a:rPr lang="en-US" altLang="ko-KR" sz="2000" dirty="0">
-                <a:solidFill>
-                  <a:schemeClr val="bg1"/>
-                </a:solidFill>
-                <a:latin typeface="휴먼매직체" panose="02030504000101010101" pitchFamily="18" charset="-127"/>
-                <a:ea typeface="휴먼매직체" panose="02030504000101010101" pitchFamily="18" charset="-127"/>
-                <a:cs typeface="맑은 고딕 Semilight" panose="020B0502040204020203" pitchFamily="50" charset="-127"/>
-              </a:rPr>
-              <a:t>Phaser </a:t>
-            </a:r>
-            <a:r>
-              <a:rPr lang="ko-KR" altLang="en-US" sz="2000" dirty="0">
-                <a:solidFill>
-                  <a:schemeClr val="bg1"/>
-                </a:solidFill>
-                <a:latin typeface="휴먼매직체" panose="02030504000101010101" pitchFamily="18" charset="-127"/>
-                <a:ea typeface="휴먼매직체" panose="02030504000101010101" pitchFamily="18" charset="-127"/>
-                <a:cs typeface="맑은 고딕 Semilight" panose="020B0502040204020203" pitchFamily="50" charset="-127"/>
-              </a:rPr>
-              <a:t>구조 기반 </a:t>
-            </a:r>
-            <a:r>
-              <a:rPr lang="en-US" altLang="ko-KR" sz="2000" dirty="0">
-                <a:solidFill>
-                  <a:schemeClr val="bg1"/>
-                </a:solidFill>
-                <a:latin typeface="휴먼매직체" panose="02030504000101010101" pitchFamily="18" charset="-127"/>
-                <a:ea typeface="휴먼매직체" panose="02030504000101010101" pitchFamily="18" charset="-127"/>
-                <a:cs typeface="맑은 고딕 Semilight" panose="020B0502040204020203" pitchFamily="50" charset="-127"/>
-              </a:rPr>
-              <a:t>Scene </a:t>
-            </a:r>
-            <a:r>
-              <a:rPr lang="ko-KR" altLang="en-US" sz="2000" dirty="0">
-                <a:solidFill>
-                  <a:schemeClr val="bg1"/>
-                </a:solidFill>
-                <a:latin typeface="휴먼매직체" panose="02030504000101010101" pitchFamily="18" charset="-127"/>
-                <a:ea typeface="휴먼매직체" panose="02030504000101010101" pitchFamily="18" charset="-127"/>
-                <a:cs typeface="맑은 고딕 Semilight" panose="020B0502040204020203" pitchFamily="50" charset="-127"/>
-              </a:rPr>
-              <a:t>로딩 설계</a:t>
-            </a:r>
-            <a:br>
-              <a:rPr lang="en-US" altLang="ko-KR" sz="2000" dirty="0">
-                <a:solidFill>
-                  <a:schemeClr val="bg1"/>
-                </a:solidFill>
-                <a:latin typeface="휴먼매직체" panose="02030504000101010101" pitchFamily="18" charset="-127"/>
-                <a:ea typeface="휴먼매직체" panose="02030504000101010101" pitchFamily="18" charset="-127"/>
-                <a:cs typeface="맑은 고딕 Semilight" panose="020B0502040204020203" pitchFamily="50" charset="-127"/>
-              </a:rPr>
-            </a:br>
-            <a:endParaRPr lang="en-US" altLang="ko-KR" sz="2000" dirty="0">
-              <a:solidFill>
-                <a:schemeClr val="bg1"/>
-              </a:solidFill>
-              <a:latin typeface="휴먼매직체" panose="02030504000101010101" pitchFamily="18" charset="-127"/>
-              <a:ea typeface="휴먼매직체" panose="02030504000101010101" pitchFamily="18" charset="-127"/>
-              <a:cs typeface="맑은 고딕 Semilight" panose="020B0502040204020203" pitchFamily="50" charset="-127"/>
-            </a:endParaRPr>
-          </a:p>
-          <a:p>
-            <a:pPr marL="457200" indent="-457200">
-              <a:buFont typeface="+mj-lt"/>
-              <a:buAutoNum type="arabicPeriod"/>
-            </a:pPr>
-            <a:r>
-              <a:rPr lang="en-US" altLang="ko-KR" sz="2000" dirty="0">
-                <a:solidFill>
-                  <a:schemeClr val="bg1"/>
-                </a:solidFill>
-                <a:latin typeface="휴먼매직체" panose="02030504000101010101" pitchFamily="18" charset="-127"/>
-                <a:ea typeface="휴먼매직체" panose="02030504000101010101" pitchFamily="18" charset="-127"/>
-                <a:cs typeface="맑은 고딕 Semilight" panose="020B0502040204020203" pitchFamily="50" charset="-127"/>
-              </a:rPr>
-              <a:t>API </a:t>
-            </a:r>
-            <a:r>
-              <a:rPr lang="ko-KR" altLang="en-US" sz="2000" dirty="0">
-                <a:solidFill>
-                  <a:schemeClr val="bg1"/>
-                </a:solidFill>
-                <a:latin typeface="휴먼매직체" panose="02030504000101010101" pitchFamily="18" charset="-127"/>
-                <a:ea typeface="휴먼매직체" panose="02030504000101010101" pitchFamily="18" charset="-127"/>
-                <a:cs typeface="맑은 고딕 Semilight" panose="020B0502040204020203" pitchFamily="50" charset="-127"/>
-              </a:rPr>
-              <a:t>서버 구축</a:t>
-            </a:r>
-            <a:br>
-              <a:rPr lang="en-US" altLang="ko-KR" sz="2000" dirty="0">
-                <a:solidFill>
-                  <a:schemeClr val="bg1"/>
-                </a:solidFill>
-                <a:latin typeface="휴먼매직체" panose="02030504000101010101" pitchFamily="18" charset="-127"/>
-                <a:ea typeface="휴먼매직체" panose="02030504000101010101" pitchFamily="18" charset="-127"/>
-                <a:cs typeface="맑은 고딕 Semilight" panose="020B0502040204020203" pitchFamily="50" charset="-127"/>
-              </a:rPr>
-            </a:br>
-            <a:endParaRPr lang="en-US" altLang="ko-KR" sz="2000" dirty="0">
-              <a:solidFill>
-                <a:schemeClr val="bg1"/>
-              </a:solidFill>
-              <a:latin typeface="휴먼매직체" panose="02030504000101010101" pitchFamily="18" charset="-127"/>
-              <a:ea typeface="휴먼매직체" panose="02030504000101010101" pitchFamily="18" charset="-127"/>
-              <a:cs typeface="맑은 고딕 Semilight" panose="020B0502040204020203" pitchFamily="50" charset="-127"/>
-            </a:endParaRPr>
-          </a:p>
-          <a:p>
-            <a:pPr marL="457200" indent="-457200">
-              <a:buFont typeface="+mj-lt"/>
-              <a:buAutoNum type="arabicPeriod"/>
-            </a:pPr>
-            <a:r>
-              <a:rPr lang="ko-KR" altLang="en-US" sz="2000" dirty="0" err="1">
-                <a:solidFill>
-                  <a:schemeClr val="bg1"/>
-                </a:solidFill>
-                <a:latin typeface="휴먼매직체" panose="02030504000101010101" pitchFamily="18" charset="-127"/>
-                <a:ea typeface="휴먼매직체" panose="02030504000101010101" pitchFamily="18" charset="-127"/>
-                <a:cs typeface="맑은 고딕 Semilight" panose="020B0502040204020203" pitchFamily="50" charset="-127"/>
-              </a:rPr>
-              <a:t>바이브</a:t>
-            </a:r>
-            <a:r>
-              <a:rPr lang="ko-KR" altLang="en-US" sz="2000" dirty="0">
-                <a:solidFill>
-                  <a:schemeClr val="bg1"/>
-                </a:solidFill>
-                <a:latin typeface="휴먼매직체" panose="02030504000101010101" pitchFamily="18" charset="-127"/>
-                <a:ea typeface="휴먼매직체" panose="02030504000101010101" pitchFamily="18" charset="-127"/>
-                <a:cs typeface="맑은 고딕 Semilight" panose="020B0502040204020203" pitchFamily="50" charset="-127"/>
-              </a:rPr>
-              <a:t> </a:t>
-            </a:r>
-            <a:r>
-              <a:rPr lang="ko-KR" altLang="en-US" sz="2000" dirty="0" err="1">
-                <a:solidFill>
-                  <a:schemeClr val="bg1"/>
-                </a:solidFill>
-                <a:latin typeface="휴먼매직체" panose="02030504000101010101" pitchFamily="18" charset="-127"/>
-                <a:ea typeface="휴먼매직체" panose="02030504000101010101" pitchFamily="18" charset="-127"/>
-                <a:cs typeface="맑은 고딕 Semilight" panose="020B0502040204020203" pitchFamily="50" charset="-127"/>
-              </a:rPr>
-              <a:t>코딩된</a:t>
-            </a:r>
-            <a:r>
-              <a:rPr lang="ko-KR" altLang="en-US" sz="2000" dirty="0">
-                <a:solidFill>
-                  <a:schemeClr val="bg1"/>
-                </a:solidFill>
-                <a:latin typeface="휴먼매직체" panose="02030504000101010101" pitchFamily="18" charset="-127"/>
-                <a:ea typeface="휴먼매직체" panose="02030504000101010101" pitchFamily="18" charset="-127"/>
-                <a:cs typeface="맑은 고딕 Semilight" panose="020B0502040204020203" pitchFamily="50" charset="-127"/>
-              </a:rPr>
-              <a:t> 비정형 구조 재정비</a:t>
-            </a:r>
-            <a:endParaRPr lang="ko-KR" altLang="en-US" sz="2500" dirty="0">
-              <a:solidFill>
-                <a:schemeClr val="bg1"/>
-              </a:solidFill>
-              <a:latin typeface="휴먼매직체" panose="02030504000101010101" pitchFamily="18" charset="-127"/>
-              <a:ea typeface="휴먼매직체" panose="02030504000101010101" pitchFamily="18" charset="-127"/>
-              <a:cs typeface="맑은 고딕 Semilight" panose="020B0502040204020203" pitchFamily="50" charset="-127"/>
-            </a:endParaRPr>
-          </a:p>
-        </p:txBody>
-      </p:sp>
+              </a:endParaRPr>
+            </a:p>
+          </p:txBody>
+        </p:sp>
+      </p:grpSp>
     </p:spTree>
     <p:extLst>
       <p:ext uri="{BB962C8B-B14F-4D97-AF65-F5344CB8AC3E}">
@@ -3900,68 +3919,12 @@
           <a:chExt cx="0" cy="0"/>
         </a:xfrm>
       </p:grpSpPr>
-      <p:sp>
-        <p:nvSpPr>
-          <p:cNvPr id="7" name="직사각형 6">
-            <a:extLst>
-              <a:ext uri="{FF2B5EF4-FFF2-40B4-BE49-F238E27FC236}">
-                <a16:creationId xmlns:a16="http://schemas.microsoft.com/office/drawing/2014/main" id="{FAF039C7-1241-4A3A-A71D-134FBDB4F443}"/>
-              </a:ext>
-            </a:extLst>
-          </p:cNvPr>
-          <p:cNvSpPr/>
-          <p:nvPr/>
-        </p:nvSpPr>
-        <p:spPr>
-          <a:xfrm>
-            <a:off x="1611085" y="0"/>
-            <a:ext cx="8969830" cy="6858000"/>
-          </a:xfrm>
-          <a:prstGeom prst="rect">
-            <a:avLst/>
-          </a:prstGeom>
-          <a:solidFill>
-            <a:schemeClr val="tx1">
-              <a:alpha val="75000"/>
-            </a:schemeClr>
-          </a:solidFill>
-          <a:ln>
-            <a:solidFill>
-              <a:schemeClr val="tx1"/>
-            </a:solidFill>
-          </a:ln>
-        </p:spPr>
-        <p:style>
-          <a:lnRef idx="2">
-            <a:schemeClr val="accent1">
-              <a:shade val="50000"/>
-            </a:schemeClr>
-          </a:lnRef>
-          <a:fillRef idx="1">
-            <a:schemeClr val="accent1"/>
-          </a:fillRef>
-          <a:effectRef idx="0">
-            <a:schemeClr val="accent1"/>
-          </a:effectRef>
-          <a:fontRef idx="minor">
-            <a:schemeClr val="lt1"/>
-          </a:fontRef>
-        </p:style>
-        <p:txBody>
-          <a:bodyPr rtlCol="0" anchor="ctr"/>
-          <a:lstStyle/>
-          <a:p>
-            <a:pPr algn="ctr"/>
-            <a:endParaRPr lang="ko-KR" altLang="en-US" dirty="0"/>
-          </a:p>
-        </p:txBody>
-      </p:sp>
       <p:grpSp>
         <p:nvGrpSpPr>
-          <p:cNvPr id="3" name="그룹 2">
-            <a:extLst>
-              <a:ext uri="{FF2B5EF4-FFF2-40B4-BE49-F238E27FC236}">
-                <a16:creationId xmlns:a16="http://schemas.microsoft.com/office/drawing/2014/main" id="{AB85B829-9E09-4C1A-8DD0-BE0D8FCDFD1B}"/>
+          <p:cNvPr id="6" name="그룹 5">
+            <a:extLst>
+              <a:ext uri="{FF2B5EF4-FFF2-40B4-BE49-F238E27FC236}">
+                <a16:creationId xmlns:a16="http://schemas.microsoft.com/office/drawing/2014/main" id="{BEE39A17-D022-4609-8FD4-435C29D1B41A}"/>
               </a:ext>
             </a:extLst>
           </p:cNvPr>
@@ -3970,231 +3933,18 @@
         </p:nvGrpSpPr>
         <p:grpSpPr>
           <a:xfrm>
-            <a:off x="1611085" y="0"/>
-            <a:ext cx="8969830" cy="4862870"/>
-            <a:chOff x="1611085" y="0"/>
-            <a:chExt cx="8969830" cy="4862870"/>
+            <a:off x="0" y="443345"/>
+            <a:ext cx="12192001" cy="5971310"/>
+            <a:chOff x="0" y="443345"/>
+            <a:chExt cx="12192001" cy="5971310"/>
           </a:xfrm>
         </p:grpSpPr>
         <p:sp>
           <p:nvSpPr>
-            <p:cNvPr id="4" name="TextBox 3">
+            <p:cNvPr id="8" name="직사각형 7">
               <a:extLst>
                 <a:ext uri="{FF2B5EF4-FFF2-40B4-BE49-F238E27FC236}">
-                  <a16:creationId xmlns:a16="http://schemas.microsoft.com/office/drawing/2014/main" id="{9C6094A6-8F92-4243-BC79-903DAB15D449}"/>
-                </a:ext>
-              </a:extLst>
-            </p:cNvPr>
-            <p:cNvSpPr txBox="1"/>
-            <p:nvPr/>
-          </p:nvSpPr>
-          <p:spPr>
-            <a:xfrm>
-              <a:off x="1611085" y="0"/>
-              <a:ext cx="8969830" cy="4862870"/>
-            </a:xfrm>
-            <a:prstGeom prst="rect">
-              <a:avLst/>
-            </a:prstGeom>
-            <a:noFill/>
-          </p:spPr>
-          <p:txBody>
-            <a:bodyPr wrap="square" rtlCol="0">
-              <a:spAutoFit/>
-            </a:bodyPr>
-            <a:lstStyle/>
-            <a:p>
-              <a:r>
-                <a:rPr lang="en-US" altLang="ko-KR" sz="3000" dirty="0">
-                  <a:solidFill>
-                    <a:schemeClr val="bg1"/>
-                  </a:solidFill>
-                  <a:latin typeface="휴먼매직체" panose="02030504000101010101" pitchFamily="18" charset="-127"/>
-                  <a:ea typeface="휴먼매직체" panose="02030504000101010101" pitchFamily="18" charset="-127"/>
-                  <a:cs typeface="맑은 고딕 Semilight" panose="020B0502040204020203" pitchFamily="50" charset="-127"/>
-                </a:rPr>
-                <a:t>1. Min-Heap </a:t>
-              </a:r>
-              <a:r>
-                <a:rPr lang="ko-KR" altLang="en-US" sz="3000" dirty="0">
-                  <a:solidFill>
-                    <a:schemeClr val="bg1"/>
-                  </a:solidFill>
-                  <a:latin typeface="휴먼매직체" panose="02030504000101010101" pitchFamily="18" charset="-127"/>
-                  <a:ea typeface="휴먼매직체" panose="02030504000101010101" pitchFamily="18" charset="-127"/>
-                  <a:cs typeface="맑은 고딕 Semilight" panose="020B0502040204020203" pitchFamily="50" charset="-127"/>
-                </a:rPr>
-                <a:t>기반 보스 패턴</a:t>
-              </a:r>
-              <a:endParaRPr lang="en-US" altLang="ko-KR" sz="3000" dirty="0">
-                <a:solidFill>
-                  <a:schemeClr val="bg1"/>
-                </a:solidFill>
-                <a:latin typeface="휴먼매직체" panose="02030504000101010101" pitchFamily="18" charset="-127"/>
-                <a:ea typeface="휴먼매직체" panose="02030504000101010101" pitchFamily="18" charset="-127"/>
-                <a:cs typeface="맑은 고딕 Semilight" panose="020B0502040204020203" pitchFamily="50" charset="-127"/>
-              </a:endParaRPr>
-            </a:p>
-            <a:p>
-              <a:endParaRPr lang="en-US" altLang="ko-KR" sz="3000" dirty="0">
-                <a:solidFill>
-                  <a:schemeClr val="bg1"/>
-                </a:solidFill>
-                <a:latin typeface="휴먼매직체" panose="02030504000101010101" pitchFamily="18" charset="-127"/>
-                <a:ea typeface="휴먼매직체" panose="02030504000101010101" pitchFamily="18" charset="-127"/>
-                <a:cs typeface="맑은 고딕 Semilight" panose="020B0502040204020203" pitchFamily="50" charset="-127"/>
-              </a:endParaRPr>
-            </a:p>
-            <a:p>
-              <a:endParaRPr lang="en-US" altLang="ko-KR" sz="3000" dirty="0">
-                <a:solidFill>
-                  <a:schemeClr val="bg1"/>
-                </a:solidFill>
-                <a:latin typeface="휴먼매직체" panose="02030504000101010101" pitchFamily="18" charset="-127"/>
-                <a:ea typeface="휴먼매직체" panose="02030504000101010101" pitchFamily="18" charset="-127"/>
-                <a:cs typeface="맑은 고딕 Semilight" panose="020B0502040204020203" pitchFamily="50" charset="-127"/>
-              </a:endParaRPr>
-            </a:p>
-            <a:p>
-              <a:endParaRPr lang="en-US" altLang="ko-KR" sz="3000" dirty="0">
-                <a:solidFill>
-                  <a:schemeClr val="bg1"/>
-                </a:solidFill>
-                <a:latin typeface="휴먼매직체" panose="02030504000101010101" pitchFamily="18" charset="-127"/>
-                <a:ea typeface="휴먼매직체" panose="02030504000101010101" pitchFamily="18" charset="-127"/>
-                <a:cs typeface="맑은 고딕 Semilight" panose="020B0502040204020203" pitchFamily="50" charset="-127"/>
-              </a:endParaRPr>
-            </a:p>
-            <a:p>
-              <a:endParaRPr lang="en-US" altLang="ko-KR" sz="3000" dirty="0">
-                <a:solidFill>
-                  <a:schemeClr val="bg1"/>
-                </a:solidFill>
-                <a:latin typeface="휴먼매직체" panose="02030504000101010101" pitchFamily="18" charset="-127"/>
-                <a:ea typeface="휴먼매직체" panose="02030504000101010101" pitchFamily="18" charset="-127"/>
-                <a:cs typeface="맑은 고딕 Semilight" panose="020B0502040204020203" pitchFamily="50" charset="-127"/>
-              </a:endParaRPr>
-            </a:p>
-            <a:p>
-              <a:endParaRPr lang="en-US" altLang="ko-KR" sz="3000" dirty="0">
-                <a:solidFill>
-                  <a:schemeClr val="bg1"/>
-                </a:solidFill>
-                <a:latin typeface="휴먼매직체" panose="02030504000101010101" pitchFamily="18" charset="-127"/>
-                <a:ea typeface="휴먼매직체" panose="02030504000101010101" pitchFamily="18" charset="-127"/>
-                <a:cs typeface="맑은 고딕 Semilight" panose="020B0502040204020203" pitchFamily="50" charset="-127"/>
-              </a:endParaRPr>
-            </a:p>
-            <a:p>
-              <a:endParaRPr lang="en-US" altLang="ko-KR" sz="3000" dirty="0">
-                <a:solidFill>
-                  <a:schemeClr val="bg1"/>
-                </a:solidFill>
-                <a:latin typeface="휴먼매직체" panose="02030504000101010101" pitchFamily="18" charset="-127"/>
-                <a:ea typeface="휴먼매직체" panose="02030504000101010101" pitchFamily="18" charset="-127"/>
-                <a:cs typeface="맑은 고딕 Semilight" panose="020B0502040204020203" pitchFamily="50" charset="-127"/>
-              </a:endParaRPr>
-            </a:p>
-            <a:p>
-              <a:endParaRPr lang="en-US" altLang="ko-KR" sz="3000" dirty="0">
-                <a:solidFill>
-                  <a:schemeClr val="bg1"/>
-                </a:solidFill>
-                <a:latin typeface="휴먼매직체" panose="02030504000101010101" pitchFamily="18" charset="-127"/>
-                <a:ea typeface="휴먼매직체" panose="02030504000101010101" pitchFamily="18" charset="-127"/>
-                <a:cs typeface="맑은 고딕 Semilight" panose="020B0502040204020203" pitchFamily="50" charset="-127"/>
-              </a:endParaRPr>
-            </a:p>
-            <a:p>
-              <a:endParaRPr lang="en-US" altLang="ko-KR" sz="3000" dirty="0">
-                <a:solidFill>
-                  <a:schemeClr val="bg1"/>
-                </a:solidFill>
-                <a:latin typeface="휴먼매직체" panose="02030504000101010101" pitchFamily="18" charset="-127"/>
-                <a:ea typeface="휴먼매직체" panose="02030504000101010101" pitchFamily="18" charset="-127"/>
-                <a:cs typeface="맑은 고딕 Semilight" panose="020B0502040204020203" pitchFamily="50" charset="-127"/>
-              </a:endParaRPr>
-            </a:p>
-            <a:p>
-              <a:pPr marL="342900" indent="-342900">
-                <a:buFontTx/>
-                <a:buChar char="-"/>
-              </a:pPr>
-              <a:r>
-                <a:rPr lang="ko-KR" altLang="en-US" sz="2000" dirty="0">
-                  <a:solidFill>
-                    <a:schemeClr val="bg1"/>
-                  </a:solidFill>
-                  <a:latin typeface="휴먼매직체" panose="02030504000101010101" pitchFamily="18" charset="-127"/>
-                  <a:ea typeface="휴먼매직체" panose="02030504000101010101" pitchFamily="18" charset="-127"/>
-                  <a:cs typeface="맑은 고딕 Semilight" panose="020B0502040204020203" pitchFamily="50" charset="-127"/>
-                </a:rPr>
-                <a:t>우선순위가 부여된 패턴을 </a:t>
-              </a:r>
-              <a:r>
-                <a:rPr lang="en-US" altLang="ko-KR" sz="2000" dirty="0">
-                  <a:solidFill>
-                    <a:schemeClr val="bg1"/>
-                  </a:solidFill>
-                  <a:latin typeface="휴먼매직체" panose="02030504000101010101" pitchFamily="18" charset="-127"/>
-                  <a:ea typeface="휴먼매직체" panose="02030504000101010101" pitchFamily="18" charset="-127"/>
-                  <a:cs typeface="맑은 고딕 Semilight" panose="020B0502040204020203" pitchFamily="50" charset="-127"/>
-                </a:rPr>
-                <a:t>Min-Heap</a:t>
-              </a:r>
-              <a:r>
-                <a:rPr lang="ko-KR" altLang="en-US" sz="2000" dirty="0">
-                  <a:solidFill>
-                    <a:schemeClr val="bg1"/>
-                  </a:solidFill>
-                  <a:latin typeface="휴먼매직체" panose="02030504000101010101" pitchFamily="18" charset="-127"/>
-                  <a:ea typeface="휴먼매직체" panose="02030504000101010101" pitchFamily="18" charset="-127"/>
-                  <a:cs typeface="맑은 고딕 Semilight" panose="020B0502040204020203" pitchFamily="50" charset="-127"/>
-                </a:rPr>
-                <a:t>을 통해 적절하게 섞여서 등장하도록 설계</a:t>
-              </a:r>
-              <a:endParaRPr lang="en-US" altLang="ko-KR" sz="2000" dirty="0">
-                <a:solidFill>
-                  <a:schemeClr val="bg1"/>
-                </a:solidFill>
-                <a:latin typeface="휴먼매직체" panose="02030504000101010101" pitchFamily="18" charset="-127"/>
-                <a:ea typeface="휴먼매직체" panose="02030504000101010101" pitchFamily="18" charset="-127"/>
-                <a:cs typeface="맑은 고딕 Semilight" panose="020B0502040204020203" pitchFamily="50" charset="-127"/>
-              </a:endParaRPr>
-            </a:p>
-            <a:p>
-              <a:pPr marL="342900" indent="-342900">
-                <a:buFontTx/>
-                <a:buChar char="-"/>
-              </a:pPr>
-              <a:r>
-                <a:rPr lang="ko-KR" altLang="en-US" sz="2000" dirty="0">
-                  <a:solidFill>
-                    <a:schemeClr val="bg1"/>
-                  </a:solidFill>
-                  <a:latin typeface="휴먼매직체" panose="02030504000101010101" pitchFamily="18" charset="-127"/>
-                  <a:ea typeface="휴먼매직체" panose="02030504000101010101" pitchFamily="18" charset="-127"/>
-                  <a:cs typeface="맑은 고딕 Semilight" panose="020B0502040204020203" pitchFamily="50" charset="-127"/>
-                </a:rPr>
-                <a:t>추상화를 통해 직관적인 패턴 추가 및 제거</a:t>
-              </a:r>
-              <a:endParaRPr lang="en-US" altLang="ko-KR" sz="2000" dirty="0">
-                <a:solidFill>
-                  <a:schemeClr val="bg1"/>
-                </a:solidFill>
-                <a:latin typeface="휴먼매직체" panose="02030504000101010101" pitchFamily="18" charset="-127"/>
-                <a:ea typeface="휴먼매직체" panose="02030504000101010101" pitchFamily="18" charset="-127"/>
-                <a:cs typeface="맑은 고딕 Semilight" panose="020B0502040204020203" pitchFamily="50" charset="-127"/>
-              </a:endParaRPr>
-            </a:p>
-          </p:txBody>
-        </p:sp>
-        <p:sp>
-          <p:nvSpPr>
-            <p:cNvPr id="2" name="직사각형 1">
-              <a:extLst>
-                <a:ext uri="{FF2B5EF4-FFF2-40B4-BE49-F238E27FC236}">
-                  <a16:creationId xmlns:a16="http://schemas.microsoft.com/office/drawing/2014/main" id="{2061F8D4-84FD-4A18-AC17-EFA9C3C449CB}"/>
+                  <a16:creationId xmlns:a16="http://schemas.microsoft.com/office/drawing/2014/main" id="{31A7084C-2279-4E00-B0B8-9FD9207FD6E2}"/>
                 </a:ext>
               </a:extLst>
             </p:cNvPr>
@@ -4203,12 +3953,22 @@
           </p:nvSpPr>
           <p:spPr>
             <a:xfrm>
-              <a:off x="2006600" y="685800"/>
-              <a:ext cx="8178800" cy="3333750"/>
+              <a:off x="0" y="443345"/>
+              <a:ext cx="12192000" cy="5971310"/>
             </a:xfrm>
             <a:prstGeom prst="rect">
               <a:avLst/>
             </a:prstGeom>
+            <a:solidFill>
+              <a:schemeClr val="tx1">
+                <a:alpha val="75000"/>
+              </a:schemeClr>
+            </a:solidFill>
+            <a:ln>
+              <a:solidFill>
+                <a:schemeClr val="tx1"/>
+              </a:solidFill>
+            </a:ln>
           </p:spPr>
           <p:style>
             <a:lnRef idx="2">
@@ -4231,11 +3991,180 @@
             <a:lstStyle/>
             <a:p>
               <a:pPr algn="ctr"/>
-              <a:endParaRPr lang="ko-KR" altLang="en-US"/>
+              <a:endParaRPr lang="ko-KR" altLang="en-US" dirty="0"/>
+            </a:p>
+          </p:txBody>
+        </p:sp>
+        <p:sp>
+          <p:nvSpPr>
+            <p:cNvPr id="9" name="TextBox 8">
+              <a:extLst>
+                <a:ext uri="{FF2B5EF4-FFF2-40B4-BE49-F238E27FC236}">
+                  <a16:creationId xmlns:a16="http://schemas.microsoft.com/office/drawing/2014/main" id="{691C14A7-E91F-416A-8C12-508089151B6F}"/>
+                </a:ext>
+              </a:extLst>
+            </p:cNvPr>
+            <p:cNvSpPr txBox="1"/>
+            <p:nvPr/>
+          </p:nvSpPr>
+          <p:spPr>
+            <a:xfrm>
+              <a:off x="0" y="443345"/>
+              <a:ext cx="12192001" cy="1200329"/>
+            </a:xfrm>
+            <a:prstGeom prst="rect">
+              <a:avLst/>
+            </a:prstGeom>
+            <a:noFill/>
+          </p:spPr>
+          <p:txBody>
+            <a:bodyPr wrap="square" rtlCol="0">
+              <a:spAutoFit/>
+            </a:bodyPr>
+            <a:lstStyle/>
+            <a:p>
+              <a:r>
+                <a:rPr lang="en-US" altLang="ko-KR" sz="3200" dirty="0">
+                  <a:solidFill>
+                    <a:schemeClr val="bg1"/>
+                  </a:solidFill>
+                  <a:latin typeface="휴먼매직체" panose="02030504000101010101" pitchFamily="18" charset="-127"/>
+                  <a:ea typeface="휴먼매직체" panose="02030504000101010101" pitchFamily="18" charset="-127"/>
+                  <a:cs typeface="맑은 고딕 Semilight" panose="020B0502040204020203" pitchFamily="50" charset="-127"/>
+                </a:rPr>
+                <a:t>1. Min-Heap </a:t>
+              </a:r>
+              <a:r>
+                <a:rPr lang="ko-KR" altLang="en-US" sz="3200" dirty="0">
+                  <a:solidFill>
+                    <a:schemeClr val="bg1"/>
+                  </a:solidFill>
+                  <a:latin typeface="휴먼매직체" panose="02030504000101010101" pitchFamily="18" charset="-127"/>
+                  <a:ea typeface="휴먼매직체" panose="02030504000101010101" pitchFamily="18" charset="-127"/>
+                  <a:cs typeface="맑은 고딕 Semilight" panose="020B0502040204020203" pitchFamily="50" charset="-127"/>
+                </a:rPr>
+                <a:t>기반 보스 패턴</a:t>
+              </a:r>
+              <a:endParaRPr lang="en-US" altLang="ko-KR" sz="3200" dirty="0">
+                <a:solidFill>
+                  <a:schemeClr val="bg1"/>
+                </a:solidFill>
+                <a:latin typeface="휴먼매직체" panose="02030504000101010101" pitchFamily="18" charset="-127"/>
+                <a:ea typeface="휴먼매직체" panose="02030504000101010101" pitchFamily="18" charset="-127"/>
+                <a:cs typeface="맑은 고딕 Semilight" panose="020B0502040204020203" pitchFamily="50" charset="-127"/>
+              </a:endParaRPr>
+            </a:p>
+            <a:p>
+              <a:pPr marL="342900" indent="-342900">
+                <a:buFontTx/>
+                <a:buChar char="-"/>
+              </a:pPr>
+              <a:r>
+                <a:rPr lang="ko-KR" altLang="en-US" sz="2000" dirty="0">
+                  <a:solidFill>
+                    <a:schemeClr val="bg1"/>
+                  </a:solidFill>
+                  <a:latin typeface="휴먼매직체" panose="02030504000101010101" pitchFamily="18" charset="-127"/>
+                  <a:ea typeface="휴먼매직체" panose="02030504000101010101" pitchFamily="18" charset="-127"/>
+                  <a:cs typeface="맑은 고딕 Semilight" panose="020B0502040204020203" pitchFamily="50" charset="-127"/>
+                </a:rPr>
+                <a:t>우선순위가 부여된 패턴을 </a:t>
+              </a:r>
+              <a:r>
+                <a:rPr lang="en-US" altLang="ko-KR" sz="2000" dirty="0">
+                  <a:solidFill>
+                    <a:schemeClr val="bg1"/>
+                  </a:solidFill>
+                  <a:latin typeface="휴먼매직체" panose="02030504000101010101" pitchFamily="18" charset="-127"/>
+                  <a:ea typeface="휴먼매직체" panose="02030504000101010101" pitchFamily="18" charset="-127"/>
+                  <a:cs typeface="맑은 고딕 Semilight" panose="020B0502040204020203" pitchFamily="50" charset="-127"/>
+                </a:rPr>
+                <a:t>Min-Heap</a:t>
+              </a:r>
+              <a:r>
+                <a:rPr lang="ko-KR" altLang="en-US" sz="2000" dirty="0">
+                  <a:solidFill>
+                    <a:schemeClr val="bg1"/>
+                  </a:solidFill>
+                  <a:latin typeface="휴먼매직체" panose="02030504000101010101" pitchFamily="18" charset="-127"/>
+                  <a:ea typeface="휴먼매직체" panose="02030504000101010101" pitchFamily="18" charset="-127"/>
+                  <a:cs typeface="맑은 고딕 Semilight" panose="020B0502040204020203" pitchFamily="50" charset="-127"/>
+                </a:rPr>
+                <a:t>을 통해 적절하게 섞여서 등장하도록 설계</a:t>
+              </a:r>
+              <a:endParaRPr lang="en-US" altLang="ko-KR" sz="2000" dirty="0">
+                <a:solidFill>
+                  <a:schemeClr val="bg1"/>
+                </a:solidFill>
+                <a:latin typeface="휴먼매직체" panose="02030504000101010101" pitchFamily="18" charset="-127"/>
+                <a:ea typeface="휴먼매직체" panose="02030504000101010101" pitchFamily="18" charset="-127"/>
+                <a:cs typeface="맑은 고딕 Semilight" panose="020B0502040204020203" pitchFamily="50" charset="-127"/>
+              </a:endParaRPr>
+            </a:p>
+            <a:p>
+              <a:pPr marL="342900" indent="-342900">
+                <a:buFontTx/>
+                <a:buChar char="-"/>
+              </a:pPr>
+              <a:r>
+                <a:rPr lang="ko-KR" altLang="en-US" sz="2000" dirty="0">
+                  <a:solidFill>
+                    <a:schemeClr val="bg1"/>
+                  </a:solidFill>
+                  <a:latin typeface="휴먼매직체" panose="02030504000101010101" pitchFamily="18" charset="-127"/>
+                  <a:ea typeface="휴먼매직체" panose="02030504000101010101" pitchFamily="18" charset="-127"/>
+                  <a:cs typeface="맑은 고딕 Semilight" panose="020B0502040204020203" pitchFamily="50" charset="-127"/>
+                </a:rPr>
+                <a:t>추상화를 통해 직관적인 패턴 추가 및 제거</a:t>
+              </a:r>
+              <a:endParaRPr lang="en-US" altLang="ko-KR" sz="2000" dirty="0">
+                <a:solidFill>
+                  <a:schemeClr val="bg1"/>
+                </a:solidFill>
+                <a:latin typeface="휴먼매직체" panose="02030504000101010101" pitchFamily="18" charset="-127"/>
+                <a:ea typeface="휴먼매직체" panose="02030504000101010101" pitchFamily="18" charset="-127"/>
+                <a:cs typeface="맑은 고딕 Semilight" panose="020B0502040204020203" pitchFamily="50" charset="-127"/>
+              </a:endParaRPr>
             </a:p>
           </p:txBody>
         </p:sp>
       </p:grpSp>
+      <p:pic>
+        <p:nvPicPr>
+          <p:cNvPr id="3" name="그림 2">
+            <a:extLst>
+              <a:ext uri="{FF2B5EF4-FFF2-40B4-BE49-F238E27FC236}">
+                <a16:creationId xmlns:a16="http://schemas.microsoft.com/office/drawing/2014/main" id="{CB526686-1CBF-4687-9A31-C0FF7868F810}"/>
+              </a:ext>
+            </a:extLst>
+          </p:cNvPr>
+          <p:cNvPicPr>
+            <a:picLocks noChangeAspect="1"/>
+          </p:cNvPicPr>
+          <p:nvPr/>
+        </p:nvPicPr>
+        <p:blipFill>
+          <a:blip r:embed="rId3">
+            <a:extLst>
+              <a:ext uri="{28A0092B-C50C-407E-A947-70E740481C1C}">
+                <a14:useLocalDpi xmlns:a14="http://schemas.microsoft.com/office/drawing/2010/main" val="0"/>
+              </a:ext>
+            </a:extLst>
+          </a:blip>
+          <a:stretch>
+            <a:fillRect/>
+          </a:stretch>
+        </p:blipFill>
+        <p:spPr>
+          <a:xfrm>
+            <a:off x="6792380" y="2144390"/>
+            <a:ext cx="4807742" cy="3738770"/>
+          </a:xfrm>
+          <a:prstGeom prst="rect">
+            <a:avLst/>
+          </a:prstGeom>
+        </p:spPr>
+      </p:pic>
     </p:spTree>
     <p:extLst>
       <p:ext uri="{BB962C8B-B14F-4D97-AF65-F5344CB8AC3E}">
@@ -4281,68 +4210,12 @@
           <a:chExt cx="0" cy="0"/>
         </a:xfrm>
       </p:grpSpPr>
-      <p:sp>
-        <p:nvSpPr>
-          <p:cNvPr id="7" name="직사각형 6">
-            <a:extLst>
-              <a:ext uri="{FF2B5EF4-FFF2-40B4-BE49-F238E27FC236}">
-                <a16:creationId xmlns:a16="http://schemas.microsoft.com/office/drawing/2014/main" id="{FAF039C7-1241-4A3A-A71D-134FBDB4F443}"/>
-              </a:ext>
-            </a:extLst>
-          </p:cNvPr>
-          <p:cNvSpPr/>
-          <p:nvPr/>
-        </p:nvSpPr>
-        <p:spPr>
-          <a:xfrm>
-            <a:off x="1611085" y="0"/>
-            <a:ext cx="8969830" cy="6858000"/>
-          </a:xfrm>
-          <a:prstGeom prst="rect">
-            <a:avLst/>
-          </a:prstGeom>
-          <a:solidFill>
-            <a:schemeClr val="tx1">
-              <a:alpha val="75000"/>
-            </a:schemeClr>
-          </a:solidFill>
-          <a:ln>
-            <a:solidFill>
-              <a:schemeClr val="tx1"/>
-            </a:solidFill>
-          </a:ln>
-        </p:spPr>
-        <p:style>
-          <a:lnRef idx="2">
-            <a:schemeClr val="accent1">
-              <a:shade val="50000"/>
-            </a:schemeClr>
-          </a:lnRef>
-          <a:fillRef idx="1">
-            <a:schemeClr val="accent1"/>
-          </a:fillRef>
-          <a:effectRef idx="0">
-            <a:schemeClr val="accent1"/>
-          </a:effectRef>
-          <a:fontRef idx="minor">
-            <a:schemeClr val="lt1"/>
-          </a:fontRef>
-        </p:style>
-        <p:txBody>
-          <a:bodyPr rtlCol="0" anchor="ctr"/>
-          <a:lstStyle/>
-          <a:p>
-            <a:pPr algn="ctr"/>
-            <a:endParaRPr lang="ko-KR" altLang="en-US" dirty="0"/>
-          </a:p>
-        </p:txBody>
-      </p:sp>
       <p:grpSp>
         <p:nvGrpSpPr>
-          <p:cNvPr id="5" name="그룹 4">
-            <a:extLst>
-              <a:ext uri="{FF2B5EF4-FFF2-40B4-BE49-F238E27FC236}">
-                <a16:creationId xmlns:a16="http://schemas.microsoft.com/office/drawing/2014/main" id="{D33DBFCB-68D3-4120-8E49-C62E310B71E6}"/>
+          <p:cNvPr id="9" name="그룹 8">
+            <a:extLst>
+              <a:ext uri="{FF2B5EF4-FFF2-40B4-BE49-F238E27FC236}">
+                <a16:creationId xmlns:a16="http://schemas.microsoft.com/office/drawing/2014/main" id="{4A130B1D-47B7-45D5-81D3-E04A1519FEB6}"/>
               </a:ext>
             </a:extLst>
           </p:cNvPr>
@@ -4351,308 +4224,18 @@
         </p:nvGrpSpPr>
         <p:grpSpPr>
           <a:xfrm>
-            <a:off x="1611085" y="0"/>
-            <a:ext cx="8969830" cy="4893647"/>
-            <a:chOff x="1611085" y="0"/>
-            <a:chExt cx="8969830" cy="4893647"/>
+            <a:off x="0" y="443345"/>
+            <a:ext cx="12192001" cy="5971310"/>
+            <a:chOff x="0" y="443345"/>
+            <a:chExt cx="12192001" cy="5971310"/>
           </a:xfrm>
         </p:grpSpPr>
         <p:sp>
           <p:nvSpPr>
-            <p:cNvPr id="6" name="TextBox 5">
+            <p:cNvPr id="10" name="직사각형 9">
               <a:extLst>
                 <a:ext uri="{FF2B5EF4-FFF2-40B4-BE49-F238E27FC236}">
-                  <a16:creationId xmlns:a16="http://schemas.microsoft.com/office/drawing/2014/main" id="{9E391E79-18D7-4D04-AB5E-133BBF8E897B}"/>
-                </a:ext>
-              </a:extLst>
-            </p:cNvPr>
-            <p:cNvSpPr txBox="1"/>
-            <p:nvPr/>
-          </p:nvSpPr>
-          <p:spPr>
-            <a:xfrm>
-              <a:off x="1611085" y="0"/>
-              <a:ext cx="8969830" cy="4893647"/>
-            </a:xfrm>
-            <a:prstGeom prst="rect">
-              <a:avLst/>
-            </a:prstGeom>
-            <a:noFill/>
-          </p:spPr>
-          <p:txBody>
-            <a:bodyPr wrap="square" rtlCol="0">
-              <a:spAutoFit/>
-            </a:bodyPr>
-            <a:lstStyle/>
-            <a:p>
-              <a:r>
-                <a:rPr lang="en-US" altLang="ko-KR" sz="3000" dirty="0">
-                  <a:solidFill>
-                    <a:schemeClr val="bg1"/>
-                  </a:solidFill>
-                  <a:latin typeface="휴먼매직체" panose="02030504000101010101" pitchFamily="18" charset="-127"/>
-                  <a:ea typeface="휴먼매직체" panose="02030504000101010101" pitchFamily="18" charset="-127"/>
-                  <a:cs typeface="맑은 고딕 Semilight" panose="020B0502040204020203" pitchFamily="50" charset="-127"/>
-                </a:rPr>
-                <a:t>2. </a:t>
-              </a:r>
-              <a:r>
-                <a:rPr lang="ko-KR" altLang="en-US" sz="3200" dirty="0">
-                  <a:solidFill>
-                    <a:schemeClr val="bg1"/>
-                  </a:solidFill>
-                  <a:latin typeface="휴먼매직체" panose="02030504000101010101" pitchFamily="18" charset="-127"/>
-                  <a:ea typeface="휴먼매직체" panose="02030504000101010101" pitchFamily="18" charset="-127"/>
-                  <a:cs typeface="맑은 고딕 Semilight" panose="020B0502040204020203" pitchFamily="50" charset="-127"/>
-                </a:rPr>
-                <a:t>안전 구역 기반 </a:t>
-              </a:r>
-              <a:r>
-                <a:rPr lang="ko-KR" altLang="en-US" sz="3200" dirty="0" err="1">
-                  <a:solidFill>
-                    <a:schemeClr val="bg1"/>
-                  </a:solidFill>
-                  <a:latin typeface="휴먼매직체" panose="02030504000101010101" pitchFamily="18" charset="-127"/>
-                  <a:ea typeface="휴먼매직체" panose="02030504000101010101" pitchFamily="18" charset="-127"/>
-                  <a:cs typeface="맑은 고딕 Semilight" panose="020B0502040204020203" pitchFamily="50" charset="-127"/>
-                </a:rPr>
-                <a:t>스폰</a:t>
-              </a:r>
-              <a:r>
-                <a:rPr lang="ko-KR" altLang="en-US" sz="3200" dirty="0">
-                  <a:solidFill>
-                    <a:schemeClr val="bg1"/>
-                  </a:solidFill>
-                  <a:latin typeface="휴먼매직체" panose="02030504000101010101" pitchFamily="18" charset="-127"/>
-                  <a:ea typeface="휴먼매직체" panose="02030504000101010101" pitchFamily="18" charset="-127"/>
-                  <a:cs typeface="맑은 고딕 Semilight" panose="020B0502040204020203" pitchFamily="50" charset="-127"/>
-                </a:rPr>
-                <a:t> 시스템</a:t>
-              </a:r>
-              <a:endParaRPr lang="en-US" altLang="ko-KR" sz="3000" dirty="0">
-                <a:solidFill>
-                  <a:schemeClr val="bg1"/>
-                </a:solidFill>
-                <a:latin typeface="휴먼매직체" panose="02030504000101010101" pitchFamily="18" charset="-127"/>
-                <a:ea typeface="휴먼매직체" panose="02030504000101010101" pitchFamily="18" charset="-127"/>
-                <a:cs typeface="맑은 고딕 Semilight" panose="020B0502040204020203" pitchFamily="50" charset="-127"/>
-              </a:endParaRPr>
-            </a:p>
-            <a:p>
-              <a:endParaRPr lang="en-US" altLang="ko-KR" sz="3000" dirty="0">
-                <a:solidFill>
-                  <a:schemeClr val="bg1"/>
-                </a:solidFill>
-                <a:latin typeface="휴먼매직체" panose="02030504000101010101" pitchFamily="18" charset="-127"/>
-                <a:ea typeface="휴먼매직체" panose="02030504000101010101" pitchFamily="18" charset="-127"/>
-                <a:cs typeface="맑은 고딕 Semilight" panose="020B0502040204020203" pitchFamily="50" charset="-127"/>
-              </a:endParaRPr>
-            </a:p>
-            <a:p>
-              <a:endParaRPr lang="en-US" altLang="ko-KR" sz="3000" dirty="0">
-                <a:solidFill>
-                  <a:schemeClr val="bg1"/>
-                </a:solidFill>
-                <a:latin typeface="휴먼매직체" panose="02030504000101010101" pitchFamily="18" charset="-127"/>
-                <a:ea typeface="휴먼매직체" panose="02030504000101010101" pitchFamily="18" charset="-127"/>
-                <a:cs typeface="맑은 고딕 Semilight" panose="020B0502040204020203" pitchFamily="50" charset="-127"/>
-              </a:endParaRPr>
-            </a:p>
-            <a:p>
-              <a:endParaRPr lang="en-US" altLang="ko-KR" sz="3000" dirty="0">
-                <a:solidFill>
-                  <a:schemeClr val="bg1"/>
-                </a:solidFill>
-                <a:latin typeface="휴먼매직체" panose="02030504000101010101" pitchFamily="18" charset="-127"/>
-                <a:ea typeface="휴먼매직체" panose="02030504000101010101" pitchFamily="18" charset="-127"/>
-                <a:cs typeface="맑은 고딕 Semilight" panose="020B0502040204020203" pitchFamily="50" charset="-127"/>
-              </a:endParaRPr>
-            </a:p>
-            <a:p>
-              <a:endParaRPr lang="en-US" altLang="ko-KR" sz="3000" dirty="0">
-                <a:solidFill>
-                  <a:schemeClr val="bg1"/>
-                </a:solidFill>
-                <a:latin typeface="휴먼매직체" panose="02030504000101010101" pitchFamily="18" charset="-127"/>
-                <a:ea typeface="휴먼매직체" panose="02030504000101010101" pitchFamily="18" charset="-127"/>
-                <a:cs typeface="맑은 고딕 Semilight" panose="020B0502040204020203" pitchFamily="50" charset="-127"/>
-              </a:endParaRPr>
-            </a:p>
-            <a:p>
-              <a:endParaRPr lang="en-US" altLang="ko-KR" sz="3000" dirty="0">
-                <a:solidFill>
-                  <a:schemeClr val="bg1"/>
-                </a:solidFill>
-                <a:latin typeface="휴먼매직체" panose="02030504000101010101" pitchFamily="18" charset="-127"/>
-                <a:ea typeface="휴먼매직체" panose="02030504000101010101" pitchFamily="18" charset="-127"/>
-                <a:cs typeface="맑은 고딕 Semilight" panose="020B0502040204020203" pitchFamily="50" charset="-127"/>
-              </a:endParaRPr>
-            </a:p>
-            <a:p>
-              <a:endParaRPr lang="en-US" altLang="ko-KR" sz="3000" dirty="0">
-                <a:solidFill>
-                  <a:schemeClr val="bg1"/>
-                </a:solidFill>
-                <a:latin typeface="휴먼매직체" panose="02030504000101010101" pitchFamily="18" charset="-127"/>
-                <a:ea typeface="휴먼매직체" panose="02030504000101010101" pitchFamily="18" charset="-127"/>
-                <a:cs typeface="맑은 고딕 Semilight" panose="020B0502040204020203" pitchFamily="50" charset="-127"/>
-              </a:endParaRPr>
-            </a:p>
-            <a:p>
-              <a:endParaRPr lang="en-US" altLang="ko-KR" sz="3000" dirty="0">
-                <a:solidFill>
-                  <a:schemeClr val="bg1"/>
-                </a:solidFill>
-                <a:latin typeface="휴먼매직체" panose="02030504000101010101" pitchFamily="18" charset="-127"/>
-                <a:ea typeface="휴먼매직체" panose="02030504000101010101" pitchFamily="18" charset="-127"/>
-                <a:cs typeface="맑은 고딕 Semilight" panose="020B0502040204020203" pitchFamily="50" charset="-127"/>
-              </a:endParaRPr>
-            </a:p>
-            <a:p>
-              <a:endParaRPr lang="en-US" altLang="ko-KR" sz="3000" dirty="0">
-                <a:solidFill>
-                  <a:schemeClr val="bg1"/>
-                </a:solidFill>
-                <a:latin typeface="휴먼매직체" panose="02030504000101010101" pitchFamily="18" charset="-127"/>
-                <a:ea typeface="휴먼매직체" panose="02030504000101010101" pitchFamily="18" charset="-127"/>
-                <a:cs typeface="맑은 고딕 Semilight" panose="020B0502040204020203" pitchFamily="50" charset="-127"/>
-              </a:endParaRPr>
-            </a:p>
-            <a:p>
-              <a:pPr marL="342900" indent="-342900">
-                <a:buFontTx/>
-                <a:buChar char="-"/>
-              </a:pPr>
-              <a:r>
-                <a:rPr lang="en-US" altLang="ko-KR" sz="2000" dirty="0">
-                  <a:solidFill>
-                    <a:schemeClr val="bg1"/>
-                  </a:solidFill>
-                  <a:latin typeface="휴먼매직체" panose="02030504000101010101" pitchFamily="18" charset="-127"/>
-                  <a:ea typeface="휴먼매직체" panose="02030504000101010101" pitchFamily="18" charset="-127"/>
-                  <a:cs typeface="맑은 고딕 Semilight" panose="020B0502040204020203" pitchFamily="50" charset="-127"/>
-                </a:rPr>
-                <a:t>Collider</a:t>
-              </a:r>
-              <a:r>
-                <a:rPr lang="ko-KR" altLang="en-US" sz="2000" dirty="0">
-                  <a:solidFill>
-                    <a:schemeClr val="bg1"/>
-                  </a:solidFill>
-                  <a:latin typeface="휴먼매직체" panose="02030504000101010101" pitchFamily="18" charset="-127"/>
-                  <a:ea typeface="휴먼매직체" panose="02030504000101010101" pitchFamily="18" charset="-127"/>
-                  <a:cs typeface="맑은 고딕 Semilight" panose="020B0502040204020203" pitchFamily="50" charset="-127"/>
-                </a:rPr>
-                <a:t>와 겹쳐진 상태로 </a:t>
-              </a:r>
-              <a:r>
-                <a:rPr lang="ko-KR" altLang="en-US" sz="2000" dirty="0" err="1">
-                  <a:solidFill>
-                    <a:schemeClr val="bg1"/>
-                  </a:solidFill>
-                  <a:latin typeface="휴먼매직체" panose="02030504000101010101" pitchFamily="18" charset="-127"/>
-                  <a:ea typeface="휴먼매직체" panose="02030504000101010101" pitchFamily="18" charset="-127"/>
-                  <a:cs typeface="맑은 고딕 Semilight" panose="020B0502040204020203" pitchFamily="50" charset="-127"/>
-                </a:rPr>
-                <a:t>스폰</a:t>
-              </a:r>
-              <a:r>
-                <a:rPr lang="ko-KR" altLang="en-US" sz="2000" dirty="0">
-                  <a:solidFill>
-                    <a:schemeClr val="bg1"/>
-                  </a:solidFill>
-                  <a:latin typeface="휴먼매직체" panose="02030504000101010101" pitchFamily="18" charset="-127"/>
-                  <a:ea typeface="휴먼매직체" panose="02030504000101010101" pitchFamily="18" charset="-127"/>
-                  <a:cs typeface="맑은 고딕 Semilight" panose="020B0502040204020203" pitchFamily="50" charset="-127"/>
-                </a:rPr>
-                <a:t> 시</a:t>
-              </a:r>
-              <a:r>
-                <a:rPr lang="en-US" altLang="ko-KR" sz="2000" dirty="0">
-                  <a:solidFill>
-                    <a:schemeClr val="bg1"/>
-                  </a:solidFill>
-                  <a:latin typeface="휴먼매직체" panose="02030504000101010101" pitchFamily="18" charset="-127"/>
-                  <a:ea typeface="휴먼매직체" panose="02030504000101010101" pitchFamily="18" charset="-127"/>
-                  <a:cs typeface="맑은 고딕 Semilight" panose="020B0502040204020203" pitchFamily="50" charset="-127"/>
-                </a:rPr>
-                <a:t>, </a:t>
-              </a:r>
-              <a:r>
-                <a:rPr lang="ko-KR" altLang="en-US" sz="2000" dirty="0">
-                  <a:solidFill>
-                    <a:schemeClr val="bg1"/>
-                  </a:solidFill>
-                  <a:latin typeface="휴먼매직체" panose="02030504000101010101" pitchFamily="18" charset="-127"/>
-                  <a:ea typeface="휴먼매직체" panose="02030504000101010101" pitchFamily="18" charset="-127"/>
-                  <a:cs typeface="맑은 고딕 Semilight" panose="020B0502040204020203" pitchFamily="50" charset="-127"/>
-                </a:rPr>
-                <a:t>안전 좌표로 즉시 이동</a:t>
-              </a:r>
-              <a:endParaRPr lang="en-US" altLang="ko-KR" sz="2000" dirty="0">
-                <a:solidFill>
-                  <a:schemeClr val="bg1"/>
-                </a:solidFill>
-                <a:latin typeface="휴먼매직체" panose="02030504000101010101" pitchFamily="18" charset="-127"/>
-                <a:ea typeface="휴먼매직체" panose="02030504000101010101" pitchFamily="18" charset="-127"/>
-                <a:cs typeface="맑은 고딕 Semilight" panose="020B0502040204020203" pitchFamily="50" charset="-127"/>
-              </a:endParaRPr>
-            </a:p>
-            <a:p>
-              <a:pPr marL="342900" indent="-342900">
-                <a:buFontTx/>
-                <a:buChar char="-"/>
-              </a:pPr>
-              <a:r>
-                <a:rPr lang="ko-KR" altLang="en-US" sz="2000" dirty="0">
-                  <a:solidFill>
-                    <a:schemeClr val="bg1"/>
-                  </a:solidFill>
-                  <a:latin typeface="휴먼매직체" panose="02030504000101010101" pitchFamily="18" charset="-127"/>
-                  <a:ea typeface="휴먼매직체" panose="02030504000101010101" pitchFamily="18" charset="-127"/>
-                  <a:cs typeface="맑은 고딕 Semilight" panose="020B0502040204020203" pitchFamily="50" charset="-127"/>
-                </a:rPr>
-                <a:t>몬스터끼리 겹쳐진 경우</a:t>
-              </a:r>
-              <a:r>
-                <a:rPr lang="en-US" altLang="ko-KR" sz="2000" dirty="0">
-                  <a:solidFill>
-                    <a:schemeClr val="bg1"/>
-                  </a:solidFill>
-                  <a:latin typeface="휴먼매직체" panose="02030504000101010101" pitchFamily="18" charset="-127"/>
-                  <a:ea typeface="휴먼매직체" panose="02030504000101010101" pitchFamily="18" charset="-127"/>
-                  <a:cs typeface="맑은 고딕 Semilight" panose="020B0502040204020203" pitchFamily="50" charset="-127"/>
-                </a:rPr>
-                <a:t>, </a:t>
-              </a:r>
-              <a:r>
-                <a:rPr lang="ko-KR" altLang="en-US" sz="2000" dirty="0">
-                  <a:solidFill>
-                    <a:schemeClr val="bg1"/>
-                  </a:solidFill>
-                  <a:latin typeface="휴먼매직체" panose="02030504000101010101" pitchFamily="18" charset="-127"/>
-                  <a:ea typeface="휴먼매직체" panose="02030504000101010101" pitchFamily="18" charset="-127"/>
-                  <a:cs typeface="맑은 고딕 Semilight" panose="020B0502040204020203" pitchFamily="50" charset="-127"/>
-                </a:rPr>
-                <a:t>동일한 거리만큼 반대로 밀어내도록 구성</a:t>
-              </a:r>
-              <a:endParaRPr lang="en-US" altLang="ko-KR" sz="2000" dirty="0">
-                <a:solidFill>
-                  <a:schemeClr val="bg1"/>
-                </a:solidFill>
-                <a:latin typeface="휴먼매직체" panose="02030504000101010101" pitchFamily="18" charset="-127"/>
-                <a:ea typeface="휴먼매직체" panose="02030504000101010101" pitchFamily="18" charset="-127"/>
-                <a:cs typeface="맑은 고딕 Semilight" panose="020B0502040204020203" pitchFamily="50" charset="-127"/>
-              </a:endParaRPr>
-            </a:p>
-          </p:txBody>
-        </p:sp>
-        <p:sp>
-          <p:nvSpPr>
-            <p:cNvPr id="8" name="직사각형 7">
-              <a:extLst>
-                <a:ext uri="{FF2B5EF4-FFF2-40B4-BE49-F238E27FC236}">
-                  <a16:creationId xmlns:a16="http://schemas.microsoft.com/office/drawing/2014/main" id="{BB196122-B511-45C3-921E-7813130F4A13}"/>
+                  <a16:creationId xmlns:a16="http://schemas.microsoft.com/office/drawing/2014/main" id="{AC700A7C-6D84-479D-A82B-F09A9142F43C}"/>
                 </a:ext>
               </a:extLst>
             </p:cNvPr>
@@ -4661,12 +4244,22 @@
           </p:nvSpPr>
           <p:spPr>
             <a:xfrm>
-              <a:off x="2006600" y="685800"/>
-              <a:ext cx="8178800" cy="3333750"/>
+              <a:off x="0" y="443345"/>
+              <a:ext cx="12192000" cy="5971310"/>
             </a:xfrm>
             <a:prstGeom prst="rect">
               <a:avLst/>
             </a:prstGeom>
+            <a:solidFill>
+              <a:schemeClr val="tx1">
+                <a:alpha val="75000"/>
+              </a:schemeClr>
+            </a:solidFill>
+            <a:ln>
+              <a:solidFill>
+                <a:schemeClr val="tx1"/>
+              </a:solidFill>
+            </a:ln>
           </p:spPr>
           <p:style>
             <a:lnRef idx="2">
@@ -4689,11 +4282,266 @@
             <a:lstStyle/>
             <a:p>
               <a:pPr algn="ctr"/>
-              <a:endParaRPr lang="ko-KR" altLang="en-US"/>
+              <a:endParaRPr lang="ko-KR" altLang="en-US" dirty="0"/>
+            </a:p>
+          </p:txBody>
+        </p:sp>
+        <p:sp>
+          <p:nvSpPr>
+            <p:cNvPr id="11" name="TextBox 10">
+              <a:extLst>
+                <a:ext uri="{FF2B5EF4-FFF2-40B4-BE49-F238E27FC236}">
+                  <a16:creationId xmlns:a16="http://schemas.microsoft.com/office/drawing/2014/main" id="{2C77EE02-F737-4393-BE49-1BF08A7E14C1}"/>
+                </a:ext>
+              </a:extLst>
+            </p:cNvPr>
+            <p:cNvSpPr txBox="1"/>
+            <p:nvPr/>
+          </p:nvSpPr>
+          <p:spPr>
+            <a:xfrm>
+              <a:off x="0" y="443345"/>
+              <a:ext cx="12192001" cy="1508105"/>
+            </a:xfrm>
+            <a:prstGeom prst="rect">
+              <a:avLst/>
+            </a:prstGeom>
+            <a:noFill/>
+          </p:spPr>
+          <p:txBody>
+            <a:bodyPr wrap="square" rtlCol="0">
+              <a:spAutoFit/>
+            </a:bodyPr>
+            <a:lstStyle/>
+            <a:p>
+              <a:r>
+                <a:rPr lang="en-US" altLang="ko-KR" sz="3000" dirty="0">
+                  <a:solidFill>
+                    <a:schemeClr val="bg1"/>
+                  </a:solidFill>
+                  <a:latin typeface="휴먼매직체" panose="02030504000101010101" pitchFamily="18" charset="-127"/>
+                  <a:ea typeface="휴먼매직체" panose="02030504000101010101" pitchFamily="18" charset="-127"/>
+                  <a:cs typeface="맑은 고딕 Semilight" panose="020B0502040204020203" pitchFamily="50" charset="-127"/>
+                </a:rPr>
+                <a:t>2. </a:t>
+              </a:r>
+              <a:r>
+                <a:rPr lang="ko-KR" altLang="en-US" sz="3200" dirty="0">
+                  <a:solidFill>
+                    <a:schemeClr val="bg1"/>
+                  </a:solidFill>
+                  <a:latin typeface="휴먼매직체" panose="02030504000101010101" pitchFamily="18" charset="-127"/>
+                  <a:ea typeface="휴먼매직체" panose="02030504000101010101" pitchFamily="18" charset="-127"/>
+                  <a:cs typeface="맑은 고딕 Semilight" panose="020B0502040204020203" pitchFamily="50" charset="-127"/>
+                </a:rPr>
+                <a:t>안전 구역 기반 </a:t>
+              </a:r>
+              <a:r>
+                <a:rPr lang="ko-KR" altLang="en-US" sz="3200" dirty="0" err="1">
+                  <a:solidFill>
+                    <a:schemeClr val="bg1"/>
+                  </a:solidFill>
+                  <a:latin typeface="휴먼매직체" panose="02030504000101010101" pitchFamily="18" charset="-127"/>
+                  <a:ea typeface="휴먼매직체" panose="02030504000101010101" pitchFamily="18" charset="-127"/>
+                  <a:cs typeface="맑은 고딕 Semilight" panose="020B0502040204020203" pitchFamily="50" charset="-127"/>
+                </a:rPr>
+                <a:t>스폰</a:t>
+              </a:r>
+              <a:r>
+                <a:rPr lang="ko-KR" altLang="en-US" sz="3200" dirty="0">
+                  <a:solidFill>
+                    <a:schemeClr val="bg1"/>
+                  </a:solidFill>
+                  <a:latin typeface="휴먼매직체" panose="02030504000101010101" pitchFamily="18" charset="-127"/>
+                  <a:ea typeface="휴먼매직체" panose="02030504000101010101" pitchFamily="18" charset="-127"/>
+                  <a:cs typeface="맑은 고딕 Semilight" panose="020B0502040204020203" pitchFamily="50" charset="-127"/>
+                </a:rPr>
+                <a:t> 시스템</a:t>
+              </a:r>
+              <a:endParaRPr lang="en-US" altLang="ko-KR" sz="3000" dirty="0">
+                <a:solidFill>
+                  <a:schemeClr val="bg1"/>
+                </a:solidFill>
+                <a:latin typeface="휴먼매직체" panose="02030504000101010101" pitchFamily="18" charset="-127"/>
+                <a:ea typeface="휴먼매직체" panose="02030504000101010101" pitchFamily="18" charset="-127"/>
+                <a:cs typeface="맑은 고딕 Semilight" panose="020B0502040204020203" pitchFamily="50" charset="-127"/>
+              </a:endParaRPr>
+            </a:p>
+            <a:p>
+              <a:pPr marL="342900" indent="-342900">
+                <a:buFontTx/>
+                <a:buChar char="-"/>
+              </a:pPr>
+              <a:r>
+                <a:rPr lang="en-US" altLang="ko-KR" sz="2000" dirty="0">
+                  <a:solidFill>
+                    <a:schemeClr val="bg1"/>
+                  </a:solidFill>
+                  <a:latin typeface="휴먼매직체" panose="02030504000101010101" pitchFamily="18" charset="-127"/>
+                  <a:ea typeface="휴먼매직체" panose="02030504000101010101" pitchFamily="18" charset="-127"/>
+                  <a:cs typeface="맑은 고딕 Semilight" panose="020B0502040204020203" pitchFamily="50" charset="-127"/>
+                </a:rPr>
+                <a:t>Collider</a:t>
+              </a:r>
+              <a:r>
+                <a:rPr lang="ko-KR" altLang="en-US" sz="2000" dirty="0">
+                  <a:solidFill>
+                    <a:schemeClr val="bg1"/>
+                  </a:solidFill>
+                  <a:latin typeface="휴먼매직체" panose="02030504000101010101" pitchFamily="18" charset="-127"/>
+                  <a:ea typeface="휴먼매직체" panose="02030504000101010101" pitchFamily="18" charset="-127"/>
+                  <a:cs typeface="맑은 고딕 Semilight" panose="020B0502040204020203" pitchFamily="50" charset="-127"/>
+                </a:rPr>
+                <a:t>와 겹쳐진 상태로 </a:t>
+              </a:r>
+              <a:r>
+                <a:rPr lang="ko-KR" altLang="en-US" sz="2000" dirty="0" err="1">
+                  <a:solidFill>
+                    <a:schemeClr val="bg1"/>
+                  </a:solidFill>
+                  <a:latin typeface="휴먼매직체" panose="02030504000101010101" pitchFamily="18" charset="-127"/>
+                  <a:ea typeface="휴먼매직체" panose="02030504000101010101" pitchFamily="18" charset="-127"/>
+                  <a:cs typeface="맑은 고딕 Semilight" panose="020B0502040204020203" pitchFamily="50" charset="-127"/>
+                </a:rPr>
+                <a:t>스폰</a:t>
+              </a:r>
+              <a:r>
+                <a:rPr lang="ko-KR" altLang="en-US" sz="2000" dirty="0">
+                  <a:solidFill>
+                    <a:schemeClr val="bg1"/>
+                  </a:solidFill>
+                  <a:latin typeface="휴먼매직체" panose="02030504000101010101" pitchFamily="18" charset="-127"/>
+                  <a:ea typeface="휴먼매직체" panose="02030504000101010101" pitchFamily="18" charset="-127"/>
+                  <a:cs typeface="맑은 고딕 Semilight" panose="020B0502040204020203" pitchFamily="50" charset="-127"/>
+                </a:rPr>
+                <a:t> 시</a:t>
+              </a:r>
+              <a:r>
+                <a:rPr lang="en-US" altLang="ko-KR" sz="2000" dirty="0">
+                  <a:solidFill>
+                    <a:schemeClr val="bg1"/>
+                  </a:solidFill>
+                  <a:latin typeface="휴먼매직체" panose="02030504000101010101" pitchFamily="18" charset="-127"/>
+                  <a:ea typeface="휴먼매직체" panose="02030504000101010101" pitchFamily="18" charset="-127"/>
+                  <a:cs typeface="맑은 고딕 Semilight" panose="020B0502040204020203" pitchFamily="50" charset="-127"/>
+                </a:rPr>
+                <a:t>, </a:t>
+              </a:r>
+              <a:r>
+                <a:rPr lang="ko-KR" altLang="en-US" sz="2000" dirty="0">
+                  <a:solidFill>
+                    <a:schemeClr val="bg1"/>
+                  </a:solidFill>
+                  <a:latin typeface="휴먼매직체" panose="02030504000101010101" pitchFamily="18" charset="-127"/>
+                  <a:ea typeface="휴먼매직체" panose="02030504000101010101" pitchFamily="18" charset="-127"/>
+                  <a:cs typeface="맑은 고딕 Semilight" panose="020B0502040204020203" pitchFamily="50" charset="-127"/>
+                </a:rPr>
+                <a:t>안전 좌표로 즉시 이동</a:t>
+              </a:r>
+              <a:endParaRPr lang="en-US" altLang="ko-KR" sz="2000" dirty="0">
+                <a:solidFill>
+                  <a:schemeClr val="bg1"/>
+                </a:solidFill>
+                <a:latin typeface="휴먼매직체" panose="02030504000101010101" pitchFamily="18" charset="-127"/>
+                <a:ea typeface="휴먼매직체" panose="02030504000101010101" pitchFamily="18" charset="-127"/>
+                <a:cs typeface="맑은 고딕 Semilight" panose="020B0502040204020203" pitchFamily="50" charset="-127"/>
+              </a:endParaRPr>
+            </a:p>
+            <a:p>
+              <a:pPr marL="342900" indent="-342900">
+                <a:buFontTx/>
+                <a:buChar char="-"/>
+              </a:pPr>
+              <a:r>
+                <a:rPr lang="ko-KR" altLang="en-US" sz="2000" dirty="0">
+                  <a:solidFill>
+                    <a:schemeClr val="bg1"/>
+                  </a:solidFill>
+                  <a:latin typeface="휴먼매직체" panose="02030504000101010101" pitchFamily="18" charset="-127"/>
+                  <a:ea typeface="휴먼매직체" panose="02030504000101010101" pitchFamily="18" charset="-127"/>
+                  <a:cs typeface="맑은 고딕 Semilight" panose="020B0502040204020203" pitchFamily="50" charset="-127"/>
+                </a:rPr>
+                <a:t>몬스터끼리 겹쳐진 경우</a:t>
+              </a:r>
+              <a:r>
+                <a:rPr lang="en-US" altLang="ko-KR" sz="2000" dirty="0">
+                  <a:solidFill>
+                    <a:schemeClr val="bg1"/>
+                  </a:solidFill>
+                  <a:latin typeface="휴먼매직체" panose="02030504000101010101" pitchFamily="18" charset="-127"/>
+                  <a:ea typeface="휴먼매직체" panose="02030504000101010101" pitchFamily="18" charset="-127"/>
+                  <a:cs typeface="맑은 고딕 Semilight" panose="020B0502040204020203" pitchFamily="50" charset="-127"/>
+                </a:rPr>
+                <a:t>, </a:t>
+              </a:r>
+              <a:r>
+                <a:rPr lang="ko-KR" altLang="en-US" sz="2000" dirty="0">
+                  <a:solidFill>
+                    <a:schemeClr val="bg1"/>
+                  </a:solidFill>
+                  <a:latin typeface="휴먼매직체" panose="02030504000101010101" pitchFamily="18" charset="-127"/>
+                  <a:ea typeface="휴먼매직체" panose="02030504000101010101" pitchFamily="18" charset="-127"/>
+                  <a:cs typeface="맑은 고딕 Semilight" panose="020B0502040204020203" pitchFamily="50" charset="-127"/>
+                </a:rPr>
+                <a:t>동일한 거리만큼 반대로 밀어내도록 구성</a:t>
+              </a:r>
+              <a:endParaRPr lang="en-US" altLang="ko-KR" sz="2000" dirty="0">
+                <a:solidFill>
+                  <a:schemeClr val="bg1"/>
+                </a:solidFill>
+                <a:latin typeface="휴먼매직체" panose="02030504000101010101" pitchFamily="18" charset="-127"/>
+                <a:ea typeface="휴먼매직체" panose="02030504000101010101" pitchFamily="18" charset="-127"/>
+                <a:cs typeface="맑은 고딕 Semilight" panose="020B0502040204020203" pitchFamily="50" charset="-127"/>
+              </a:endParaRPr>
+            </a:p>
+            <a:p>
+              <a:endParaRPr lang="en-US" altLang="ko-KR" sz="2000" dirty="0">
+                <a:solidFill>
+                  <a:schemeClr val="bg1"/>
+                </a:solidFill>
+                <a:latin typeface="휴먼매직체" panose="02030504000101010101" pitchFamily="18" charset="-127"/>
+                <a:ea typeface="휴먼매직체" panose="02030504000101010101" pitchFamily="18" charset="-127"/>
+                <a:cs typeface="맑은 고딕 Semilight" panose="020B0502040204020203" pitchFamily="50" charset="-127"/>
+              </a:endParaRPr>
             </a:p>
           </p:txBody>
         </p:sp>
       </p:grpSp>
+      <p:pic>
+        <p:nvPicPr>
+          <p:cNvPr id="12" name="그림 11">
+            <a:extLst>
+              <a:ext uri="{FF2B5EF4-FFF2-40B4-BE49-F238E27FC236}">
+                <a16:creationId xmlns:a16="http://schemas.microsoft.com/office/drawing/2014/main" id="{97517EA6-E152-4AB1-9879-A72F0CDF8403}"/>
+              </a:ext>
+            </a:extLst>
+          </p:cNvPr>
+          <p:cNvPicPr>
+            <a:picLocks noChangeAspect="1"/>
+          </p:cNvPicPr>
+          <p:nvPr/>
+        </p:nvPicPr>
+        <p:blipFill rotWithShape="1">
+          <a:blip r:embed="rId3">
+            <a:extLst>
+              <a:ext uri="{28A0092B-C50C-407E-A947-70E740481C1C}">
+                <a14:useLocalDpi xmlns:a14="http://schemas.microsoft.com/office/drawing/2010/main" val="0"/>
+              </a:ext>
+            </a:extLst>
+          </a:blip>
+          <a:srcRect l="76743" b="66325"/>
+          <a:stretch/>
+        </p:blipFill>
+        <p:spPr>
+          <a:xfrm>
+            <a:off x="7775891" y="2091226"/>
+            <a:ext cx="3303235" cy="3723539"/>
+          </a:xfrm>
+          <a:prstGeom prst="rect">
+            <a:avLst/>
+          </a:prstGeom>
+        </p:spPr>
+      </p:pic>
     </p:spTree>
     <p:extLst>
       <p:ext uri="{BB962C8B-B14F-4D97-AF65-F5344CB8AC3E}">
@@ -4739,68 +4587,12 @@
           <a:chExt cx="0" cy="0"/>
         </a:xfrm>
       </p:grpSpPr>
-      <p:sp>
-        <p:nvSpPr>
-          <p:cNvPr id="7" name="직사각형 6">
-            <a:extLst>
-              <a:ext uri="{FF2B5EF4-FFF2-40B4-BE49-F238E27FC236}">
-                <a16:creationId xmlns:a16="http://schemas.microsoft.com/office/drawing/2014/main" id="{FAF039C7-1241-4A3A-A71D-134FBDB4F443}"/>
-              </a:ext>
-            </a:extLst>
-          </p:cNvPr>
-          <p:cNvSpPr/>
-          <p:nvPr/>
-        </p:nvSpPr>
-        <p:spPr>
-          <a:xfrm>
-            <a:off x="1611085" y="0"/>
-            <a:ext cx="8969830" cy="6858000"/>
-          </a:xfrm>
-          <a:prstGeom prst="rect">
-            <a:avLst/>
-          </a:prstGeom>
-          <a:solidFill>
-            <a:schemeClr val="tx1">
-              <a:alpha val="75000"/>
-            </a:schemeClr>
-          </a:solidFill>
-          <a:ln>
-            <a:solidFill>
-              <a:schemeClr val="tx1"/>
-            </a:solidFill>
-          </a:ln>
-        </p:spPr>
-        <p:style>
-          <a:lnRef idx="2">
-            <a:schemeClr val="accent1">
-              <a:shade val="50000"/>
-            </a:schemeClr>
-          </a:lnRef>
-          <a:fillRef idx="1">
-            <a:schemeClr val="accent1"/>
-          </a:fillRef>
-          <a:effectRef idx="0">
-            <a:schemeClr val="accent1"/>
-          </a:effectRef>
-          <a:fontRef idx="minor">
-            <a:schemeClr val="lt1"/>
-          </a:fontRef>
-        </p:style>
-        <p:txBody>
-          <a:bodyPr rtlCol="0" anchor="ctr"/>
-          <a:lstStyle/>
-          <a:p>
-            <a:pPr algn="ctr"/>
-            <a:endParaRPr lang="ko-KR" altLang="en-US" dirty="0"/>
-          </a:p>
-        </p:txBody>
-      </p:sp>
       <p:grpSp>
         <p:nvGrpSpPr>
-          <p:cNvPr id="5" name="그룹 4">
-            <a:extLst>
-              <a:ext uri="{FF2B5EF4-FFF2-40B4-BE49-F238E27FC236}">
-                <a16:creationId xmlns:a16="http://schemas.microsoft.com/office/drawing/2014/main" id="{43436C60-EC88-4104-9E8A-B6352D8BB214}"/>
+          <p:cNvPr id="9" name="그룹 8">
+            <a:extLst>
+              <a:ext uri="{FF2B5EF4-FFF2-40B4-BE49-F238E27FC236}">
+                <a16:creationId xmlns:a16="http://schemas.microsoft.com/office/drawing/2014/main" id="{DEFA6FE4-04A7-4E85-9824-80ACABBB0357}"/>
               </a:ext>
             </a:extLst>
           </p:cNvPr>
@@ -4809,238 +4601,18 @@
         </p:nvGrpSpPr>
         <p:grpSpPr>
           <a:xfrm>
-            <a:off x="1611085" y="0"/>
-            <a:ext cx="8969830" cy="4893647"/>
-            <a:chOff x="1611085" y="0"/>
-            <a:chExt cx="8969830" cy="4893647"/>
+            <a:off x="0" y="443345"/>
+            <a:ext cx="12192001" cy="5971310"/>
+            <a:chOff x="0" y="443345"/>
+            <a:chExt cx="12192001" cy="5971310"/>
           </a:xfrm>
         </p:grpSpPr>
         <p:sp>
           <p:nvSpPr>
-            <p:cNvPr id="6" name="TextBox 5">
+            <p:cNvPr id="10" name="직사각형 9">
               <a:extLst>
                 <a:ext uri="{FF2B5EF4-FFF2-40B4-BE49-F238E27FC236}">
-                  <a16:creationId xmlns:a16="http://schemas.microsoft.com/office/drawing/2014/main" id="{83ECC944-6D9B-4190-9F48-3509A83BC7B1}"/>
-                </a:ext>
-              </a:extLst>
-            </p:cNvPr>
-            <p:cNvSpPr txBox="1"/>
-            <p:nvPr/>
-          </p:nvSpPr>
-          <p:spPr>
-            <a:xfrm>
-              <a:off x="1611085" y="0"/>
-              <a:ext cx="8969830" cy="4893647"/>
-            </a:xfrm>
-            <a:prstGeom prst="rect">
-              <a:avLst/>
-            </a:prstGeom>
-            <a:noFill/>
-          </p:spPr>
-          <p:txBody>
-            <a:bodyPr wrap="square" rtlCol="0">
-              <a:spAutoFit/>
-            </a:bodyPr>
-            <a:lstStyle/>
-            <a:p>
-              <a:r>
-                <a:rPr lang="en-US" altLang="ko-KR" sz="3000" dirty="0">
-                  <a:solidFill>
-                    <a:schemeClr val="bg1"/>
-                  </a:solidFill>
-                  <a:latin typeface="휴먼매직체" panose="02030504000101010101" pitchFamily="18" charset="-127"/>
-                  <a:ea typeface="휴먼매직체" panose="02030504000101010101" pitchFamily="18" charset="-127"/>
-                  <a:cs typeface="맑은 고딕 Semilight" panose="020B0502040204020203" pitchFamily="50" charset="-127"/>
-                </a:rPr>
-                <a:t>3. </a:t>
-              </a:r>
-              <a:r>
-                <a:rPr lang="ko-KR" altLang="en-US" sz="3200" dirty="0" err="1">
-                  <a:solidFill>
-                    <a:schemeClr val="bg1"/>
-                  </a:solidFill>
-                  <a:latin typeface="휴먼매직체" panose="02030504000101010101" pitchFamily="18" charset="-127"/>
-                  <a:ea typeface="휴먼매직체" panose="02030504000101010101" pitchFamily="18" charset="-127"/>
-                  <a:cs typeface="맑은 고딕 Semilight" panose="020B0502040204020203" pitchFamily="50" charset="-127"/>
-                </a:rPr>
-                <a:t>컷씬</a:t>
-              </a:r>
-              <a:r>
-                <a:rPr lang="ko-KR" altLang="en-US" sz="3200" dirty="0">
-                  <a:solidFill>
-                    <a:schemeClr val="bg1"/>
-                  </a:solidFill>
-                  <a:latin typeface="휴먼매직체" panose="02030504000101010101" pitchFamily="18" charset="-127"/>
-                  <a:ea typeface="휴먼매직체" panose="02030504000101010101" pitchFamily="18" charset="-127"/>
-                  <a:cs typeface="맑은 고딕 Semilight" panose="020B0502040204020203" pitchFamily="50" charset="-127"/>
-                </a:rPr>
-                <a:t> 중복 재생 방지 시스템</a:t>
-              </a:r>
-              <a:endParaRPr lang="en-US" altLang="ko-KR" sz="3000" dirty="0">
-                <a:solidFill>
-                  <a:schemeClr val="bg1"/>
-                </a:solidFill>
-                <a:latin typeface="휴먼매직체" panose="02030504000101010101" pitchFamily="18" charset="-127"/>
-                <a:ea typeface="휴먼매직체" panose="02030504000101010101" pitchFamily="18" charset="-127"/>
-                <a:cs typeface="맑은 고딕 Semilight" panose="020B0502040204020203" pitchFamily="50" charset="-127"/>
-              </a:endParaRPr>
-            </a:p>
-            <a:p>
-              <a:endParaRPr lang="en-US" altLang="ko-KR" sz="3000" dirty="0">
-                <a:solidFill>
-                  <a:schemeClr val="bg1"/>
-                </a:solidFill>
-                <a:latin typeface="휴먼매직체" panose="02030504000101010101" pitchFamily="18" charset="-127"/>
-                <a:ea typeface="휴먼매직체" panose="02030504000101010101" pitchFamily="18" charset="-127"/>
-                <a:cs typeface="맑은 고딕 Semilight" panose="020B0502040204020203" pitchFamily="50" charset="-127"/>
-              </a:endParaRPr>
-            </a:p>
-            <a:p>
-              <a:endParaRPr lang="en-US" altLang="ko-KR" sz="3000" dirty="0">
-                <a:solidFill>
-                  <a:schemeClr val="bg1"/>
-                </a:solidFill>
-                <a:latin typeface="휴먼매직체" panose="02030504000101010101" pitchFamily="18" charset="-127"/>
-                <a:ea typeface="휴먼매직체" panose="02030504000101010101" pitchFamily="18" charset="-127"/>
-                <a:cs typeface="맑은 고딕 Semilight" panose="020B0502040204020203" pitchFamily="50" charset="-127"/>
-              </a:endParaRPr>
-            </a:p>
-            <a:p>
-              <a:endParaRPr lang="en-US" altLang="ko-KR" sz="3000" dirty="0">
-                <a:solidFill>
-                  <a:schemeClr val="bg1"/>
-                </a:solidFill>
-                <a:latin typeface="휴먼매직체" panose="02030504000101010101" pitchFamily="18" charset="-127"/>
-                <a:ea typeface="휴먼매직체" panose="02030504000101010101" pitchFamily="18" charset="-127"/>
-                <a:cs typeface="맑은 고딕 Semilight" panose="020B0502040204020203" pitchFamily="50" charset="-127"/>
-              </a:endParaRPr>
-            </a:p>
-            <a:p>
-              <a:endParaRPr lang="en-US" altLang="ko-KR" sz="3000" dirty="0">
-                <a:solidFill>
-                  <a:schemeClr val="bg1"/>
-                </a:solidFill>
-                <a:latin typeface="휴먼매직체" panose="02030504000101010101" pitchFamily="18" charset="-127"/>
-                <a:ea typeface="휴먼매직체" panose="02030504000101010101" pitchFamily="18" charset="-127"/>
-                <a:cs typeface="맑은 고딕 Semilight" panose="020B0502040204020203" pitchFamily="50" charset="-127"/>
-              </a:endParaRPr>
-            </a:p>
-            <a:p>
-              <a:endParaRPr lang="en-US" altLang="ko-KR" sz="3000" dirty="0">
-                <a:solidFill>
-                  <a:schemeClr val="bg1"/>
-                </a:solidFill>
-                <a:latin typeface="휴먼매직체" panose="02030504000101010101" pitchFamily="18" charset="-127"/>
-                <a:ea typeface="휴먼매직체" panose="02030504000101010101" pitchFamily="18" charset="-127"/>
-                <a:cs typeface="맑은 고딕 Semilight" panose="020B0502040204020203" pitchFamily="50" charset="-127"/>
-              </a:endParaRPr>
-            </a:p>
-            <a:p>
-              <a:endParaRPr lang="en-US" altLang="ko-KR" sz="3000" dirty="0">
-                <a:solidFill>
-                  <a:schemeClr val="bg1"/>
-                </a:solidFill>
-                <a:latin typeface="휴먼매직체" panose="02030504000101010101" pitchFamily="18" charset="-127"/>
-                <a:ea typeface="휴먼매직체" panose="02030504000101010101" pitchFamily="18" charset="-127"/>
-                <a:cs typeface="맑은 고딕 Semilight" panose="020B0502040204020203" pitchFamily="50" charset="-127"/>
-              </a:endParaRPr>
-            </a:p>
-            <a:p>
-              <a:endParaRPr lang="en-US" altLang="ko-KR" sz="3000" dirty="0">
-                <a:solidFill>
-                  <a:schemeClr val="bg1"/>
-                </a:solidFill>
-                <a:latin typeface="휴먼매직체" panose="02030504000101010101" pitchFamily="18" charset="-127"/>
-                <a:ea typeface="휴먼매직체" panose="02030504000101010101" pitchFamily="18" charset="-127"/>
-                <a:cs typeface="맑은 고딕 Semilight" panose="020B0502040204020203" pitchFamily="50" charset="-127"/>
-              </a:endParaRPr>
-            </a:p>
-            <a:p>
-              <a:endParaRPr lang="en-US" altLang="ko-KR" sz="3000" dirty="0">
-                <a:solidFill>
-                  <a:schemeClr val="bg1"/>
-                </a:solidFill>
-                <a:latin typeface="휴먼매직체" panose="02030504000101010101" pitchFamily="18" charset="-127"/>
-                <a:ea typeface="휴먼매직체" panose="02030504000101010101" pitchFamily="18" charset="-127"/>
-                <a:cs typeface="맑은 고딕 Semilight" panose="020B0502040204020203" pitchFamily="50" charset="-127"/>
-              </a:endParaRPr>
-            </a:p>
-            <a:p>
-              <a:pPr marL="342900" indent="-342900">
-                <a:buFontTx/>
-                <a:buChar char="-"/>
-              </a:pPr>
-              <a:r>
-                <a:rPr lang="en-US" altLang="ko-KR" sz="2000" dirty="0">
-                  <a:solidFill>
-                    <a:schemeClr val="bg1"/>
-                  </a:solidFill>
-                  <a:latin typeface="휴먼매직체" panose="02030504000101010101" pitchFamily="18" charset="-127"/>
-                  <a:ea typeface="휴먼매직체" panose="02030504000101010101" pitchFamily="18" charset="-127"/>
-                  <a:cs typeface="맑은 고딕 Semilight" panose="020B0502040204020203" pitchFamily="50" charset="-127"/>
-                </a:rPr>
-                <a:t>Scene number</a:t>
-              </a:r>
-              <a:r>
-                <a:rPr lang="ko-KR" altLang="en-US" sz="2000" dirty="0">
-                  <a:solidFill>
-                    <a:schemeClr val="bg1"/>
-                  </a:solidFill>
-                  <a:latin typeface="휴먼매직체" panose="02030504000101010101" pitchFamily="18" charset="-127"/>
-                  <a:ea typeface="휴먼매직체" panose="02030504000101010101" pitchFamily="18" charset="-127"/>
-                  <a:cs typeface="맑은 고딕 Semilight" panose="020B0502040204020203" pitchFamily="50" charset="-127"/>
-                </a:rPr>
-                <a:t>를 기반으로 비트 연산하여 </a:t>
-              </a:r>
-              <a:r>
-                <a:rPr lang="en-US" altLang="ko-KR" sz="2000" dirty="0">
-                  <a:solidFill>
-                    <a:schemeClr val="bg1"/>
-                  </a:solidFill>
-                  <a:latin typeface="휴먼매직체" panose="02030504000101010101" pitchFamily="18" charset="-127"/>
-                  <a:ea typeface="휴먼매직체" panose="02030504000101010101" pitchFamily="18" charset="-127"/>
-                  <a:cs typeface="맑은 고딕 Semilight" panose="020B0502040204020203" pitchFamily="50" charset="-127"/>
-                </a:rPr>
-                <a:t>DB </a:t>
-              </a:r>
-              <a:r>
-                <a:rPr lang="ko-KR" altLang="en-US" sz="2000" dirty="0">
-                  <a:solidFill>
-                    <a:schemeClr val="bg1"/>
-                  </a:solidFill>
-                  <a:latin typeface="휴먼매직체" panose="02030504000101010101" pitchFamily="18" charset="-127"/>
-                  <a:ea typeface="휴먼매직체" panose="02030504000101010101" pitchFamily="18" charset="-127"/>
-                  <a:cs typeface="맑은 고딕 Semilight" panose="020B0502040204020203" pitchFamily="50" charset="-127"/>
-                </a:rPr>
-                <a:t>효율성 및 연산 효율성 향상</a:t>
-              </a:r>
-              <a:endParaRPr lang="en-US" altLang="ko-KR" sz="2000" dirty="0">
-                <a:solidFill>
-                  <a:schemeClr val="bg1"/>
-                </a:solidFill>
-                <a:latin typeface="휴먼매직체" panose="02030504000101010101" pitchFamily="18" charset="-127"/>
-                <a:ea typeface="휴먼매직체" panose="02030504000101010101" pitchFamily="18" charset="-127"/>
-                <a:cs typeface="맑은 고딕 Semilight" panose="020B0502040204020203" pitchFamily="50" charset="-127"/>
-              </a:endParaRPr>
-            </a:p>
-            <a:p>
-              <a:endParaRPr lang="en-US" altLang="ko-KR" sz="2000" dirty="0">
-                <a:solidFill>
-                  <a:schemeClr val="bg1"/>
-                </a:solidFill>
-                <a:latin typeface="휴먼매직체" panose="02030504000101010101" pitchFamily="18" charset="-127"/>
-                <a:ea typeface="휴먼매직체" panose="02030504000101010101" pitchFamily="18" charset="-127"/>
-                <a:cs typeface="맑은 고딕 Semilight" panose="020B0502040204020203" pitchFamily="50" charset="-127"/>
-              </a:endParaRPr>
-            </a:p>
-          </p:txBody>
-        </p:sp>
-        <p:sp>
-          <p:nvSpPr>
-            <p:cNvPr id="8" name="직사각형 7">
-              <a:extLst>
-                <a:ext uri="{FF2B5EF4-FFF2-40B4-BE49-F238E27FC236}">
-                  <a16:creationId xmlns:a16="http://schemas.microsoft.com/office/drawing/2014/main" id="{141B0738-550F-43FB-817E-396601890ADA}"/>
+                  <a16:creationId xmlns:a16="http://schemas.microsoft.com/office/drawing/2014/main" id="{DCB7CB65-59AD-4032-AA00-8194885373D5}"/>
                 </a:ext>
               </a:extLst>
             </p:cNvPr>
@@ -5049,12 +4621,22 @@
           </p:nvSpPr>
           <p:spPr>
             <a:xfrm>
-              <a:off x="2006600" y="685800"/>
-              <a:ext cx="8178800" cy="3333750"/>
+              <a:off x="0" y="443345"/>
+              <a:ext cx="12192000" cy="5971310"/>
             </a:xfrm>
             <a:prstGeom prst="rect">
               <a:avLst/>
             </a:prstGeom>
+            <a:solidFill>
+              <a:schemeClr val="tx1">
+                <a:alpha val="75000"/>
+              </a:schemeClr>
+            </a:solidFill>
+            <a:ln>
+              <a:solidFill>
+                <a:schemeClr val="tx1"/>
+              </a:solidFill>
+            </a:ln>
           </p:spPr>
           <p:style>
             <a:lnRef idx="2">
@@ -5077,11 +4659,187 @@
             <a:lstStyle/>
             <a:p>
               <a:pPr algn="ctr"/>
-              <a:endParaRPr lang="ko-KR" altLang="en-US"/>
+              <a:endParaRPr lang="ko-KR" altLang="en-US" dirty="0"/>
+            </a:p>
+          </p:txBody>
+        </p:sp>
+        <p:sp>
+          <p:nvSpPr>
+            <p:cNvPr id="11" name="TextBox 10">
+              <a:extLst>
+                <a:ext uri="{FF2B5EF4-FFF2-40B4-BE49-F238E27FC236}">
+                  <a16:creationId xmlns:a16="http://schemas.microsoft.com/office/drawing/2014/main" id="{0BB8767F-2BEA-492F-A3DF-A6CC49B71D21}"/>
+                </a:ext>
+              </a:extLst>
+            </p:cNvPr>
+            <p:cNvSpPr txBox="1"/>
+            <p:nvPr/>
+          </p:nvSpPr>
+          <p:spPr>
+            <a:xfrm>
+              <a:off x="0" y="443345"/>
+              <a:ext cx="12192001" cy="1200329"/>
+            </a:xfrm>
+            <a:prstGeom prst="rect">
+              <a:avLst/>
+            </a:prstGeom>
+            <a:noFill/>
+          </p:spPr>
+          <p:txBody>
+            <a:bodyPr wrap="square" rtlCol="0">
+              <a:spAutoFit/>
+            </a:bodyPr>
+            <a:lstStyle/>
+            <a:p>
+              <a:r>
+                <a:rPr lang="en-US" altLang="ko-KR" sz="3200" dirty="0">
+                  <a:solidFill>
+                    <a:schemeClr val="bg1"/>
+                  </a:solidFill>
+                  <a:latin typeface="휴먼매직체" panose="02030504000101010101" pitchFamily="18" charset="-127"/>
+                  <a:ea typeface="휴먼매직체" panose="02030504000101010101" pitchFamily="18" charset="-127"/>
+                  <a:cs typeface="맑은 고딕 Semilight" panose="020B0502040204020203" pitchFamily="50" charset="-127"/>
+                </a:rPr>
+                <a:t>3. </a:t>
+              </a:r>
+              <a:r>
+                <a:rPr lang="ko-KR" altLang="en-US" sz="3200" dirty="0" err="1">
+                  <a:solidFill>
+                    <a:schemeClr val="bg1"/>
+                  </a:solidFill>
+                  <a:latin typeface="휴먼매직체" panose="02030504000101010101" pitchFamily="18" charset="-127"/>
+                  <a:ea typeface="휴먼매직체" panose="02030504000101010101" pitchFamily="18" charset="-127"/>
+                  <a:cs typeface="맑은 고딕 Semilight" panose="020B0502040204020203" pitchFamily="50" charset="-127"/>
+                </a:rPr>
+                <a:t>컷씬</a:t>
+              </a:r>
+              <a:r>
+                <a:rPr lang="ko-KR" altLang="en-US" sz="3200" dirty="0">
+                  <a:solidFill>
+                    <a:schemeClr val="bg1"/>
+                  </a:solidFill>
+                  <a:latin typeface="휴먼매직체" panose="02030504000101010101" pitchFamily="18" charset="-127"/>
+                  <a:ea typeface="휴먼매직체" panose="02030504000101010101" pitchFamily="18" charset="-127"/>
+                  <a:cs typeface="맑은 고딕 Semilight" panose="020B0502040204020203" pitchFamily="50" charset="-127"/>
+                </a:rPr>
+                <a:t> 중복 재생 방지 시스템</a:t>
+              </a:r>
+              <a:endParaRPr lang="en-US" altLang="ko-KR" sz="3200" dirty="0">
+                <a:solidFill>
+                  <a:schemeClr val="bg1"/>
+                </a:solidFill>
+                <a:latin typeface="휴먼매직체" panose="02030504000101010101" pitchFamily="18" charset="-127"/>
+                <a:ea typeface="휴먼매직체" panose="02030504000101010101" pitchFamily="18" charset="-127"/>
+                <a:cs typeface="맑은 고딕 Semilight" panose="020B0502040204020203" pitchFamily="50" charset="-127"/>
+              </a:endParaRPr>
+            </a:p>
+            <a:p>
+              <a:pPr marL="342900" indent="-342900">
+                <a:buFontTx/>
+                <a:buChar char="-"/>
+              </a:pPr>
+              <a:r>
+                <a:rPr lang="en-US" altLang="ko-KR" sz="2000" dirty="0">
+                  <a:solidFill>
+                    <a:schemeClr val="bg1"/>
+                  </a:solidFill>
+                  <a:latin typeface="휴먼매직체" panose="02030504000101010101" pitchFamily="18" charset="-127"/>
+                  <a:ea typeface="휴먼매직체" panose="02030504000101010101" pitchFamily="18" charset="-127"/>
+                  <a:cs typeface="맑은 고딕 Semilight" panose="020B0502040204020203" pitchFamily="50" charset="-127"/>
+                </a:rPr>
+                <a:t>Scene number</a:t>
+              </a:r>
+              <a:r>
+                <a:rPr lang="ko-KR" altLang="en-US" sz="2000" dirty="0">
+                  <a:solidFill>
+                    <a:schemeClr val="bg1"/>
+                  </a:solidFill>
+                  <a:latin typeface="휴먼매직체" panose="02030504000101010101" pitchFamily="18" charset="-127"/>
+                  <a:ea typeface="휴먼매직체" panose="02030504000101010101" pitchFamily="18" charset="-127"/>
+                  <a:cs typeface="맑은 고딕 Semilight" panose="020B0502040204020203" pitchFamily="50" charset="-127"/>
+                </a:rPr>
+                <a:t>를 기반으로 비트 연산하여 </a:t>
+              </a:r>
+              <a:r>
+                <a:rPr lang="en-US" altLang="ko-KR" sz="2000" dirty="0">
+                  <a:solidFill>
+                    <a:schemeClr val="bg1"/>
+                  </a:solidFill>
+                  <a:latin typeface="휴먼매직체" panose="02030504000101010101" pitchFamily="18" charset="-127"/>
+                  <a:ea typeface="휴먼매직체" panose="02030504000101010101" pitchFamily="18" charset="-127"/>
+                  <a:cs typeface="맑은 고딕 Semilight" panose="020B0502040204020203" pitchFamily="50" charset="-127"/>
+                </a:rPr>
+                <a:t>DB </a:t>
+              </a:r>
+              <a:r>
+                <a:rPr lang="ko-KR" altLang="en-US" sz="2000" dirty="0">
+                  <a:solidFill>
+                    <a:schemeClr val="bg1"/>
+                  </a:solidFill>
+                  <a:latin typeface="휴먼매직체" panose="02030504000101010101" pitchFamily="18" charset="-127"/>
+                  <a:ea typeface="휴먼매직체" panose="02030504000101010101" pitchFamily="18" charset="-127"/>
+                  <a:cs typeface="맑은 고딕 Semilight" panose="020B0502040204020203" pitchFamily="50" charset="-127"/>
+                </a:rPr>
+                <a:t>효율성 및 연산 효율성 향상</a:t>
+              </a:r>
+              <a:endParaRPr lang="en-US" altLang="ko-KR" sz="2000" dirty="0">
+                <a:solidFill>
+                  <a:schemeClr val="bg1"/>
+                </a:solidFill>
+                <a:latin typeface="휴먼매직체" panose="02030504000101010101" pitchFamily="18" charset="-127"/>
+                <a:ea typeface="휴먼매직체" panose="02030504000101010101" pitchFamily="18" charset="-127"/>
+                <a:cs typeface="맑은 고딕 Semilight" panose="020B0502040204020203" pitchFamily="50" charset="-127"/>
+              </a:endParaRPr>
+            </a:p>
+            <a:p>
+              <a:endParaRPr lang="en-US" altLang="ko-KR" sz="2000" dirty="0">
+                <a:solidFill>
+                  <a:schemeClr val="bg1"/>
+                </a:solidFill>
+                <a:latin typeface="휴먼매직체" panose="02030504000101010101" pitchFamily="18" charset="-127"/>
+                <a:ea typeface="휴먼매직체" panose="02030504000101010101" pitchFamily="18" charset="-127"/>
+                <a:cs typeface="맑은 고딕 Semilight" panose="020B0502040204020203" pitchFamily="50" charset="-127"/>
+              </a:endParaRPr>
             </a:p>
           </p:txBody>
         </p:sp>
       </p:grpSp>
+      <p:pic>
+        <p:nvPicPr>
+          <p:cNvPr id="12" name="그림 11">
+            <a:extLst>
+              <a:ext uri="{FF2B5EF4-FFF2-40B4-BE49-F238E27FC236}">
+                <a16:creationId xmlns:a16="http://schemas.microsoft.com/office/drawing/2014/main" id="{4CD287E1-6245-434B-9ADC-ABCC69F9A765}"/>
+              </a:ext>
+            </a:extLst>
+          </p:cNvPr>
+          <p:cNvPicPr>
+            <a:picLocks noChangeAspect="1"/>
+          </p:cNvPicPr>
+          <p:nvPr/>
+        </p:nvPicPr>
+        <p:blipFill>
+          <a:blip r:embed="rId3">
+            <a:extLst>
+              <a:ext uri="{28A0092B-C50C-407E-A947-70E740481C1C}">
+                <a14:useLocalDpi xmlns:a14="http://schemas.microsoft.com/office/drawing/2010/main" val="0"/>
+              </a:ext>
+            </a:extLst>
+          </a:blip>
+          <a:stretch>
+            <a:fillRect/>
+          </a:stretch>
+        </p:blipFill>
+        <p:spPr>
+          <a:xfrm>
+            <a:off x="6792380" y="2135018"/>
+            <a:ext cx="4807742" cy="3748141"/>
+          </a:xfrm>
+          <a:prstGeom prst="rect">
+            <a:avLst/>
+          </a:prstGeom>
+        </p:spPr>
+      </p:pic>
     </p:spTree>
     <p:extLst>
       <p:ext uri="{BB962C8B-B14F-4D97-AF65-F5344CB8AC3E}">
@@ -5127,68 +4885,12 @@
           <a:chExt cx="0" cy="0"/>
         </a:xfrm>
       </p:grpSpPr>
-      <p:sp>
-        <p:nvSpPr>
-          <p:cNvPr id="7" name="직사각형 6">
-            <a:extLst>
-              <a:ext uri="{FF2B5EF4-FFF2-40B4-BE49-F238E27FC236}">
-                <a16:creationId xmlns:a16="http://schemas.microsoft.com/office/drawing/2014/main" id="{FAF039C7-1241-4A3A-A71D-134FBDB4F443}"/>
-              </a:ext>
-            </a:extLst>
-          </p:cNvPr>
-          <p:cNvSpPr/>
-          <p:nvPr/>
-        </p:nvSpPr>
-        <p:spPr>
-          <a:xfrm>
-            <a:off x="1611085" y="0"/>
-            <a:ext cx="8969830" cy="6858000"/>
-          </a:xfrm>
-          <a:prstGeom prst="rect">
-            <a:avLst/>
-          </a:prstGeom>
-          <a:solidFill>
-            <a:schemeClr val="tx1">
-              <a:alpha val="75000"/>
-            </a:schemeClr>
-          </a:solidFill>
-          <a:ln>
-            <a:solidFill>
-              <a:schemeClr val="tx1"/>
-            </a:solidFill>
-          </a:ln>
-        </p:spPr>
-        <p:style>
-          <a:lnRef idx="2">
-            <a:schemeClr val="accent1">
-              <a:shade val="50000"/>
-            </a:schemeClr>
-          </a:lnRef>
-          <a:fillRef idx="1">
-            <a:schemeClr val="accent1"/>
-          </a:fillRef>
-          <a:effectRef idx="0">
-            <a:schemeClr val="accent1"/>
-          </a:effectRef>
-          <a:fontRef idx="minor">
-            <a:schemeClr val="lt1"/>
-          </a:fontRef>
-        </p:style>
-        <p:txBody>
-          <a:bodyPr rtlCol="0" anchor="ctr"/>
-          <a:lstStyle/>
-          <a:p>
-            <a:pPr algn="ctr"/>
-            <a:endParaRPr lang="ko-KR" altLang="en-US" dirty="0"/>
-          </a:p>
-        </p:txBody>
-      </p:sp>
       <p:grpSp>
         <p:nvGrpSpPr>
-          <p:cNvPr id="5" name="그룹 4">
-            <a:extLst>
-              <a:ext uri="{FF2B5EF4-FFF2-40B4-BE49-F238E27FC236}">
-                <a16:creationId xmlns:a16="http://schemas.microsoft.com/office/drawing/2014/main" id="{3E8B5DBD-7D4A-472D-9319-B6224838579A}"/>
+          <p:cNvPr id="9" name="그룹 8">
+            <a:extLst>
+              <a:ext uri="{FF2B5EF4-FFF2-40B4-BE49-F238E27FC236}">
+                <a16:creationId xmlns:a16="http://schemas.microsoft.com/office/drawing/2014/main" id="{2D84EE28-FB61-4553-ACB0-B3C8DBCA1020}"/>
               </a:ext>
             </a:extLst>
           </p:cNvPr>
@@ -5197,260 +4899,18 @@
         </p:nvGrpSpPr>
         <p:grpSpPr>
           <a:xfrm>
-            <a:off x="1611085" y="0"/>
-            <a:ext cx="8969830" cy="4893647"/>
-            <a:chOff x="1611085" y="0"/>
-            <a:chExt cx="8969830" cy="4893647"/>
+            <a:off x="0" y="443345"/>
+            <a:ext cx="12192001" cy="5971310"/>
+            <a:chOff x="0" y="443345"/>
+            <a:chExt cx="12192001" cy="5971310"/>
           </a:xfrm>
         </p:grpSpPr>
         <p:sp>
           <p:nvSpPr>
-            <p:cNvPr id="6" name="TextBox 5">
+            <p:cNvPr id="10" name="직사각형 9">
               <a:extLst>
                 <a:ext uri="{FF2B5EF4-FFF2-40B4-BE49-F238E27FC236}">
-                  <a16:creationId xmlns:a16="http://schemas.microsoft.com/office/drawing/2014/main" id="{6199D16A-B2D6-4EEF-B562-48F4593A0358}"/>
-                </a:ext>
-              </a:extLst>
-            </p:cNvPr>
-            <p:cNvSpPr txBox="1"/>
-            <p:nvPr/>
-          </p:nvSpPr>
-          <p:spPr>
-            <a:xfrm>
-              <a:off x="1611085" y="0"/>
-              <a:ext cx="8969830" cy="4893647"/>
-            </a:xfrm>
-            <a:prstGeom prst="rect">
-              <a:avLst/>
-            </a:prstGeom>
-            <a:noFill/>
-          </p:spPr>
-          <p:txBody>
-            <a:bodyPr wrap="square" rtlCol="0">
-              <a:spAutoFit/>
-            </a:bodyPr>
-            <a:lstStyle/>
-            <a:p>
-              <a:r>
-                <a:rPr lang="en-US" altLang="ko-KR" sz="3000" dirty="0">
-                  <a:solidFill>
-                    <a:schemeClr val="bg1"/>
-                  </a:solidFill>
-                  <a:latin typeface="휴먼매직체" panose="02030504000101010101" pitchFamily="18" charset="-127"/>
-                  <a:ea typeface="휴먼매직체" panose="02030504000101010101" pitchFamily="18" charset="-127"/>
-                  <a:cs typeface="맑은 고딕 Semilight" panose="020B0502040204020203" pitchFamily="50" charset="-127"/>
-                </a:rPr>
-                <a:t>4. </a:t>
-              </a:r>
-              <a:r>
-                <a:rPr lang="en-US" altLang="ko-KR" sz="3200" dirty="0">
-                  <a:solidFill>
-                    <a:schemeClr val="bg1"/>
-                  </a:solidFill>
-                  <a:latin typeface="휴먼매직체" panose="02030504000101010101" pitchFamily="18" charset="-127"/>
-                  <a:ea typeface="휴먼매직체" panose="02030504000101010101" pitchFamily="18" charset="-127"/>
-                  <a:cs typeface="맑은 고딕 Semilight" panose="020B0502040204020203" pitchFamily="50" charset="-127"/>
-                </a:rPr>
-                <a:t>Phaser </a:t>
-              </a:r>
-              <a:r>
-                <a:rPr lang="ko-KR" altLang="en-US" sz="3200" dirty="0">
-                  <a:solidFill>
-                    <a:schemeClr val="bg1"/>
-                  </a:solidFill>
-                  <a:latin typeface="휴먼매직체" panose="02030504000101010101" pitchFamily="18" charset="-127"/>
-                  <a:ea typeface="휴먼매직체" panose="02030504000101010101" pitchFamily="18" charset="-127"/>
-                  <a:cs typeface="맑은 고딕 Semilight" panose="020B0502040204020203" pitchFamily="50" charset="-127"/>
-                </a:rPr>
-                <a:t>구조 기반 </a:t>
-              </a:r>
-              <a:r>
-                <a:rPr lang="en-US" altLang="ko-KR" sz="3200" dirty="0">
-                  <a:solidFill>
-                    <a:schemeClr val="bg1"/>
-                  </a:solidFill>
-                  <a:latin typeface="휴먼매직체" panose="02030504000101010101" pitchFamily="18" charset="-127"/>
-                  <a:ea typeface="휴먼매직체" panose="02030504000101010101" pitchFamily="18" charset="-127"/>
-                  <a:cs typeface="맑은 고딕 Semilight" panose="020B0502040204020203" pitchFamily="50" charset="-127"/>
-                </a:rPr>
-                <a:t>Scene </a:t>
-              </a:r>
-              <a:r>
-                <a:rPr lang="ko-KR" altLang="en-US" sz="3200" dirty="0">
-                  <a:solidFill>
-                    <a:schemeClr val="bg1"/>
-                  </a:solidFill>
-                  <a:latin typeface="휴먼매직체" panose="02030504000101010101" pitchFamily="18" charset="-127"/>
-                  <a:ea typeface="휴먼매직체" panose="02030504000101010101" pitchFamily="18" charset="-127"/>
-                  <a:cs typeface="맑은 고딕 Semilight" panose="020B0502040204020203" pitchFamily="50" charset="-127"/>
-                </a:rPr>
-                <a:t>로딩 설계</a:t>
-              </a:r>
-              <a:endParaRPr lang="en-US" altLang="ko-KR" sz="3000" dirty="0">
-                <a:solidFill>
-                  <a:schemeClr val="bg1"/>
-                </a:solidFill>
-                <a:latin typeface="휴먼매직체" panose="02030504000101010101" pitchFamily="18" charset="-127"/>
-                <a:ea typeface="휴먼매직체" panose="02030504000101010101" pitchFamily="18" charset="-127"/>
-                <a:cs typeface="맑은 고딕 Semilight" panose="020B0502040204020203" pitchFamily="50" charset="-127"/>
-              </a:endParaRPr>
-            </a:p>
-            <a:p>
-              <a:endParaRPr lang="en-US" altLang="ko-KR" sz="3000" dirty="0">
-                <a:solidFill>
-                  <a:schemeClr val="bg1"/>
-                </a:solidFill>
-                <a:latin typeface="휴먼매직체" panose="02030504000101010101" pitchFamily="18" charset="-127"/>
-                <a:ea typeface="휴먼매직체" panose="02030504000101010101" pitchFamily="18" charset="-127"/>
-                <a:cs typeface="맑은 고딕 Semilight" panose="020B0502040204020203" pitchFamily="50" charset="-127"/>
-              </a:endParaRPr>
-            </a:p>
-            <a:p>
-              <a:endParaRPr lang="en-US" altLang="ko-KR" sz="3000" dirty="0">
-                <a:solidFill>
-                  <a:schemeClr val="bg1"/>
-                </a:solidFill>
-                <a:latin typeface="휴먼매직체" panose="02030504000101010101" pitchFamily="18" charset="-127"/>
-                <a:ea typeface="휴먼매직체" panose="02030504000101010101" pitchFamily="18" charset="-127"/>
-                <a:cs typeface="맑은 고딕 Semilight" panose="020B0502040204020203" pitchFamily="50" charset="-127"/>
-              </a:endParaRPr>
-            </a:p>
-            <a:p>
-              <a:endParaRPr lang="en-US" altLang="ko-KR" sz="3000" dirty="0">
-                <a:solidFill>
-                  <a:schemeClr val="bg1"/>
-                </a:solidFill>
-                <a:latin typeface="휴먼매직체" panose="02030504000101010101" pitchFamily="18" charset="-127"/>
-                <a:ea typeface="휴먼매직체" panose="02030504000101010101" pitchFamily="18" charset="-127"/>
-                <a:cs typeface="맑은 고딕 Semilight" panose="020B0502040204020203" pitchFamily="50" charset="-127"/>
-              </a:endParaRPr>
-            </a:p>
-            <a:p>
-              <a:endParaRPr lang="en-US" altLang="ko-KR" sz="3000" dirty="0">
-                <a:solidFill>
-                  <a:schemeClr val="bg1"/>
-                </a:solidFill>
-                <a:latin typeface="휴먼매직체" panose="02030504000101010101" pitchFamily="18" charset="-127"/>
-                <a:ea typeface="휴먼매직체" panose="02030504000101010101" pitchFamily="18" charset="-127"/>
-                <a:cs typeface="맑은 고딕 Semilight" panose="020B0502040204020203" pitchFamily="50" charset="-127"/>
-              </a:endParaRPr>
-            </a:p>
-            <a:p>
-              <a:endParaRPr lang="en-US" altLang="ko-KR" sz="3000" dirty="0">
-                <a:solidFill>
-                  <a:schemeClr val="bg1"/>
-                </a:solidFill>
-                <a:latin typeface="휴먼매직체" panose="02030504000101010101" pitchFamily="18" charset="-127"/>
-                <a:ea typeface="휴먼매직체" panose="02030504000101010101" pitchFamily="18" charset="-127"/>
-                <a:cs typeface="맑은 고딕 Semilight" panose="020B0502040204020203" pitchFamily="50" charset="-127"/>
-              </a:endParaRPr>
-            </a:p>
-            <a:p>
-              <a:endParaRPr lang="en-US" altLang="ko-KR" sz="3000" dirty="0">
-                <a:solidFill>
-                  <a:schemeClr val="bg1"/>
-                </a:solidFill>
-                <a:latin typeface="휴먼매직체" panose="02030504000101010101" pitchFamily="18" charset="-127"/>
-                <a:ea typeface="휴먼매직체" panose="02030504000101010101" pitchFamily="18" charset="-127"/>
-                <a:cs typeface="맑은 고딕 Semilight" panose="020B0502040204020203" pitchFamily="50" charset="-127"/>
-              </a:endParaRPr>
-            </a:p>
-            <a:p>
-              <a:endParaRPr lang="en-US" altLang="ko-KR" sz="3000" dirty="0">
-                <a:solidFill>
-                  <a:schemeClr val="bg1"/>
-                </a:solidFill>
-                <a:latin typeface="휴먼매직체" panose="02030504000101010101" pitchFamily="18" charset="-127"/>
-                <a:ea typeface="휴먼매직체" panose="02030504000101010101" pitchFamily="18" charset="-127"/>
-                <a:cs typeface="맑은 고딕 Semilight" panose="020B0502040204020203" pitchFamily="50" charset="-127"/>
-              </a:endParaRPr>
-            </a:p>
-            <a:p>
-              <a:endParaRPr lang="en-US" altLang="ko-KR" sz="3000" dirty="0">
-                <a:solidFill>
-                  <a:schemeClr val="bg1"/>
-                </a:solidFill>
-                <a:latin typeface="휴먼매직체" panose="02030504000101010101" pitchFamily="18" charset="-127"/>
-                <a:ea typeface="휴먼매직체" panose="02030504000101010101" pitchFamily="18" charset="-127"/>
-                <a:cs typeface="맑은 고딕 Semilight" panose="020B0502040204020203" pitchFamily="50" charset="-127"/>
-              </a:endParaRPr>
-            </a:p>
-            <a:p>
-              <a:pPr marL="342900" indent="-342900">
-                <a:buFontTx/>
-                <a:buChar char="-"/>
-              </a:pPr>
-              <a:r>
-                <a:rPr lang="en-US" altLang="ko-KR" sz="2000" dirty="0">
-                  <a:solidFill>
-                    <a:schemeClr val="bg1"/>
-                  </a:solidFill>
-                  <a:latin typeface="휴먼매직체" panose="02030504000101010101" pitchFamily="18" charset="-127"/>
-                  <a:ea typeface="휴먼매직체" panose="02030504000101010101" pitchFamily="18" charset="-127"/>
-                  <a:cs typeface="맑은 고딕 Semilight" panose="020B0502040204020203" pitchFamily="50" charset="-127"/>
-                </a:rPr>
-                <a:t>Load</a:t>
-              </a:r>
-              <a:r>
-                <a:rPr lang="ko-KR" altLang="en-US" sz="2000" dirty="0">
-                  <a:solidFill>
-                    <a:schemeClr val="bg1"/>
-                  </a:solidFill>
-                  <a:latin typeface="휴먼매직체" panose="02030504000101010101" pitchFamily="18" charset="-127"/>
-                  <a:ea typeface="휴먼매직체" panose="02030504000101010101" pitchFamily="18" charset="-127"/>
-                  <a:cs typeface="맑은 고딕 Semilight" panose="020B0502040204020203" pitchFamily="50" charset="-127"/>
-                </a:rPr>
-                <a:t> </a:t>
-              </a:r>
-              <a:r>
-                <a:rPr lang="en-US" altLang="ko-KR" sz="2000" dirty="0">
-                  <a:solidFill>
-                    <a:schemeClr val="bg1"/>
-                  </a:solidFill>
-                  <a:latin typeface="휴먼매직체" panose="02030504000101010101" pitchFamily="18" charset="-127"/>
-                  <a:ea typeface="휴먼매직체" panose="02030504000101010101" pitchFamily="18" charset="-127"/>
-                  <a:cs typeface="맑은 고딕 Semilight" panose="020B0502040204020203" pitchFamily="50" charset="-127"/>
-                </a:rPr>
-                <a:t>Scene</a:t>
-              </a:r>
-              <a:r>
-                <a:rPr lang="ko-KR" altLang="en-US" sz="2000" dirty="0">
-                  <a:solidFill>
-                    <a:schemeClr val="bg1"/>
-                  </a:solidFill>
-                  <a:latin typeface="휴먼매직체" panose="02030504000101010101" pitchFamily="18" charset="-127"/>
-                  <a:ea typeface="휴먼매직체" panose="02030504000101010101" pitchFamily="18" charset="-127"/>
-                  <a:cs typeface="맑은 고딕 Semilight" panose="020B0502040204020203" pitchFamily="50" charset="-127"/>
-                </a:rPr>
-                <a:t>을 이용하여 유령 오브젝트 로딩 방지</a:t>
-              </a:r>
-              <a:endParaRPr lang="en-US" altLang="ko-KR" sz="2000" dirty="0">
-                <a:solidFill>
-                  <a:schemeClr val="bg1"/>
-                </a:solidFill>
-                <a:latin typeface="휴먼매직체" panose="02030504000101010101" pitchFamily="18" charset="-127"/>
-                <a:ea typeface="휴먼매직체" panose="02030504000101010101" pitchFamily="18" charset="-127"/>
-                <a:cs typeface="맑은 고딕 Semilight" panose="020B0502040204020203" pitchFamily="50" charset="-127"/>
-              </a:endParaRPr>
-            </a:p>
-            <a:p>
-              <a:endParaRPr lang="en-US" altLang="ko-KR" sz="2000" dirty="0">
-                <a:solidFill>
-                  <a:schemeClr val="bg1"/>
-                </a:solidFill>
-                <a:latin typeface="휴먼매직체" panose="02030504000101010101" pitchFamily="18" charset="-127"/>
-                <a:ea typeface="휴먼매직체" panose="02030504000101010101" pitchFamily="18" charset="-127"/>
-                <a:cs typeface="맑은 고딕 Semilight" panose="020B0502040204020203" pitchFamily="50" charset="-127"/>
-              </a:endParaRPr>
-            </a:p>
-          </p:txBody>
-        </p:sp>
-        <p:sp>
-          <p:nvSpPr>
-            <p:cNvPr id="8" name="직사각형 7">
-              <a:extLst>
-                <a:ext uri="{FF2B5EF4-FFF2-40B4-BE49-F238E27FC236}">
-                  <a16:creationId xmlns:a16="http://schemas.microsoft.com/office/drawing/2014/main" id="{C58D484A-D746-4BAD-B755-B53B6115F463}"/>
+                  <a16:creationId xmlns:a16="http://schemas.microsoft.com/office/drawing/2014/main" id="{1316BB8E-BE8E-403F-9CF5-2137CD136F63}"/>
                 </a:ext>
               </a:extLst>
             </p:cNvPr>
@@ -5459,12 +4919,22 @@
           </p:nvSpPr>
           <p:spPr>
             <a:xfrm>
-              <a:off x="2006600" y="685800"/>
-              <a:ext cx="8178800" cy="3333750"/>
+              <a:off x="0" y="443345"/>
+              <a:ext cx="12192000" cy="5971310"/>
             </a:xfrm>
             <a:prstGeom prst="rect">
               <a:avLst/>
             </a:prstGeom>
+            <a:solidFill>
+              <a:schemeClr val="tx1">
+                <a:alpha val="75000"/>
+              </a:schemeClr>
+            </a:solidFill>
+            <a:ln>
+              <a:solidFill>
+                <a:schemeClr val="tx1"/>
+              </a:solidFill>
+            </a:ln>
           </p:spPr>
           <p:style>
             <a:lnRef idx="2">
@@ -5487,7 +4957,158 @@
             <a:lstStyle/>
             <a:p>
               <a:pPr algn="ctr"/>
-              <a:endParaRPr lang="ko-KR" altLang="en-US"/>
+              <a:endParaRPr lang="ko-KR" altLang="en-US" dirty="0"/>
+            </a:p>
+          </p:txBody>
+        </p:sp>
+        <p:sp>
+          <p:nvSpPr>
+            <p:cNvPr id="11" name="TextBox 10">
+              <a:extLst>
+                <a:ext uri="{FF2B5EF4-FFF2-40B4-BE49-F238E27FC236}">
+                  <a16:creationId xmlns:a16="http://schemas.microsoft.com/office/drawing/2014/main" id="{C44C9BB6-7F5E-45B8-BAA5-F21704885B9E}"/>
+                </a:ext>
+              </a:extLst>
+            </p:cNvPr>
+            <p:cNvSpPr txBox="1"/>
+            <p:nvPr/>
+          </p:nvSpPr>
+          <p:spPr>
+            <a:xfrm>
+              <a:off x="0" y="443345"/>
+              <a:ext cx="12192001" cy="1200329"/>
+            </a:xfrm>
+            <a:prstGeom prst="rect">
+              <a:avLst/>
+            </a:prstGeom>
+            <a:noFill/>
+          </p:spPr>
+          <p:txBody>
+            <a:bodyPr wrap="square" rtlCol="0">
+              <a:spAutoFit/>
+            </a:bodyPr>
+            <a:lstStyle/>
+            <a:p>
+              <a:r>
+                <a:rPr lang="en-US" altLang="ko-KR" sz="3200" dirty="0">
+                  <a:solidFill>
+                    <a:schemeClr val="bg1"/>
+                  </a:solidFill>
+                  <a:latin typeface="휴먼매직체" panose="02030504000101010101" pitchFamily="18" charset="-127"/>
+                  <a:ea typeface="휴먼매직체" panose="02030504000101010101" pitchFamily="18" charset="-127"/>
+                  <a:cs typeface="맑은 고딕 Semilight" panose="020B0502040204020203" pitchFamily="50" charset="-127"/>
+                </a:rPr>
+                <a:t>4. Phaser </a:t>
+              </a:r>
+              <a:r>
+                <a:rPr lang="ko-KR" altLang="en-US" sz="3200" dirty="0">
+                  <a:solidFill>
+                    <a:schemeClr val="bg1"/>
+                  </a:solidFill>
+                  <a:latin typeface="휴먼매직체" panose="02030504000101010101" pitchFamily="18" charset="-127"/>
+                  <a:ea typeface="휴먼매직체" panose="02030504000101010101" pitchFamily="18" charset="-127"/>
+                  <a:cs typeface="맑은 고딕 Semilight" panose="020B0502040204020203" pitchFamily="50" charset="-127"/>
+                </a:rPr>
+                <a:t>구조 기반 </a:t>
+              </a:r>
+              <a:r>
+                <a:rPr lang="en-US" altLang="ko-KR" sz="3200" dirty="0">
+                  <a:solidFill>
+                    <a:schemeClr val="bg1"/>
+                  </a:solidFill>
+                  <a:latin typeface="휴먼매직체" panose="02030504000101010101" pitchFamily="18" charset="-127"/>
+                  <a:ea typeface="휴먼매직체" panose="02030504000101010101" pitchFamily="18" charset="-127"/>
+                  <a:cs typeface="맑은 고딕 Semilight" panose="020B0502040204020203" pitchFamily="50" charset="-127"/>
+                </a:rPr>
+                <a:t>Scene </a:t>
+              </a:r>
+              <a:r>
+                <a:rPr lang="ko-KR" altLang="en-US" sz="3200" dirty="0">
+                  <a:solidFill>
+                    <a:schemeClr val="bg1"/>
+                  </a:solidFill>
+                  <a:latin typeface="휴먼매직체" panose="02030504000101010101" pitchFamily="18" charset="-127"/>
+                  <a:ea typeface="휴먼매직체" panose="02030504000101010101" pitchFamily="18" charset="-127"/>
+                  <a:cs typeface="맑은 고딕 Semilight" panose="020B0502040204020203" pitchFamily="50" charset="-127"/>
+                </a:rPr>
+                <a:t>로딩 설계</a:t>
+              </a:r>
+              <a:endParaRPr lang="en-US" altLang="ko-KR" sz="3200" dirty="0">
+                <a:solidFill>
+                  <a:schemeClr val="bg1"/>
+                </a:solidFill>
+                <a:latin typeface="휴먼매직체" panose="02030504000101010101" pitchFamily="18" charset="-127"/>
+                <a:ea typeface="휴먼매직체" panose="02030504000101010101" pitchFamily="18" charset="-127"/>
+                <a:cs typeface="맑은 고딕 Semilight" panose="020B0502040204020203" pitchFamily="50" charset="-127"/>
+              </a:endParaRPr>
+            </a:p>
+            <a:p>
+              <a:pPr marL="342900" indent="-342900">
+                <a:buFontTx/>
+                <a:buChar char="-"/>
+              </a:pPr>
+              <a:r>
+                <a:rPr lang="en-US" altLang="ko-KR" sz="2000" dirty="0">
+                  <a:solidFill>
+                    <a:schemeClr val="bg1"/>
+                  </a:solidFill>
+                  <a:latin typeface="휴먼매직체" panose="02030504000101010101" pitchFamily="18" charset="-127"/>
+                  <a:ea typeface="휴먼매직체" panose="02030504000101010101" pitchFamily="18" charset="-127"/>
+                  <a:cs typeface="맑은 고딕 Semilight" panose="020B0502040204020203" pitchFamily="50" charset="-127"/>
+                </a:rPr>
+                <a:t>Load</a:t>
+              </a:r>
+              <a:r>
+                <a:rPr lang="ko-KR" altLang="en-US" sz="2000" dirty="0">
+                  <a:solidFill>
+                    <a:schemeClr val="bg1"/>
+                  </a:solidFill>
+                  <a:latin typeface="휴먼매직체" panose="02030504000101010101" pitchFamily="18" charset="-127"/>
+                  <a:ea typeface="휴먼매직체" panose="02030504000101010101" pitchFamily="18" charset="-127"/>
+                  <a:cs typeface="맑은 고딕 Semilight" panose="020B0502040204020203" pitchFamily="50" charset="-127"/>
+                </a:rPr>
+                <a:t> </a:t>
+              </a:r>
+              <a:r>
+                <a:rPr lang="en-US" altLang="ko-KR" sz="2000" dirty="0">
+                  <a:solidFill>
+                    <a:schemeClr val="bg1"/>
+                  </a:solidFill>
+                  <a:latin typeface="휴먼매직체" panose="02030504000101010101" pitchFamily="18" charset="-127"/>
+                  <a:ea typeface="휴먼매직체" panose="02030504000101010101" pitchFamily="18" charset="-127"/>
+                  <a:cs typeface="맑은 고딕 Semilight" panose="020B0502040204020203" pitchFamily="50" charset="-127"/>
+                </a:rPr>
+                <a:t>Scene</a:t>
+              </a:r>
+              <a:r>
+                <a:rPr lang="ko-KR" altLang="en-US" sz="2000" dirty="0">
+                  <a:solidFill>
+                    <a:schemeClr val="bg1"/>
+                  </a:solidFill>
+                  <a:latin typeface="휴먼매직체" panose="02030504000101010101" pitchFamily="18" charset="-127"/>
+                  <a:ea typeface="휴먼매직체" panose="02030504000101010101" pitchFamily="18" charset="-127"/>
+                  <a:cs typeface="맑은 고딕 Semilight" panose="020B0502040204020203" pitchFamily="50" charset="-127"/>
+                </a:rPr>
+                <a:t>을 이용하여 유령 오브젝트 로딩 방지</a:t>
+              </a:r>
+              <a:endParaRPr lang="en-US" altLang="ko-KR" sz="2000" dirty="0">
+                <a:solidFill>
+                  <a:schemeClr val="bg1"/>
+                </a:solidFill>
+                <a:latin typeface="휴먼매직체" panose="02030504000101010101" pitchFamily="18" charset="-127"/>
+                <a:ea typeface="휴먼매직체" panose="02030504000101010101" pitchFamily="18" charset="-127"/>
+                <a:cs typeface="맑은 고딕 Semilight" panose="020B0502040204020203" pitchFamily="50" charset="-127"/>
+              </a:endParaRPr>
+            </a:p>
+            <a:p>
+              <a:endParaRPr lang="en-US" altLang="ko-KR" sz="2000" dirty="0">
+                <a:solidFill>
+                  <a:schemeClr val="bg1"/>
+                </a:solidFill>
+                <a:latin typeface="휴먼매직체" panose="02030504000101010101" pitchFamily="18" charset="-127"/>
+                <a:ea typeface="휴먼매직체" panose="02030504000101010101" pitchFamily="18" charset="-127"/>
+                <a:cs typeface="맑은 고딕 Semilight" panose="020B0502040204020203" pitchFamily="50" charset="-127"/>
+              </a:endParaRPr>
             </a:p>
           </p:txBody>
         </p:sp>
@@ -5537,68 +5158,12 @@
           <a:chExt cx="0" cy="0"/>
         </a:xfrm>
       </p:grpSpPr>
-      <p:sp>
-        <p:nvSpPr>
-          <p:cNvPr id="7" name="직사각형 6">
-            <a:extLst>
-              <a:ext uri="{FF2B5EF4-FFF2-40B4-BE49-F238E27FC236}">
-                <a16:creationId xmlns:a16="http://schemas.microsoft.com/office/drawing/2014/main" id="{FAF039C7-1241-4A3A-A71D-134FBDB4F443}"/>
-              </a:ext>
-            </a:extLst>
-          </p:cNvPr>
-          <p:cNvSpPr/>
-          <p:nvPr/>
-        </p:nvSpPr>
-        <p:spPr>
-          <a:xfrm>
-            <a:off x="1611085" y="0"/>
-            <a:ext cx="8969830" cy="6858000"/>
-          </a:xfrm>
-          <a:prstGeom prst="rect">
-            <a:avLst/>
-          </a:prstGeom>
-          <a:solidFill>
-            <a:schemeClr val="tx1">
-              <a:alpha val="75000"/>
-            </a:schemeClr>
-          </a:solidFill>
-          <a:ln>
-            <a:solidFill>
-              <a:schemeClr val="tx1"/>
-            </a:solidFill>
-          </a:ln>
-        </p:spPr>
-        <p:style>
-          <a:lnRef idx="2">
-            <a:schemeClr val="accent1">
-              <a:shade val="50000"/>
-            </a:schemeClr>
-          </a:lnRef>
-          <a:fillRef idx="1">
-            <a:schemeClr val="accent1"/>
-          </a:fillRef>
-          <a:effectRef idx="0">
-            <a:schemeClr val="accent1"/>
-          </a:effectRef>
-          <a:fontRef idx="minor">
-            <a:schemeClr val="lt1"/>
-          </a:fontRef>
-        </p:style>
-        <p:txBody>
-          <a:bodyPr rtlCol="0" anchor="ctr"/>
-          <a:lstStyle/>
-          <a:p>
-            <a:pPr algn="ctr"/>
-            <a:endParaRPr lang="ko-KR" altLang="en-US" dirty="0"/>
-          </a:p>
-        </p:txBody>
-      </p:sp>
       <p:grpSp>
         <p:nvGrpSpPr>
-          <p:cNvPr id="5" name="그룹 4">
-            <a:extLst>
-              <a:ext uri="{FF2B5EF4-FFF2-40B4-BE49-F238E27FC236}">
-                <a16:creationId xmlns:a16="http://schemas.microsoft.com/office/drawing/2014/main" id="{7BDB4D5B-92F3-4160-9EE8-25D9A5165D38}"/>
+          <p:cNvPr id="12" name="그룹 11">
+            <a:extLst>
+              <a:ext uri="{FF2B5EF4-FFF2-40B4-BE49-F238E27FC236}">
+                <a16:creationId xmlns:a16="http://schemas.microsoft.com/office/drawing/2014/main" id="{6FBED614-F7D5-453C-9655-466C242708F3}"/>
               </a:ext>
             </a:extLst>
           </p:cNvPr>
@@ -5607,286 +5172,18 @@
         </p:nvGrpSpPr>
         <p:grpSpPr>
           <a:xfrm>
-            <a:off x="1611085" y="0"/>
-            <a:ext cx="8969830" cy="4893647"/>
-            <a:chOff x="1611085" y="0"/>
-            <a:chExt cx="8969830" cy="4893647"/>
+            <a:off x="0" y="443345"/>
+            <a:ext cx="12192001" cy="5971310"/>
+            <a:chOff x="0" y="443345"/>
+            <a:chExt cx="12192001" cy="5971310"/>
           </a:xfrm>
         </p:grpSpPr>
         <p:sp>
           <p:nvSpPr>
-            <p:cNvPr id="6" name="TextBox 5">
+            <p:cNvPr id="13" name="직사각형 12">
               <a:extLst>
                 <a:ext uri="{FF2B5EF4-FFF2-40B4-BE49-F238E27FC236}">
-                  <a16:creationId xmlns:a16="http://schemas.microsoft.com/office/drawing/2014/main" id="{A617FA81-8484-4D04-9A9D-00C791B302F5}"/>
-                </a:ext>
-              </a:extLst>
-            </p:cNvPr>
-            <p:cNvSpPr txBox="1"/>
-            <p:nvPr/>
-          </p:nvSpPr>
-          <p:spPr>
-            <a:xfrm>
-              <a:off x="1611085" y="0"/>
-              <a:ext cx="8969830" cy="4893647"/>
-            </a:xfrm>
-            <a:prstGeom prst="rect">
-              <a:avLst/>
-            </a:prstGeom>
-            <a:noFill/>
-          </p:spPr>
-          <p:txBody>
-            <a:bodyPr wrap="square" rtlCol="0">
-              <a:spAutoFit/>
-            </a:bodyPr>
-            <a:lstStyle/>
-            <a:p>
-              <a:r>
-                <a:rPr lang="en-US" altLang="ko-KR" sz="3000" dirty="0">
-                  <a:solidFill>
-                    <a:schemeClr val="bg1"/>
-                  </a:solidFill>
-                  <a:latin typeface="휴먼매직체" panose="02030504000101010101" pitchFamily="18" charset="-127"/>
-                  <a:ea typeface="휴먼매직체" panose="02030504000101010101" pitchFamily="18" charset="-127"/>
-                  <a:cs typeface="맑은 고딕 Semilight" panose="020B0502040204020203" pitchFamily="50" charset="-127"/>
-                </a:rPr>
-                <a:t>5. </a:t>
-              </a:r>
-              <a:r>
-                <a:rPr lang="en-US" altLang="ko-KR" sz="3200" dirty="0">
-                  <a:solidFill>
-                    <a:schemeClr val="bg1"/>
-                  </a:solidFill>
-                  <a:latin typeface="휴먼매직체" panose="02030504000101010101" pitchFamily="18" charset="-127"/>
-                  <a:ea typeface="휴먼매직체" panose="02030504000101010101" pitchFamily="18" charset="-127"/>
-                  <a:cs typeface="맑은 고딕 Semilight" panose="020B0502040204020203" pitchFamily="50" charset="-127"/>
-                </a:rPr>
-                <a:t>API </a:t>
-              </a:r>
-              <a:r>
-                <a:rPr lang="ko-KR" altLang="en-US" sz="3200" dirty="0">
-                  <a:solidFill>
-                    <a:schemeClr val="bg1"/>
-                  </a:solidFill>
-                  <a:latin typeface="휴먼매직체" panose="02030504000101010101" pitchFamily="18" charset="-127"/>
-                  <a:ea typeface="휴먼매직체" panose="02030504000101010101" pitchFamily="18" charset="-127"/>
-                  <a:cs typeface="맑은 고딕 Semilight" panose="020B0502040204020203" pitchFamily="50" charset="-127"/>
-                </a:rPr>
-                <a:t>서버 구축</a:t>
-              </a:r>
-              <a:endParaRPr lang="en-US" altLang="ko-KR" sz="3000" dirty="0">
-                <a:solidFill>
-                  <a:schemeClr val="bg1"/>
-                </a:solidFill>
-                <a:latin typeface="휴먼매직체" panose="02030504000101010101" pitchFamily="18" charset="-127"/>
-                <a:ea typeface="휴먼매직체" panose="02030504000101010101" pitchFamily="18" charset="-127"/>
-                <a:cs typeface="맑은 고딕 Semilight" panose="020B0502040204020203" pitchFamily="50" charset="-127"/>
-              </a:endParaRPr>
-            </a:p>
-            <a:p>
-              <a:endParaRPr lang="en-US" altLang="ko-KR" sz="3000" dirty="0">
-                <a:solidFill>
-                  <a:schemeClr val="bg1"/>
-                </a:solidFill>
-                <a:latin typeface="휴먼매직체" panose="02030504000101010101" pitchFamily="18" charset="-127"/>
-                <a:ea typeface="휴먼매직체" panose="02030504000101010101" pitchFamily="18" charset="-127"/>
-                <a:cs typeface="맑은 고딕 Semilight" panose="020B0502040204020203" pitchFamily="50" charset="-127"/>
-              </a:endParaRPr>
-            </a:p>
-            <a:p>
-              <a:endParaRPr lang="en-US" altLang="ko-KR" sz="3000" dirty="0">
-                <a:solidFill>
-                  <a:schemeClr val="bg1"/>
-                </a:solidFill>
-                <a:latin typeface="휴먼매직체" panose="02030504000101010101" pitchFamily="18" charset="-127"/>
-                <a:ea typeface="휴먼매직체" panose="02030504000101010101" pitchFamily="18" charset="-127"/>
-                <a:cs typeface="맑은 고딕 Semilight" panose="020B0502040204020203" pitchFamily="50" charset="-127"/>
-              </a:endParaRPr>
-            </a:p>
-            <a:p>
-              <a:endParaRPr lang="en-US" altLang="ko-KR" sz="3000" dirty="0">
-                <a:solidFill>
-                  <a:schemeClr val="bg1"/>
-                </a:solidFill>
-                <a:latin typeface="휴먼매직체" panose="02030504000101010101" pitchFamily="18" charset="-127"/>
-                <a:ea typeface="휴먼매직체" panose="02030504000101010101" pitchFamily="18" charset="-127"/>
-                <a:cs typeface="맑은 고딕 Semilight" panose="020B0502040204020203" pitchFamily="50" charset="-127"/>
-              </a:endParaRPr>
-            </a:p>
-            <a:p>
-              <a:endParaRPr lang="en-US" altLang="ko-KR" sz="3000" dirty="0">
-                <a:solidFill>
-                  <a:schemeClr val="bg1"/>
-                </a:solidFill>
-                <a:latin typeface="휴먼매직체" panose="02030504000101010101" pitchFamily="18" charset="-127"/>
-                <a:ea typeface="휴먼매직체" panose="02030504000101010101" pitchFamily="18" charset="-127"/>
-                <a:cs typeface="맑은 고딕 Semilight" panose="020B0502040204020203" pitchFamily="50" charset="-127"/>
-              </a:endParaRPr>
-            </a:p>
-            <a:p>
-              <a:endParaRPr lang="en-US" altLang="ko-KR" sz="3000" dirty="0">
-                <a:solidFill>
-                  <a:schemeClr val="bg1"/>
-                </a:solidFill>
-                <a:latin typeface="휴먼매직체" panose="02030504000101010101" pitchFamily="18" charset="-127"/>
-                <a:ea typeface="휴먼매직체" panose="02030504000101010101" pitchFamily="18" charset="-127"/>
-                <a:cs typeface="맑은 고딕 Semilight" panose="020B0502040204020203" pitchFamily="50" charset="-127"/>
-              </a:endParaRPr>
-            </a:p>
-            <a:p>
-              <a:endParaRPr lang="en-US" altLang="ko-KR" sz="3000" dirty="0">
-                <a:solidFill>
-                  <a:schemeClr val="bg1"/>
-                </a:solidFill>
-                <a:latin typeface="휴먼매직체" panose="02030504000101010101" pitchFamily="18" charset="-127"/>
-                <a:ea typeface="휴먼매직체" panose="02030504000101010101" pitchFamily="18" charset="-127"/>
-                <a:cs typeface="맑은 고딕 Semilight" panose="020B0502040204020203" pitchFamily="50" charset="-127"/>
-              </a:endParaRPr>
-            </a:p>
-            <a:p>
-              <a:endParaRPr lang="en-US" altLang="ko-KR" sz="3000" dirty="0">
-                <a:solidFill>
-                  <a:schemeClr val="bg1"/>
-                </a:solidFill>
-                <a:latin typeface="휴먼매직체" panose="02030504000101010101" pitchFamily="18" charset="-127"/>
-                <a:ea typeface="휴먼매직체" panose="02030504000101010101" pitchFamily="18" charset="-127"/>
-                <a:cs typeface="맑은 고딕 Semilight" panose="020B0502040204020203" pitchFamily="50" charset="-127"/>
-              </a:endParaRPr>
-            </a:p>
-            <a:p>
-              <a:endParaRPr lang="en-US" altLang="ko-KR" sz="3000" dirty="0">
-                <a:solidFill>
-                  <a:schemeClr val="bg1"/>
-                </a:solidFill>
-                <a:latin typeface="휴먼매직체" panose="02030504000101010101" pitchFamily="18" charset="-127"/>
-                <a:ea typeface="휴먼매직체" panose="02030504000101010101" pitchFamily="18" charset="-127"/>
-                <a:cs typeface="맑은 고딕 Semilight" panose="020B0502040204020203" pitchFamily="50" charset="-127"/>
-              </a:endParaRPr>
-            </a:p>
-            <a:p>
-              <a:pPr marL="342900" indent="-342900">
-                <a:buFontTx/>
-                <a:buChar char="-"/>
-              </a:pPr>
-              <a:r>
-                <a:rPr lang="en-US" altLang="ko-KR" sz="2000" dirty="0">
-                  <a:solidFill>
-                    <a:schemeClr val="bg1"/>
-                  </a:solidFill>
-                  <a:latin typeface="휴먼매직체" panose="02030504000101010101" pitchFamily="18" charset="-127"/>
-                  <a:ea typeface="휴먼매직체" panose="02030504000101010101" pitchFamily="18" charset="-127"/>
-                  <a:cs typeface="맑은 고딕 Semilight" panose="020B0502040204020203" pitchFamily="50" charset="-127"/>
-                </a:rPr>
-                <a:t>SQLite3</a:t>
-              </a:r>
-              <a:r>
-                <a:rPr lang="ko-KR" altLang="en-US" sz="2000" dirty="0">
-                  <a:solidFill>
-                    <a:schemeClr val="bg1"/>
-                  </a:solidFill>
-                  <a:latin typeface="휴먼매직체" panose="02030504000101010101" pitchFamily="18" charset="-127"/>
-                  <a:ea typeface="휴먼매직체" panose="02030504000101010101" pitchFamily="18" charset="-127"/>
-                  <a:cs typeface="맑은 고딕 Semilight" panose="020B0502040204020203" pitchFamily="50" charset="-127"/>
-                </a:rPr>
-                <a:t>의 한계 인식 후</a:t>
-              </a:r>
-              <a:r>
-                <a:rPr lang="en-US" altLang="ko-KR" sz="2000" dirty="0">
-                  <a:solidFill>
-                    <a:schemeClr val="bg1"/>
-                  </a:solidFill>
-                  <a:latin typeface="휴먼매직체" panose="02030504000101010101" pitchFamily="18" charset="-127"/>
-                  <a:ea typeface="휴먼매직체" panose="02030504000101010101" pitchFamily="18" charset="-127"/>
-                  <a:cs typeface="맑은 고딕 Semilight" panose="020B0502040204020203" pitchFamily="50" charset="-127"/>
-                </a:rPr>
-                <a:t>, </a:t>
-              </a:r>
-              <a:r>
-                <a:rPr lang="ko-KR" altLang="en-US" sz="2000" dirty="0">
-                  <a:solidFill>
-                    <a:schemeClr val="bg1"/>
-                  </a:solidFill>
-                  <a:latin typeface="휴먼매직체" panose="02030504000101010101" pitchFamily="18" charset="-127"/>
-                  <a:ea typeface="휴먼매직체" panose="02030504000101010101" pitchFamily="18" charset="-127"/>
-                  <a:cs typeface="맑은 고딕 Semilight" panose="020B0502040204020203" pitchFamily="50" charset="-127"/>
-                </a:rPr>
-                <a:t>즉각적인 상황 판단을 기반으로 강행</a:t>
-              </a:r>
-              <a:endParaRPr lang="en-US" altLang="ko-KR" sz="2000" dirty="0">
-                <a:solidFill>
-                  <a:schemeClr val="bg1"/>
-                </a:solidFill>
-                <a:latin typeface="휴먼매직체" panose="02030504000101010101" pitchFamily="18" charset="-127"/>
-                <a:ea typeface="휴먼매직체" panose="02030504000101010101" pitchFamily="18" charset="-127"/>
-                <a:cs typeface="맑은 고딕 Semilight" panose="020B0502040204020203" pitchFamily="50" charset="-127"/>
-              </a:endParaRPr>
-            </a:p>
-            <a:p>
-              <a:pPr marL="342900" indent="-342900">
-                <a:buFontTx/>
-                <a:buChar char="-"/>
-              </a:pPr>
-              <a:r>
-                <a:rPr lang="en-US" altLang="ko-KR" sz="2000" dirty="0">
-                  <a:solidFill>
-                    <a:schemeClr val="bg1"/>
-                  </a:solidFill>
-                  <a:latin typeface="휴먼매직체" panose="02030504000101010101" pitchFamily="18" charset="-127"/>
-                  <a:ea typeface="휴먼매직체" panose="02030504000101010101" pitchFamily="18" charset="-127"/>
-                  <a:cs typeface="맑은 고딕 Semilight" panose="020B0502040204020203" pitchFamily="50" charset="-127"/>
-                </a:rPr>
-                <a:t>Django </a:t>
-              </a:r>
-              <a:r>
-                <a:rPr lang="ko-KR" altLang="en-US" sz="2000" dirty="0">
-                  <a:solidFill>
-                    <a:schemeClr val="bg1"/>
-                  </a:solidFill>
-                  <a:latin typeface="휴먼매직체" panose="02030504000101010101" pitchFamily="18" charset="-127"/>
-                  <a:ea typeface="휴먼매직체" panose="02030504000101010101" pitchFamily="18" charset="-127"/>
-                  <a:cs typeface="맑은 고딕 Semilight" panose="020B0502040204020203" pitchFamily="50" charset="-127"/>
-                </a:rPr>
-                <a:t>기반의 </a:t>
-              </a:r>
-              <a:r>
-                <a:rPr lang="en-US" altLang="ko-KR" sz="2000" dirty="0">
-                  <a:solidFill>
-                    <a:schemeClr val="bg1"/>
-                  </a:solidFill>
-                  <a:latin typeface="휴먼매직체" panose="02030504000101010101" pitchFamily="18" charset="-127"/>
-                  <a:ea typeface="휴먼매직체" panose="02030504000101010101" pitchFamily="18" charset="-127"/>
-                  <a:cs typeface="맑은 고딕 Semilight" panose="020B0502040204020203" pitchFamily="50" charset="-127"/>
-                </a:rPr>
-                <a:t>Restful-API </a:t>
-              </a:r>
-              <a:r>
-                <a:rPr lang="ko-KR" altLang="en-US" sz="2000" dirty="0">
-                  <a:solidFill>
-                    <a:schemeClr val="bg1"/>
-                  </a:solidFill>
-                  <a:latin typeface="휴먼매직체" panose="02030504000101010101" pitchFamily="18" charset="-127"/>
-                  <a:ea typeface="휴먼매직체" panose="02030504000101010101" pitchFamily="18" charset="-127"/>
-                  <a:cs typeface="맑은 고딕 Semilight" panose="020B0502040204020203" pitchFamily="50" charset="-127"/>
-                </a:rPr>
-                <a:t>구축</a:t>
-              </a:r>
-              <a:endParaRPr lang="en-US" altLang="ko-KR" sz="2000" dirty="0">
-                <a:solidFill>
-                  <a:schemeClr val="bg1"/>
-                </a:solidFill>
-                <a:latin typeface="휴먼매직체" panose="02030504000101010101" pitchFamily="18" charset="-127"/>
-                <a:ea typeface="휴먼매직체" panose="02030504000101010101" pitchFamily="18" charset="-127"/>
-                <a:cs typeface="맑은 고딕 Semilight" panose="020B0502040204020203" pitchFamily="50" charset="-127"/>
-              </a:endParaRPr>
-            </a:p>
-          </p:txBody>
-        </p:sp>
-        <p:sp>
-          <p:nvSpPr>
-            <p:cNvPr id="8" name="직사각형 7">
-              <a:extLst>
-                <a:ext uri="{FF2B5EF4-FFF2-40B4-BE49-F238E27FC236}">
-                  <a16:creationId xmlns:a16="http://schemas.microsoft.com/office/drawing/2014/main" id="{3D243F2E-D1B7-4BE5-8976-EAA0CBA7F313}"/>
+                  <a16:creationId xmlns:a16="http://schemas.microsoft.com/office/drawing/2014/main" id="{10669275-455A-4256-881A-DBCAFF0C625C}"/>
                 </a:ext>
               </a:extLst>
             </p:cNvPr>
@@ -5895,12 +5192,22 @@
           </p:nvSpPr>
           <p:spPr>
             <a:xfrm>
-              <a:off x="2006600" y="685800"/>
-              <a:ext cx="8178800" cy="3333750"/>
+              <a:off x="0" y="443345"/>
+              <a:ext cx="12192000" cy="5971310"/>
             </a:xfrm>
             <a:prstGeom prst="rect">
               <a:avLst/>
             </a:prstGeom>
+            <a:solidFill>
+              <a:schemeClr val="tx1">
+                <a:alpha val="75000"/>
+              </a:schemeClr>
+            </a:solidFill>
+            <a:ln>
+              <a:solidFill>
+                <a:schemeClr val="tx1"/>
+              </a:solidFill>
+            </a:ln>
           </p:spPr>
           <p:style>
             <a:lnRef idx="2">
@@ -5923,7 +5230,194 @@
             <a:lstStyle/>
             <a:p>
               <a:pPr algn="ctr"/>
-              <a:endParaRPr lang="ko-KR" altLang="en-US"/>
+              <a:endParaRPr lang="ko-KR" altLang="en-US" dirty="0"/>
+            </a:p>
+          </p:txBody>
+        </p:sp>
+        <p:sp>
+          <p:nvSpPr>
+            <p:cNvPr id="14" name="TextBox 13">
+              <a:extLst>
+                <a:ext uri="{FF2B5EF4-FFF2-40B4-BE49-F238E27FC236}">
+                  <a16:creationId xmlns:a16="http://schemas.microsoft.com/office/drawing/2014/main" id="{6E47EAE9-88F2-46B5-A78C-01DAF03AC19A}"/>
+                </a:ext>
+              </a:extLst>
+            </p:cNvPr>
+            <p:cNvSpPr txBox="1"/>
+            <p:nvPr/>
+          </p:nvSpPr>
+          <p:spPr>
+            <a:xfrm>
+              <a:off x="0" y="443345"/>
+              <a:ext cx="12192001" cy="1508105"/>
+            </a:xfrm>
+            <a:prstGeom prst="rect">
+              <a:avLst/>
+            </a:prstGeom>
+            <a:noFill/>
+          </p:spPr>
+          <p:txBody>
+            <a:bodyPr wrap="square" rtlCol="0">
+              <a:spAutoFit/>
+            </a:bodyPr>
+            <a:lstStyle/>
+            <a:p>
+              <a:r>
+                <a:rPr lang="en-US" altLang="ko-KR" sz="3200" dirty="0">
+                  <a:solidFill>
+                    <a:schemeClr val="bg1"/>
+                  </a:solidFill>
+                  <a:latin typeface="휴먼매직체" panose="02030504000101010101" pitchFamily="18" charset="-127"/>
+                  <a:ea typeface="휴먼매직체" panose="02030504000101010101" pitchFamily="18" charset="-127"/>
+                  <a:cs typeface="맑은 고딕 Semilight" panose="020B0502040204020203" pitchFamily="50" charset="-127"/>
+                </a:rPr>
+                <a:t>5. API </a:t>
+              </a:r>
+              <a:r>
+                <a:rPr lang="ko-KR" altLang="en-US" sz="3200" dirty="0">
+                  <a:solidFill>
+                    <a:schemeClr val="bg1"/>
+                  </a:solidFill>
+                  <a:latin typeface="휴먼매직체" panose="02030504000101010101" pitchFamily="18" charset="-127"/>
+                  <a:ea typeface="휴먼매직체" panose="02030504000101010101" pitchFamily="18" charset="-127"/>
+                  <a:cs typeface="맑은 고딕 Semilight" panose="020B0502040204020203" pitchFamily="50" charset="-127"/>
+                </a:rPr>
+                <a:t>서버 구축</a:t>
+              </a:r>
+              <a:endParaRPr lang="en-US" altLang="ko-KR" sz="3200" dirty="0">
+                <a:solidFill>
+                  <a:schemeClr val="bg1"/>
+                </a:solidFill>
+                <a:latin typeface="휴먼매직체" panose="02030504000101010101" pitchFamily="18" charset="-127"/>
+                <a:ea typeface="휴먼매직체" panose="02030504000101010101" pitchFamily="18" charset="-127"/>
+                <a:cs typeface="맑은 고딕 Semilight" panose="020B0502040204020203" pitchFamily="50" charset="-127"/>
+              </a:endParaRPr>
+            </a:p>
+            <a:p>
+              <a:pPr marL="342900" indent="-342900">
+                <a:buFontTx/>
+                <a:buChar char="-"/>
+              </a:pPr>
+              <a:r>
+                <a:rPr lang="en-US" altLang="ko-KR" sz="2000" dirty="0">
+                  <a:solidFill>
+                    <a:schemeClr val="bg1"/>
+                  </a:solidFill>
+                  <a:latin typeface="휴먼매직체" panose="02030504000101010101" pitchFamily="18" charset="-127"/>
+                  <a:ea typeface="휴먼매직체" panose="02030504000101010101" pitchFamily="18" charset="-127"/>
+                  <a:cs typeface="맑은 고딕 Semilight" panose="020B0502040204020203" pitchFamily="50" charset="-127"/>
+                </a:rPr>
+                <a:t>SQLite3</a:t>
+              </a:r>
+              <a:r>
+                <a:rPr lang="ko-KR" altLang="en-US" sz="2000" dirty="0">
+                  <a:solidFill>
+                    <a:schemeClr val="bg1"/>
+                  </a:solidFill>
+                  <a:latin typeface="휴먼매직체" panose="02030504000101010101" pitchFamily="18" charset="-127"/>
+                  <a:ea typeface="휴먼매직체" panose="02030504000101010101" pitchFamily="18" charset="-127"/>
+                  <a:cs typeface="맑은 고딕 Semilight" panose="020B0502040204020203" pitchFamily="50" charset="-127"/>
+                </a:rPr>
+                <a:t>의 한계 인식 후</a:t>
+              </a:r>
+              <a:r>
+                <a:rPr lang="en-US" altLang="ko-KR" sz="2000" dirty="0">
+                  <a:solidFill>
+                    <a:schemeClr val="bg1"/>
+                  </a:solidFill>
+                  <a:latin typeface="휴먼매직체" panose="02030504000101010101" pitchFamily="18" charset="-127"/>
+                  <a:ea typeface="휴먼매직체" panose="02030504000101010101" pitchFamily="18" charset="-127"/>
+                  <a:cs typeface="맑은 고딕 Semilight" panose="020B0502040204020203" pitchFamily="50" charset="-127"/>
+                </a:rPr>
+                <a:t>, </a:t>
+              </a:r>
+              <a:r>
+                <a:rPr lang="ko-KR" altLang="en-US" sz="2000" dirty="0">
+                  <a:solidFill>
+                    <a:schemeClr val="bg1"/>
+                  </a:solidFill>
+                  <a:latin typeface="휴먼매직체" panose="02030504000101010101" pitchFamily="18" charset="-127"/>
+                  <a:ea typeface="휴먼매직체" panose="02030504000101010101" pitchFamily="18" charset="-127"/>
+                  <a:cs typeface="맑은 고딕 Semilight" panose="020B0502040204020203" pitchFamily="50" charset="-127"/>
+                </a:rPr>
+                <a:t>즉각적인 상황 판단을 기반으로 강행</a:t>
+              </a:r>
+              <a:endParaRPr lang="en-US" altLang="ko-KR" sz="2000" dirty="0">
+                <a:solidFill>
+                  <a:schemeClr val="bg1"/>
+                </a:solidFill>
+                <a:latin typeface="휴먼매직체" panose="02030504000101010101" pitchFamily="18" charset="-127"/>
+                <a:ea typeface="휴먼매직체" panose="02030504000101010101" pitchFamily="18" charset="-127"/>
+                <a:cs typeface="맑은 고딕 Semilight" panose="020B0502040204020203" pitchFamily="50" charset="-127"/>
+              </a:endParaRPr>
+            </a:p>
+            <a:p>
+              <a:pPr marL="342900" indent="-342900">
+                <a:buFontTx/>
+                <a:buChar char="-"/>
+              </a:pPr>
+              <a:r>
+                <a:rPr lang="en-US" altLang="ko-KR" sz="2000" dirty="0">
+                  <a:solidFill>
+                    <a:schemeClr val="bg1"/>
+                  </a:solidFill>
+                  <a:latin typeface="휴먼매직체" panose="02030504000101010101" pitchFamily="18" charset="-127"/>
+                  <a:ea typeface="휴먼매직체" panose="02030504000101010101" pitchFamily="18" charset="-127"/>
+                  <a:cs typeface="맑은 고딕 Semilight" panose="020B0502040204020203" pitchFamily="50" charset="-127"/>
+                </a:rPr>
+                <a:t>Django </a:t>
+              </a:r>
+              <a:r>
+                <a:rPr lang="ko-KR" altLang="en-US" sz="2000" dirty="0">
+                  <a:solidFill>
+                    <a:schemeClr val="bg1"/>
+                  </a:solidFill>
+                  <a:latin typeface="휴먼매직체" panose="02030504000101010101" pitchFamily="18" charset="-127"/>
+                  <a:ea typeface="휴먼매직체" panose="02030504000101010101" pitchFamily="18" charset="-127"/>
+                  <a:cs typeface="맑은 고딕 Semilight" panose="020B0502040204020203" pitchFamily="50" charset="-127"/>
+                </a:rPr>
+                <a:t>기반의 </a:t>
+              </a:r>
+              <a:r>
+                <a:rPr lang="en-US" altLang="ko-KR" sz="2000" dirty="0">
+                  <a:solidFill>
+                    <a:schemeClr val="bg1"/>
+                  </a:solidFill>
+                  <a:latin typeface="휴먼매직체" panose="02030504000101010101" pitchFamily="18" charset="-127"/>
+                  <a:ea typeface="휴먼매직체" panose="02030504000101010101" pitchFamily="18" charset="-127"/>
+                  <a:cs typeface="맑은 고딕 Semilight" panose="020B0502040204020203" pitchFamily="50" charset="-127"/>
+                </a:rPr>
+                <a:t>Restful-API </a:t>
+              </a:r>
+              <a:r>
+                <a:rPr lang="ko-KR" altLang="en-US" sz="2000" dirty="0">
+                  <a:solidFill>
+                    <a:schemeClr val="bg1"/>
+                  </a:solidFill>
+                  <a:latin typeface="휴먼매직체" panose="02030504000101010101" pitchFamily="18" charset="-127"/>
+                  <a:ea typeface="휴먼매직체" panose="02030504000101010101" pitchFamily="18" charset="-127"/>
+                  <a:cs typeface="맑은 고딕 Semilight" panose="020B0502040204020203" pitchFamily="50" charset="-127"/>
+                </a:rPr>
+                <a:t>구축</a:t>
+              </a:r>
+              <a:endParaRPr lang="en-US" altLang="ko-KR" sz="2000" dirty="0">
+                <a:solidFill>
+                  <a:schemeClr val="bg1"/>
+                </a:solidFill>
+                <a:latin typeface="휴먼매직체" panose="02030504000101010101" pitchFamily="18" charset="-127"/>
+                <a:ea typeface="휴먼매직체" panose="02030504000101010101" pitchFamily="18" charset="-127"/>
+                <a:cs typeface="맑은 고딕 Semilight" panose="020B0502040204020203" pitchFamily="50" charset="-127"/>
+              </a:endParaRPr>
+            </a:p>
+            <a:p>
+              <a:endParaRPr lang="en-US" altLang="ko-KR" sz="2000" dirty="0">
+                <a:solidFill>
+                  <a:schemeClr val="bg1"/>
+                </a:solidFill>
+                <a:latin typeface="휴먼매직체" panose="02030504000101010101" pitchFamily="18" charset="-127"/>
+                <a:ea typeface="휴먼매직체" panose="02030504000101010101" pitchFamily="18" charset="-127"/>
+                <a:cs typeface="맑은 고딕 Semilight" panose="020B0502040204020203" pitchFamily="50" charset="-127"/>
+              </a:endParaRPr>
             </a:p>
           </p:txBody>
         </p:sp>
@@ -5973,68 +5467,12 @@
           <a:chExt cx="0" cy="0"/>
         </a:xfrm>
       </p:grpSpPr>
-      <p:sp>
-        <p:nvSpPr>
-          <p:cNvPr id="7" name="직사각형 6">
-            <a:extLst>
-              <a:ext uri="{FF2B5EF4-FFF2-40B4-BE49-F238E27FC236}">
-                <a16:creationId xmlns:a16="http://schemas.microsoft.com/office/drawing/2014/main" id="{FAF039C7-1241-4A3A-A71D-134FBDB4F443}"/>
-              </a:ext>
-            </a:extLst>
-          </p:cNvPr>
-          <p:cNvSpPr/>
-          <p:nvPr/>
-        </p:nvSpPr>
-        <p:spPr>
-          <a:xfrm>
-            <a:off x="1611085" y="0"/>
-            <a:ext cx="8969830" cy="6858000"/>
-          </a:xfrm>
-          <a:prstGeom prst="rect">
-            <a:avLst/>
-          </a:prstGeom>
-          <a:solidFill>
-            <a:schemeClr val="tx1">
-              <a:alpha val="75000"/>
-            </a:schemeClr>
-          </a:solidFill>
-          <a:ln>
-            <a:solidFill>
-              <a:schemeClr val="tx1"/>
-            </a:solidFill>
-          </a:ln>
-        </p:spPr>
-        <p:style>
-          <a:lnRef idx="2">
-            <a:schemeClr val="accent1">
-              <a:shade val="50000"/>
-            </a:schemeClr>
-          </a:lnRef>
-          <a:fillRef idx="1">
-            <a:schemeClr val="accent1"/>
-          </a:fillRef>
-          <a:effectRef idx="0">
-            <a:schemeClr val="accent1"/>
-          </a:effectRef>
-          <a:fontRef idx="minor">
-            <a:schemeClr val="lt1"/>
-          </a:fontRef>
-        </p:style>
-        <p:txBody>
-          <a:bodyPr rtlCol="0" anchor="ctr"/>
-          <a:lstStyle/>
-          <a:p>
-            <a:pPr algn="ctr"/>
-            <a:endParaRPr lang="ko-KR" altLang="en-US" dirty="0"/>
-          </a:p>
-        </p:txBody>
-      </p:sp>
       <p:grpSp>
         <p:nvGrpSpPr>
-          <p:cNvPr id="5" name="그룹 4">
-            <a:extLst>
-              <a:ext uri="{FF2B5EF4-FFF2-40B4-BE49-F238E27FC236}">
-                <a16:creationId xmlns:a16="http://schemas.microsoft.com/office/drawing/2014/main" id="{70C1E284-B286-4759-B533-9EDA51820DD6}"/>
+          <p:cNvPr id="12" name="그룹 11">
+            <a:extLst>
+              <a:ext uri="{FF2B5EF4-FFF2-40B4-BE49-F238E27FC236}">
+                <a16:creationId xmlns:a16="http://schemas.microsoft.com/office/drawing/2014/main" id="{8BB649FE-C388-4955-86E6-09AA9FC0095F}"/>
               </a:ext>
             </a:extLst>
           </p:cNvPr>
@@ -6043,219 +5481,18 @@
         </p:nvGrpSpPr>
         <p:grpSpPr>
           <a:xfrm>
-            <a:off x="1611085" y="0"/>
-            <a:ext cx="8969830" cy="4893647"/>
-            <a:chOff x="1611085" y="0"/>
-            <a:chExt cx="8969830" cy="4893647"/>
+            <a:off x="0" y="443345"/>
+            <a:ext cx="12192001" cy="5971310"/>
+            <a:chOff x="0" y="443345"/>
+            <a:chExt cx="12192001" cy="5971310"/>
           </a:xfrm>
         </p:grpSpPr>
         <p:sp>
           <p:nvSpPr>
-            <p:cNvPr id="6" name="TextBox 5">
+            <p:cNvPr id="13" name="직사각형 12">
               <a:extLst>
                 <a:ext uri="{FF2B5EF4-FFF2-40B4-BE49-F238E27FC236}">
-                  <a16:creationId xmlns:a16="http://schemas.microsoft.com/office/drawing/2014/main" id="{EF92DCB2-5190-4F11-9111-48C6F38383B4}"/>
-                </a:ext>
-              </a:extLst>
-            </p:cNvPr>
-            <p:cNvSpPr txBox="1"/>
-            <p:nvPr/>
-          </p:nvSpPr>
-          <p:spPr>
-            <a:xfrm>
-              <a:off x="1611085" y="0"/>
-              <a:ext cx="8969830" cy="4893647"/>
-            </a:xfrm>
-            <a:prstGeom prst="rect">
-              <a:avLst/>
-            </a:prstGeom>
-            <a:noFill/>
-          </p:spPr>
-          <p:txBody>
-            <a:bodyPr wrap="square" rtlCol="0">
-              <a:spAutoFit/>
-            </a:bodyPr>
-            <a:lstStyle/>
-            <a:p>
-              <a:r>
-                <a:rPr lang="en-US" altLang="ko-KR" sz="3000" dirty="0">
-                  <a:solidFill>
-                    <a:schemeClr val="bg1"/>
-                  </a:solidFill>
-                  <a:latin typeface="휴먼매직체" panose="02030504000101010101" pitchFamily="18" charset="-127"/>
-                  <a:ea typeface="휴먼매직체" panose="02030504000101010101" pitchFamily="18" charset="-127"/>
-                  <a:cs typeface="맑은 고딕 Semilight" panose="020B0502040204020203" pitchFamily="50" charset="-127"/>
-                </a:rPr>
-                <a:t>6. </a:t>
-              </a:r>
-              <a:r>
-                <a:rPr lang="ko-KR" altLang="en-US" sz="3200" dirty="0" err="1">
-                  <a:solidFill>
-                    <a:schemeClr val="bg1"/>
-                  </a:solidFill>
-                  <a:latin typeface="휴먼매직체" panose="02030504000101010101" pitchFamily="18" charset="-127"/>
-                  <a:ea typeface="휴먼매직체" panose="02030504000101010101" pitchFamily="18" charset="-127"/>
-                  <a:cs typeface="맑은 고딕 Semilight" panose="020B0502040204020203" pitchFamily="50" charset="-127"/>
-                </a:rPr>
-                <a:t>바이브</a:t>
-              </a:r>
-              <a:r>
-                <a:rPr lang="ko-KR" altLang="en-US" sz="3200" dirty="0">
-                  <a:solidFill>
-                    <a:schemeClr val="bg1"/>
-                  </a:solidFill>
-                  <a:latin typeface="휴먼매직체" panose="02030504000101010101" pitchFamily="18" charset="-127"/>
-                  <a:ea typeface="휴먼매직체" panose="02030504000101010101" pitchFamily="18" charset="-127"/>
-                  <a:cs typeface="맑은 고딕 Semilight" panose="020B0502040204020203" pitchFamily="50" charset="-127"/>
-                </a:rPr>
-                <a:t> </a:t>
-              </a:r>
-              <a:r>
-                <a:rPr lang="ko-KR" altLang="en-US" sz="3200" dirty="0" err="1">
-                  <a:solidFill>
-                    <a:schemeClr val="bg1"/>
-                  </a:solidFill>
-                  <a:latin typeface="휴먼매직체" panose="02030504000101010101" pitchFamily="18" charset="-127"/>
-                  <a:ea typeface="휴먼매직체" panose="02030504000101010101" pitchFamily="18" charset="-127"/>
-                  <a:cs typeface="맑은 고딕 Semilight" panose="020B0502040204020203" pitchFamily="50" charset="-127"/>
-                </a:rPr>
-                <a:t>코딩된</a:t>
-              </a:r>
-              <a:r>
-                <a:rPr lang="ko-KR" altLang="en-US" sz="3200" dirty="0">
-                  <a:solidFill>
-                    <a:schemeClr val="bg1"/>
-                  </a:solidFill>
-                  <a:latin typeface="휴먼매직체" panose="02030504000101010101" pitchFamily="18" charset="-127"/>
-                  <a:ea typeface="휴먼매직체" panose="02030504000101010101" pitchFamily="18" charset="-127"/>
-                  <a:cs typeface="맑은 고딕 Semilight" panose="020B0502040204020203" pitchFamily="50" charset="-127"/>
-                </a:rPr>
-                <a:t> 비정형 구조 재정비</a:t>
-              </a:r>
-              <a:endParaRPr lang="en-US" altLang="ko-KR" sz="3000" dirty="0">
-                <a:solidFill>
-                  <a:schemeClr val="bg1"/>
-                </a:solidFill>
-                <a:latin typeface="휴먼매직체" panose="02030504000101010101" pitchFamily="18" charset="-127"/>
-                <a:ea typeface="휴먼매직체" panose="02030504000101010101" pitchFamily="18" charset="-127"/>
-                <a:cs typeface="맑은 고딕 Semilight" panose="020B0502040204020203" pitchFamily="50" charset="-127"/>
-              </a:endParaRPr>
-            </a:p>
-            <a:p>
-              <a:endParaRPr lang="en-US" altLang="ko-KR" sz="3000" dirty="0">
-                <a:solidFill>
-                  <a:schemeClr val="bg1"/>
-                </a:solidFill>
-                <a:latin typeface="휴먼매직체" panose="02030504000101010101" pitchFamily="18" charset="-127"/>
-                <a:ea typeface="휴먼매직체" panose="02030504000101010101" pitchFamily="18" charset="-127"/>
-                <a:cs typeface="맑은 고딕 Semilight" panose="020B0502040204020203" pitchFamily="50" charset="-127"/>
-              </a:endParaRPr>
-            </a:p>
-            <a:p>
-              <a:endParaRPr lang="en-US" altLang="ko-KR" sz="3000" dirty="0">
-                <a:solidFill>
-                  <a:schemeClr val="bg1"/>
-                </a:solidFill>
-                <a:latin typeface="휴먼매직체" panose="02030504000101010101" pitchFamily="18" charset="-127"/>
-                <a:ea typeface="휴먼매직체" panose="02030504000101010101" pitchFamily="18" charset="-127"/>
-                <a:cs typeface="맑은 고딕 Semilight" panose="020B0502040204020203" pitchFamily="50" charset="-127"/>
-              </a:endParaRPr>
-            </a:p>
-            <a:p>
-              <a:endParaRPr lang="en-US" altLang="ko-KR" sz="3000" dirty="0">
-                <a:solidFill>
-                  <a:schemeClr val="bg1"/>
-                </a:solidFill>
-                <a:latin typeface="휴먼매직체" panose="02030504000101010101" pitchFamily="18" charset="-127"/>
-                <a:ea typeface="휴먼매직체" panose="02030504000101010101" pitchFamily="18" charset="-127"/>
-                <a:cs typeface="맑은 고딕 Semilight" panose="020B0502040204020203" pitchFamily="50" charset="-127"/>
-              </a:endParaRPr>
-            </a:p>
-            <a:p>
-              <a:endParaRPr lang="en-US" altLang="ko-KR" sz="3000" dirty="0">
-                <a:solidFill>
-                  <a:schemeClr val="bg1"/>
-                </a:solidFill>
-                <a:latin typeface="휴먼매직체" panose="02030504000101010101" pitchFamily="18" charset="-127"/>
-                <a:ea typeface="휴먼매직체" panose="02030504000101010101" pitchFamily="18" charset="-127"/>
-                <a:cs typeface="맑은 고딕 Semilight" panose="020B0502040204020203" pitchFamily="50" charset="-127"/>
-              </a:endParaRPr>
-            </a:p>
-            <a:p>
-              <a:endParaRPr lang="en-US" altLang="ko-KR" sz="3000" dirty="0">
-                <a:solidFill>
-                  <a:schemeClr val="bg1"/>
-                </a:solidFill>
-                <a:latin typeface="휴먼매직체" panose="02030504000101010101" pitchFamily="18" charset="-127"/>
-                <a:ea typeface="휴먼매직체" panose="02030504000101010101" pitchFamily="18" charset="-127"/>
-                <a:cs typeface="맑은 고딕 Semilight" panose="020B0502040204020203" pitchFamily="50" charset="-127"/>
-              </a:endParaRPr>
-            </a:p>
-            <a:p>
-              <a:endParaRPr lang="en-US" altLang="ko-KR" sz="3000" dirty="0">
-                <a:solidFill>
-                  <a:schemeClr val="bg1"/>
-                </a:solidFill>
-                <a:latin typeface="휴먼매직체" panose="02030504000101010101" pitchFamily="18" charset="-127"/>
-                <a:ea typeface="휴먼매직체" panose="02030504000101010101" pitchFamily="18" charset="-127"/>
-                <a:cs typeface="맑은 고딕 Semilight" panose="020B0502040204020203" pitchFamily="50" charset="-127"/>
-              </a:endParaRPr>
-            </a:p>
-            <a:p>
-              <a:endParaRPr lang="en-US" altLang="ko-KR" sz="3000" dirty="0">
-                <a:solidFill>
-                  <a:schemeClr val="bg1"/>
-                </a:solidFill>
-                <a:latin typeface="휴먼매직체" panose="02030504000101010101" pitchFamily="18" charset="-127"/>
-                <a:ea typeface="휴먼매직체" panose="02030504000101010101" pitchFamily="18" charset="-127"/>
-                <a:cs typeface="맑은 고딕 Semilight" panose="020B0502040204020203" pitchFamily="50" charset="-127"/>
-              </a:endParaRPr>
-            </a:p>
-            <a:p>
-              <a:endParaRPr lang="en-US" altLang="ko-KR" sz="3000" dirty="0">
-                <a:solidFill>
-                  <a:schemeClr val="bg1"/>
-                </a:solidFill>
-                <a:latin typeface="휴먼매직체" panose="02030504000101010101" pitchFamily="18" charset="-127"/>
-                <a:ea typeface="휴먼매직체" panose="02030504000101010101" pitchFamily="18" charset="-127"/>
-                <a:cs typeface="맑은 고딕 Semilight" panose="020B0502040204020203" pitchFamily="50" charset="-127"/>
-              </a:endParaRPr>
-            </a:p>
-            <a:p>
-              <a:pPr marL="342900" indent="-342900">
-                <a:buFontTx/>
-                <a:buChar char="-"/>
-              </a:pPr>
-              <a:r>
-                <a:rPr lang="en-US" altLang="ko-KR" sz="2000" dirty="0">
-                  <a:solidFill>
-                    <a:schemeClr val="bg1"/>
-                  </a:solidFill>
-                  <a:latin typeface="휴먼매직체" panose="02030504000101010101" pitchFamily="18" charset="-127"/>
-                  <a:ea typeface="휴먼매직체" panose="02030504000101010101" pitchFamily="18" charset="-127"/>
-                  <a:cs typeface="맑은 고딕 Semilight" panose="020B0502040204020203" pitchFamily="50" charset="-127"/>
-                </a:rPr>
-                <a:t>Case A</a:t>
-              </a:r>
-            </a:p>
-            <a:p>
-              <a:endParaRPr lang="en-US" altLang="ko-KR" sz="2000" dirty="0">
-                <a:solidFill>
-                  <a:schemeClr val="bg1"/>
-                </a:solidFill>
-                <a:latin typeface="휴먼매직체" panose="02030504000101010101" pitchFamily="18" charset="-127"/>
-                <a:ea typeface="휴먼매직체" panose="02030504000101010101" pitchFamily="18" charset="-127"/>
-                <a:cs typeface="맑은 고딕 Semilight" panose="020B0502040204020203" pitchFamily="50" charset="-127"/>
-              </a:endParaRPr>
-            </a:p>
-          </p:txBody>
-        </p:sp>
-        <p:sp>
-          <p:nvSpPr>
-            <p:cNvPr id="8" name="직사각형 7">
-              <a:extLst>
-                <a:ext uri="{FF2B5EF4-FFF2-40B4-BE49-F238E27FC236}">
-                  <a16:creationId xmlns:a16="http://schemas.microsoft.com/office/drawing/2014/main" id="{8753ED95-C5BE-446E-991D-A8659264038D}"/>
+                  <a16:creationId xmlns:a16="http://schemas.microsoft.com/office/drawing/2014/main" id="{69448F91-0C22-4D7B-BBBE-B277E55C464B}"/>
                 </a:ext>
               </a:extLst>
             </p:cNvPr>
@@ -6264,12 +5501,22 @@
           </p:nvSpPr>
           <p:spPr>
             <a:xfrm>
-              <a:off x="2006600" y="685800"/>
-              <a:ext cx="8178800" cy="3333750"/>
+              <a:off x="0" y="443345"/>
+              <a:ext cx="12192000" cy="5971310"/>
             </a:xfrm>
             <a:prstGeom prst="rect">
               <a:avLst/>
             </a:prstGeom>
+            <a:solidFill>
+              <a:schemeClr val="tx1">
+                <a:alpha val="75000"/>
+              </a:schemeClr>
+            </a:solidFill>
+            <a:ln>
+              <a:solidFill>
+                <a:schemeClr val="tx1"/>
+              </a:solidFill>
+            </a:ln>
           </p:spPr>
           <p:style>
             <a:lnRef idx="2">
@@ -6292,7 +5539,128 @@
             <a:lstStyle/>
             <a:p>
               <a:pPr algn="ctr"/>
-              <a:endParaRPr lang="ko-KR" altLang="en-US"/>
+              <a:endParaRPr lang="ko-KR" altLang="en-US" dirty="0"/>
+            </a:p>
+          </p:txBody>
+        </p:sp>
+        <p:sp>
+          <p:nvSpPr>
+            <p:cNvPr id="14" name="TextBox 13">
+              <a:extLst>
+                <a:ext uri="{FF2B5EF4-FFF2-40B4-BE49-F238E27FC236}">
+                  <a16:creationId xmlns:a16="http://schemas.microsoft.com/office/drawing/2014/main" id="{27977642-4D1C-4B8F-8D92-E215F58ED830}"/>
+                </a:ext>
+              </a:extLst>
+            </p:cNvPr>
+            <p:cNvSpPr txBox="1"/>
+            <p:nvPr/>
+          </p:nvSpPr>
+          <p:spPr>
+            <a:xfrm>
+              <a:off x="0" y="443345"/>
+              <a:ext cx="12192001" cy="1200329"/>
+            </a:xfrm>
+            <a:prstGeom prst="rect">
+              <a:avLst/>
+            </a:prstGeom>
+            <a:noFill/>
+          </p:spPr>
+          <p:txBody>
+            <a:bodyPr wrap="square" rtlCol="0">
+              <a:spAutoFit/>
+            </a:bodyPr>
+            <a:lstStyle/>
+            <a:p>
+              <a:r>
+                <a:rPr lang="en-US" altLang="ko-KR" sz="3200" dirty="0">
+                  <a:solidFill>
+                    <a:schemeClr val="bg1"/>
+                  </a:solidFill>
+                  <a:latin typeface="휴먼매직체" panose="02030504000101010101" pitchFamily="18" charset="-127"/>
+                  <a:ea typeface="휴먼매직체" panose="02030504000101010101" pitchFamily="18" charset="-127"/>
+                  <a:cs typeface="맑은 고딕 Semilight" panose="020B0502040204020203" pitchFamily="50" charset="-127"/>
+                </a:rPr>
+                <a:t>6. </a:t>
+              </a:r>
+              <a:r>
+                <a:rPr lang="ko-KR" altLang="en-US" sz="3200" dirty="0" err="1">
+                  <a:solidFill>
+                    <a:schemeClr val="bg1"/>
+                  </a:solidFill>
+                  <a:latin typeface="휴먼매직체" panose="02030504000101010101" pitchFamily="18" charset="-127"/>
+                  <a:ea typeface="휴먼매직체" panose="02030504000101010101" pitchFamily="18" charset="-127"/>
+                  <a:cs typeface="맑은 고딕 Semilight" panose="020B0502040204020203" pitchFamily="50" charset="-127"/>
+                </a:rPr>
+                <a:t>바이브</a:t>
+              </a:r>
+              <a:r>
+                <a:rPr lang="ko-KR" altLang="en-US" sz="3200" dirty="0">
+                  <a:solidFill>
+                    <a:schemeClr val="bg1"/>
+                  </a:solidFill>
+                  <a:latin typeface="휴먼매직체" panose="02030504000101010101" pitchFamily="18" charset="-127"/>
+                  <a:ea typeface="휴먼매직체" panose="02030504000101010101" pitchFamily="18" charset="-127"/>
+                  <a:cs typeface="맑은 고딕 Semilight" panose="020B0502040204020203" pitchFamily="50" charset="-127"/>
+                </a:rPr>
+                <a:t> </a:t>
+              </a:r>
+              <a:r>
+                <a:rPr lang="ko-KR" altLang="en-US" sz="3200" dirty="0" err="1">
+                  <a:solidFill>
+                    <a:schemeClr val="bg1"/>
+                  </a:solidFill>
+                  <a:latin typeface="휴먼매직체" panose="02030504000101010101" pitchFamily="18" charset="-127"/>
+                  <a:ea typeface="휴먼매직체" panose="02030504000101010101" pitchFamily="18" charset="-127"/>
+                  <a:cs typeface="맑은 고딕 Semilight" panose="020B0502040204020203" pitchFamily="50" charset="-127"/>
+                </a:rPr>
+                <a:t>코딩된</a:t>
+              </a:r>
+              <a:r>
+                <a:rPr lang="ko-KR" altLang="en-US" sz="3200" dirty="0">
+                  <a:solidFill>
+                    <a:schemeClr val="bg1"/>
+                  </a:solidFill>
+                  <a:latin typeface="휴먼매직체" panose="02030504000101010101" pitchFamily="18" charset="-127"/>
+                  <a:ea typeface="휴먼매직체" panose="02030504000101010101" pitchFamily="18" charset="-127"/>
+                  <a:cs typeface="맑은 고딕 Semilight" panose="020B0502040204020203" pitchFamily="50" charset="-127"/>
+                </a:rPr>
+                <a:t> 비정형 구조 재정비</a:t>
+              </a:r>
+              <a:endParaRPr lang="en-US" altLang="ko-KR" sz="3200" dirty="0">
+                <a:solidFill>
+                  <a:schemeClr val="bg1"/>
+                </a:solidFill>
+                <a:latin typeface="휴먼매직체" panose="02030504000101010101" pitchFamily="18" charset="-127"/>
+                <a:ea typeface="휴먼매직체" panose="02030504000101010101" pitchFamily="18" charset="-127"/>
+                <a:cs typeface="맑은 고딕 Semilight" panose="020B0502040204020203" pitchFamily="50" charset="-127"/>
+              </a:endParaRPr>
+            </a:p>
+            <a:p>
+              <a:pPr marL="342900" indent="-342900">
+                <a:buFontTx/>
+                <a:buChar char="-"/>
+              </a:pPr>
+              <a:r>
+                <a:rPr lang="en-US" altLang="ko-KR" sz="2000" dirty="0">
+                  <a:solidFill>
+                    <a:schemeClr val="bg1"/>
+                  </a:solidFill>
+                  <a:latin typeface="휴먼매직체" panose="02030504000101010101" pitchFamily="18" charset="-127"/>
+                  <a:ea typeface="휴먼매직체" panose="02030504000101010101" pitchFamily="18" charset="-127"/>
+                  <a:cs typeface="맑은 고딕 Semilight" panose="020B0502040204020203" pitchFamily="50" charset="-127"/>
+                </a:rPr>
+                <a:t>Case A</a:t>
+              </a:r>
+            </a:p>
+            <a:p>
+              <a:endParaRPr lang="en-US" altLang="ko-KR" sz="2000" dirty="0">
+                <a:solidFill>
+                  <a:schemeClr val="bg1"/>
+                </a:solidFill>
+                <a:latin typeface="휴먼매직체" panose="02030504000101010101" pitchFamily="18" charset="-127"/>
+                <a:ea typeface="휴먼매직체" panose="02030504000101010101" pitchFamily="18" charset="-127"/>
+                <a:cs typeface="맑은 고딕 Semilight" panose="020B0502040204020203" pitchFamily="50" charset="-127"/>
+              </a:endParaRPr>
             </a:p>
           </p:txBody>
         </p:sp>
@@ -6342,68 +5710,12 @@
           <a:chExt cx="0" cy="0"/>
         </a:xfrm>
       </p:grpSpPr>
-      <p:sp>
-        <p:nvSpPr>
-          <p:cNvPr id="7" name="직사각형 6">
-            <a:extLst>
-              <a:ext uri="{FF2B5EF4-FFF2-40B4-BE49-F238E27FC236}">
-                <a16:creationId xmlns:a16="http://schemas.microsoft.com/office/drawing/2014/main" id="{FAF039C7-1241-4A3A-A71D-134FBDB4F443}"/>
-              </a:ext>
-            </a:extLst>
-          </p:cNvPr>
-          <p:cNvSpPr/>
-          <p:nvPr/>
-        </p:nvSpPr>
-        <p:spPr>
-          <a:xfrm>
-            <a:off x="1611085" y="0"/>
-            <a:ext cx="8969830" cy="6072187"/>
-          </a:xfrm>
-          <a:prstGeom prst="rect">
-            <a:avLst/>
-          </a:prstGeom>
-          <a:solidFill>
-            <a:schemeClr val="tx1">
-              <a:alpha val="75000"/>
-            </a:schemeClr>
-          </a:solidFill>
-          <a:ln>
-            <a:solidFill>
-              <a:schemeClr val="tx1"/>
-            </a:solidFill>
-          </a:ln>
-        </p:spPr>
-        <p:style>
-          <a:lnRef idx="2">
-            <a:schemeClr val="accent1">
-              <a:shade val="50000"/>
-            </a:schemeClr>
-          </a:lnRef>
-          <a:fillRef idx="1">
-            <a:schemeClr val="accent1"/>
-          </a:fillRef>
-          <a:effectRef idx="0">
-            <a:schemeClr val="accent1"/>
-          </a:effectRef>
-          <a:fontRef idx="minor">
-            <a:schemeClr val="lt1"/>
-          </a:fontRef>
-        </p:style>
-        <p:txBody>
-          <a:bodyPr rtlCol="0" anchor="ctr"/>
-          <a:lstStyle/>
-          <a:p>
-            <a:pPr algn="ctr"/>
-            <a:endParaRPr lang="ko-KR" altLang="en-US" dirty="0"/>
-          </a:p>
-        </p:txBody>
-      </p:sp>
       <p:grpSp>
         <p:nvGrpSpPr>
-          <p:cNvPr id="5" name="그룹 4">
-            <a:extLst>
-              <a:ext uri="{FF2B5EF4-FFF2-40B4-BE49-F238E27FC236}">
-                <a16:creationId xmlns:a16="http://schemas.microsoft.com/office/drawing/2014/main" id="{70C1E284-B286-4759-B533-9EDA51820DD6}"/>
+          <p:cNvPr id="12" name="그룹 11">
+            <a:extLst>
+              <a:ext uri="{FF2B5EF4-FFF2-40B4-BE49-F238E27FC236}">
+                <a16:creationId xmlns:a16="http://schemas.microsoft.com/office/drawing/2014/main" id="{1B67842D-BD80-4377-BFFA-C07823728D70}"/>
               </a:ext>
             </a:extLst>
           </p:cNvPr>
@@ -6412,219 +5724,18 @@
         </p:nvGrpSpPr>
         <p:grpSpPr>
           <a:xfrm>
-            <a:off x="1611085" y="0"/>
-            <a:ext cx="8969830" cy="4893647"/>
-            <a:chOff x="1611085" y="0"/>
-            <a:chExt cx="8969830" cy="4893647"/>
+            <a:off x="0" y="443345"/>
+            <a:ext cx="12192001" cy="5971310"/>
+            <a:chOff x="0" y="443345"/>
+            <a:chExt cx="12192001" cy="5971310"/>
           </a:xfrm>
         </p:grpSpPr>
         <p:sp>
           <p:nvSpPr>
-            <p:cNvPr id="6" name="TextBox 5">
+            <p:cNvPr id="13" name="직사각형 12">
               <a:extLst>
                 <a:ext uri="{FF2B5EF4-FFF2-40B4-BE49-F238E27FC236}">
-                  <a16:creationId xmlns:a16="http://schemas.microsoft.com/office/drawing/2014/main" id="{EF92DCB2-5190-4F11-9111-48C6F38383B4}"/>
-                </a:ext>
-              </a:extLst>
-            </p:cNvPr>
-            <p:cNvSpPr txBox="1"/>
-            <p:nvPr/>
-          </p:nvSpPr>
-          <p:spPr>
-            <a:xfrm>
-              <a:off x="1611085" y="0"/>
-              <a:ext cx="8969830" cy="4893647"/>
-            </a:xfrm>
-            <a:prstGeom prst="rect">
-              <a:avLst/>
-            </a:prstGeom>
-            <a:noFill/>
-          </p:spPr>
-          <p:txBody>
-            <a:bodyPr wrap="square" rtlCol="0">
-              <a:spAutoFit/>
-            </a:bodyPr>
-            <a:lstStyle/>
-            <a:p>
-              <a:r>
-                <a:rPr lang="en-US" altLang="ko-KR" sz="3000" dirty="0">
-                  <a:solidFill>
-                    <a:schemeClr val="bg1"/>
-                  </a:solidFill>
-                  <a:latin typeface="휴먼매직체" panose="02030504000101010101" pitchFamily="18" charset="-127"/>
-                  <a:ea typeface="휴먼매직체" panose="02030504000101010101" pitchFamily="18" charset="-127"/>
-                  <a:cs typeface="맑은 고딕 Semilight" panose="020B0502040204020203" pitchFamily="50" charset="-127"/>
-                </a:rPr>
-                <a:t>6. </a:t>
-              </a:r>
-              <a:r>
-                <a:rPr lang="ko-KR" altLang="en-US" sz="3200" dirty="0" err="1">
-                  <a:solidFill>
-                    <a:schemeClr val="bg1"/>
-                  </a:solidFill>
-                  <a:latin typeface="휴먼매직체" panose="02030504000101010101" pitchFamily="18" charset="-127"/>
-                  <a:ea typeface="휴먼매직체" panose="02030504000101010101" pitchFamily="18" charset="-127"/>
-                  <a:cs typeface="맑은 고딕 Semilight" panose="020B0502040204020203" pitchFamily="50" charset="-127"/>
-                </a:rPr>
-                <a:t>바이브</a:t>
-              </a:r>
-              <a:r>
-                <a:rPr lang="ko-KR" altLang="en-US" sz="3200" dirty="0">
-                  <a:solidFill>
-                    <a:schemeClr val="bg1"/>
-                  </a:solidFill>
-                  <a:latin typeface="휴먼매직체" panose="02030504000101010101" pitchFamily="18" charset="-127"/>
-                  <a:ea typeface="휴먼매직체" panose="02030504000101010101" pitchFamily="18" charset="-127"/>
-                  <a:cs typeface="맑은 고딕 Semilight" panose="020B0502040204020203" pitchFamily="50" charset="-127"/>
-                </a:rPr>
-                <a:t> </a:t>
-              </a:r>
-              <a:r>
-                <a:rPr lang="ko-KR" altLang="en-US" sz="3200" dirty="0" err="1">
-                  <a:solidFill>
-                    <a:schemeClr val="bg1"/>
-                  </a:solidFill>
-                  <a:latin typeface="휴먼매직체" panose="02030504000101010101" pitchFamily="18" charset="-127"/>
-                  <a:ea typeface="휴먼매직체" panose="02030504000101010101" pitchFamily="18" charset="-127"/>
-                  <a:cs typeface="맑은 고딕 Semilight" panose="020B0502040204020203" pitchFamily="50" charset="-127"/>
-                </a:rPr>
-                <a:t>코딩된</a:t>
-              </a:r>
-              <a:r>
-                <a:rPr lang="ko-KR" altLang="en-US" sz="3200" dirty="0">
-                  <a:solidFill>
-                    <a:schemeClr val="bg1"/>
-                  </a:solidFill>
-                  <a:latin typeface="휴먼매직체" panose="02030504000101010101" pitchFamily="18" charset="-127"/>
-                  <a:ea typeface="휴먼매직체" panose="02030504000101010101" pitchFamily="18" charset="-127"/>
-                  <a:cs typeface="맑은 고딕 Semilight" panose="020B0502040204020203" pitchFamily="50" charset="-127"/>
-                </a:rPr>
-                <a:t> 비정형 구조 재정비</a:t>
-              </a:r>
-              <a:endParaRPr lang="en-US" altLang="ko-KR" sz="3000" dirty="0">
-                <a:solidFill>
-                  <a:schemeClr val="bg1"/>
-                </a:solidFill>
-                <a:latin typeface="휴먼매직체" panose="02030504000101010101" pitchFamily="18" charset="-127"/>
-                <a:ea typeface="휴먼매직체" panose="02030504000101010101" pitchFamily="18" charset="-127"/>
-                <a:cs typeface="맑은 고딕 Semilight" panose="020B0502040204020203" pitchFamily="50" charset="-127"/>
-              </a:endParaRPr>
-            </a:p>
-            <a:p>
-              <a:endParaRPr lang="en-US" altLang="ko-KR" sz="3000" dirty="0">
-                <a:solidFill>
-                  <a:schemeClr val="bg1"/>
-                </a:solidFill>
-                <a:latin typeface="휴먼매직체" panose="02030504000101010101" pitchFamily="18" charset="-127"/>
-                <a:ea typeface="휴먼매직체" panose="02030504000101010101" pitchFamily="18" charset="-127"/>
-                <a:cs typeface="맑은 고딕 Semilight" panose="020B0502040204020203" pitchFamily="50" charset="-127"/>
-              </a:endParaRPr>
-            </a:p>
-            <a:p>
-              <a:endParaRPr lang="en-US" altLang="ko-KR" sz="3000" dirty="0">
-                <a:solidFill>
-                  <a:schemeClr val="bg1"/>
-                </a:solidFill>
-                <a:latin typeface="휴먼매직체" panose="02030504000101010101" pitchFamily="18" charset="-127"/>
-                <a:ea typeface="휴먼매직체" panose="02030504000101010101" pitchFamily="18" charset="-127"/>
-                <a:cs typeface="맑은 고딕 Semilight" panose="020B0502040204020203" pitchFamily="50" charset="-127"/>
-              </a:endParaRPr>
-            </a:p>
-            <a:p>
-              <a:endParaRPr lang="en-US" altLang="ko-KR" sz="3000" dirty="0">
-                <a:solidFill>
-                  <a:schemeClr val="bg1"/>
-                </a:solidFill>
-                <a:latin typeface="휴먼매직체" panose="02030504000101010101" pitchFamily="18" charset="-127"/>
-                <a:ea typeface="휴먼매직체" panose="02030504000101010101" pitchFamily="18" charset="-127"/>
-                <a:cs typeface="맑은 고딕 Semilight" panose="020B0502040204020203" pitchFamily="50" charset="-127"/>
-              </a:endParaRPr>
-            </a:p>
-            <a:p>
-              <a:endParaRPr lang="en-US" altLang="ko-KR" sz="3000" dirty="0">
-                <a:solidFill>
-                  <a:schemeClr val="bg1"/>
-                </a:solidFill>
-                <a:latin typeface="휴먼매직체" panose="02030504000101010101" pitchFamily="18" charset="-127"/>
-                <a:ea typeface="휴먼매직체" panose="02030504000101010101" pitchFamily="18" charset="-127"/>
-                <a:cs typeface="맑은 고딕 Semilight" panose="020B0502040204020203" pitchFamily="50" charset="-127"/>
-              </a:endParaRPr>
-            </a:p>
-            <a:p>
-              <a:endParaRPr lang="en-US" altLang="ko-KR" sz="3000" dirty="0">
-                <a:solidFill>
-                  <a:schemeClr val="bg1"/>
-                </a:solidFill>
-                <a:latin typeface="휴먼매직체" panose="02030504000101010101" pitchFamily="18" charset="-127"/>
-                <a:ea typeface="휴먼매직체" panose="02030504000101010101" pitchFamily="18" charset="-127"/>
-                <a:cs typeface="맑은 고딕 Semilight" panose="020B0502040204020203" pitchFamily="50" charset="-127"/>
-              </a:endParaRPr>
-            </a:p>
-            <a:p>
-              <a:endParaRPr lang="en-US" altLang="ko-KR" sz="3000" dirty="0">
-                <a:solidFill>
-                  <a:schemeClr val="bg1"/>
-                </a:solidFill>
-                <a:latin typeface="휴먼매직체" panose="02030504000101010101" pitchFamily="18" charset="-127"/>
-                <a:ea typeface="휴먼매직체" panose="02030504000101010101" pitchFamily="18" charset="-127"/>
-                <a:cs typeface="맑은 고딕 Semilight" panose="020B0502040204020203" pitchFamily="50" charset="-127"/>
-              </a:endParaRPr>
-            </a:p>
-            <a:p>
-              <a:endParaRPr lang="en-US" altLang="ko-KR" sz="3000" dirty="0">
-                <a:solidFill>
-                  <a:schemeClr val="bg1"/>
-                </a:solidFill>
-                <a:latin typeface="휴먼매직체" panose="02030504000101010101" pitchFamily="18" charset="-127"/>
-                <a:ea typeface="휴먼매직체" panose="02030504000101010101" pitchFamily="18" charset="-127"/>
-                <a:cs typeface="맑은 고딕 Semilight" panose="020B0502040204020203" pitchFamily="50" charset="-127"/>
-              </a:endParaRPr>
-            </a:p>
-            <a:p>
-              <a:endParaRPr lang="en-US" altLang="ko-KR" sz="3000" dirty="0">
-                <a:solidFill>
-                  <a:schemeClr val="bg1"/>
-                </a:solidFill>
-                <a:latin typeface="휴먼매직체" panose="02030504000101010101" pitchFamily="18" charset="-127"/>
-                <a:ea typeface="휴먼매직체" panose="02030504000101010101" pitchFamily="18" charset="-127"/>
-                <a:cs typeface="맑은 고딕 Semilight" panose="020B0502040204020203" pitchFamily="50" charset="-127"/>
-              </a:endParaRPr>
-            </a:p>
-            <a:p>
-              <a:pPr marL="342900" indent="-342900">
-                <a:buFontTx/>
-                <a:buChar char="-"/>
-              </a:pPr>
-              <a:r>
-                <a:rPr lang="en-US" altLang="ko-KR" sz="2000" dirty="0">
-                  <a:solidFill>
-                    <a:schemeClr val="bg1"/>
-                  </a:solidFill>
-                  <a:latin typeface="휴먼매직체" panose="02030504000101010101" pitchFamily="18" charset="-127"/>
-                  <a:ea typeface="휴먼매직체" panose="02030504000101010101" pitchFamily="18" charset="-127"/>
-                  <a:cs typeface="맑은 고딕 Semilight" panose="020B0502040204020203" pitchFamily="50" charset="-127"/>
-                </a:rPr>
-                <a:t>Case B</a:t>
-              </a:r>
-            </a:p>
-            <a:p>
-              <a:endParaRPr lang="en-US" altLang="ko-KR" sz="2000" dirty="0">
-                <a:solidFill>
-                  <a:schemeClr val="bg1"/>
-                </a:solidFill>
-                <a:latin typeface="휴먼매직체" panose="02030504000101010101" pitchFamily="18" charset="-127"/>
-                <a:ea typeface="휴먼매직체" panose="02030504000101010101" pitchFamily="18" charset="-127"/>
-                <a:cs typeface="맑은 고딕 Semilight" panose="020B0502040204020203" pitchFamily="50" charset="-127"/>
-              </a:endParaRPr>
-            </a:p>
-          </p:txBody>
-        </p:sp>
-        <p:sp>
-          <p:nvSpPr>
-            <p:cNvPr id="8" name="직사각형 7">
-              <a:extLst>
-                <a:ext uri="{FF2B5EF4-FFF2-40B4-BE49-F238E27FC236}">
-                  <a16:creationId xmlns:a16="http://schemas.microsoft.com/office/drawing/2014/main" id="{8753ED95-C5BE-446E-991D-A8659264038D}"/>
+                  <a16:creationId xmlns:a16="http://schemas.microsoft.com/office/drawing/2014/main" id="{666A05CC-1766-43DF-806D-B2882157523D}"/>
                 </a:ext>
               </a:extLst>
             </p:cNvPr>
@@ -6633,12 +5744,22 @@
           </p:nvSpPr>
           <p:spPr>
             <a:xfrm>
-              <a:off x="2006600" y="685800"/>
-              <a:ext cx="8178800" cy="3333750"/>
+              <a:off x="0" y="443345"/>
+              <a:ext cx="12192000" cy="5971310"/>
             </a:xfrm>
             <a:prstGeom prst="rect">
               <a:avLst/>
             </a:prstGeom>
+            <a:solidFill>
+              <a:schemeClr val="tx1">
+                <a:alpha val="75000"/>
+              </a:schemeClr>
+            </a:solidFill>
+            <a:ln>
+              <a:solidFill>
+                <a:schemeClr val="tx1"/>
+              </a:solidFill>
+            </a:ln>
           </p:spPr>
           <p:style>
             <a:lnRef idx="2">
@@ -6661,7 +5782,128 @@
             <a:lstStyle/>
             <a:p>
               <a:pPr algn="ctr"/>
-              <a:endParaRPr lang="ko-KR" altLang="en-US"/>
+              <a:endParaRPr lang="ko-KR" altLang="en-US" dirty="0"/>
+            </a:p>
+          </p:txBody>
+        </p:sp>
+        <p:sp>
+          <p:nvSpPr>
+            <p:cNvPr id="14" name="TextBox 13">
+              <a:extLst>
+                <a:ext uri="{FF2B5EF4-FFF2-40B4-BE49-F238E27FC236}">
+                  <a16:creationId xmlns:a16="http://schemas.microsoft.com/office/drawing/2014/main" id="{E218B953-F48C-473E-AB02-C415949C2C24}"/>
+                </a:ext>
+              </a:extLst>
+            </p:cNvPr>
+            <p:cNvSpPr txBox="1"/>
+            <p:nvPr/>
+          </p:nvSpPr>
+          <p:spPr>
+            <a:xfrm>
+              <a:off x="0" y="443345"/>
+              <a:ext cx="12192001" cy="1200329"/>
+            </a:xfrm>
+            <a:prstGeom prst="rect">
+              <a:avLst/>
+            </a:prstGeom>
+            <a:noFill/>
+          </p:spPr>
+          <p:txBody>
+            <a:bodyPr wrap="square" rtlCol="0">
+              <a:spAutoFit/>
+            </a:bodyPr>
+            <a:lstStyle/>
+            <a:p>
+              <a:r>
+                <a:rPr lang="en-US" altLang="ko-KR" sz="3200" dirty="0">
+                  <a:solidFill>
+                    <a:schemeClr val="bg1"/>
+                  </a:solidFill>
+                  <a:latin typeface="휴먼매직체" panose="02030504000101010101" pitchFamily="18" charset="-127"/>
+                  <a:ea typeface="휴먼매직체" panose="02030504000101010101" pitchFamily="18" charset="-127"/>
+                  <a:cs typeface="맑은 고딕 Semilight" panose="020B0502040204020203" pitchFamily="50" charset="-127"/>
+                </a:rPr>
+                <a:t>6. </a:t>
+              </a:r>
+              <a:r>
+                <a:rPr lang="ko-KR" altLang="en-US" sz="3200" dirty="0" err="1">
+                  <a:solidFill>
+                    <a:schemeClr val="bg1"/>
+                  </a:solidFill>
+                  <a:latin typeface="휴먼매직체" panose="02030504000101010101" pitchFamily="18" charset="-127"/>
+                  <a:ea typeface="휴먼매직체" panose="02030504000101010101" pitchFamily="18" charset="-127"/>
+                  <a:cs typeface="맑은 고딕 Semilight" panose="020B0502040204020203" pitchFamily="50" charset="-127"/>
+                </a:rPr>
+                <a:t>바이브</a:t>
+              </a:r>
+              <a:r>
+                <a:rPr lang="ko-KR" altLang="en-US" sz="3200" dirty="0">
+                  <a:solidFill>
+                    <a:schemeClr val="bg1"/>
+                  </a:solidFill>
+                  <a:latin typeface="휴먼매직체" panose="02030504000101010101" pitchFamily="18" charset="-127"/>
+                  <a:ea typeface="휴먼매직체" panose="02030504000101010101" pitchFamily="18" charset="-127"/>
+                  <a:cs typeface="맑은 고딕 Semilight" panose="020B0502040204020203" pitchFamily="50" charset="-127"/>
+                </a:rPr>
+                <a:t> </a:t>
+              </a:r>
+              <a:r>
+                <a:rPr lang="ko-KR" altLang="en-US" sz="3200" dirty="0" err="1">
+                  <a:solidFill>
+                    <a:schemeClr val="bg1"/>
+                  </a:solidFill>
+                  <a:latin typeface="휴먼매직체" panose="02030504000101010101" pitchFamily="18" charset="-127"/>
+                  <a:ea typeface="휴먼매직체" panose="02030504000101010101" pitchFamily="18" charset="-127"/>
+                  <a:cs typeface="맑은 고딕 Semilight" panose="020B0502040204020203" pitchFamily="50" charset="-127"/>
+                </a:rPr>
+                <a:t>코딩된</a:t>
+              </a:r>
+              <a:r>
+                <a:rPr lang="ko-KR" altLang="en-US" sz="3200" dirty="0">
+                  <a:solidFill>
+                    <a:schemeClr val="bg1"/>
+                  </a:solidFill>
+                  <a:latin typeface="휴먼매직체" panose="02030504000101010101" pitchFamily="18" charset="-127"/>
+                  <a:ea typeface="휴먼매직체" panose="02030504000101010101" pitchFamily="18" charset="-127"/>
+                  <a:cs typeface="맑은 고딕 Semilight" panose="020B0502040204020203" pitchFamily="50" charset="-127"/>
+                </a:rPr>
+                <a:t> 비정형 구조 재정비</a:t>
+              </a:r>
+              <a:endParaRPr lang="en-US" altLang="ko-KR" sz="3200" dirty="0">
+                <a:solidFill>
+                  <a:schemeClr val="bg1"/>
+                </a:solidFill>
+                <a:latin typeface="휴먼매직체" panose="02030504000101010101" pitchFamily="18" charset="-127"/>
+                <a:ea typeface="휴먼매직체" panose="02030504000101010101" pitchFamily="18" charset="-127"/>
+                <a:cs typeface="맑은 고딕 Semilight" panose="020B0502040204020203" pitchFamily="50" charset="-127"/>
+              </a:endParaRPr>
+            </a:p>
+            <a:p>
+              <a:pPr marL="342900" indent="-342900">
+                <a:buFontTx/>
+                <a:buChar char="-"/>
+              </a:pPr>
+              <a:r>
+                <a:rPr lang="en-US" altLang="ko-KR" sz="2000" dirty="0">
+                  <a:solidFill>
+                    <a:schemeClr val="bg1"/>
+                  </a:solidFill>
+                  <a:latin typeface="휴먼매직체" panose="02030504000101010101" pitchFamily="18" charset="-127"/>
+                  <a:ea typeface="휴먼매직체" panose="02030504000101010101" pitchFamily="18" charset="-127"/>
+                  <a:cs typeface="맑은 고딕 Semilight" panose="020B0502040204020203" pitchFamily="50" charset="-127"/>
+                </a:rPr>
+                <a:t>Case B</a:t>
+              </a:r>
+            </a:p>
+            <a:p>
+              <a:endParaRPr lang="en-US" altLang="ko-KR" sz="2000" dirty="0">
+                <a:solidFill>
+                  <a:schemeClr val="bg1"/>
+                </a:solidFill>
+                <a:latin typeface="휴먼매직체" panose="02030504000101010101" pitchFamily="18" charset="-127"/>
+                <a:ea typeface="휴먼매직체" panose="02030504000101010101" pitchFamily="18" charset="-127"/>
+                <a:cs typeface="맑은 고딕 Semilight" panose="020B0502040204020203" pitchFamily="50" charset="-127"/>
+              </a:endParaRPr>
             </a:p>
           </p:txBody>
         </p:sp>
